--- a/presentations/2026-vlla/deck/zest-vlla-2026.pptx
+++ b/presentations/2026-vlla/deck/zest-vlla-2026.pptx
@@ -32,6 +32,7 @@
     <p:sldId id="302" r:id="rId54"/>
     <p:sldId id="303" r:id="rId55"/>
     <p:sldId id="304" r:id="rId56"/>
+    <p:sldId id="305" r:id="rId57"/>
   </p:sldIdLst>
   <p:sldSz cy="5143500" cx="9144000"/>
   <p:notesSz cx="6858000" cy="9144000"/>
@@ -818,23 +819,46 @@
           <a:lstStyle/>
           <a:p>
             <a:r>
-              <a:t>TIME: 1:00 (clock 14:00)</a:t>
+              <a:t>TIME: 1:00 (clock 13:30)</a:t>
             </a:r>
           </a:p>
           <a:p/>
           <a:p>
             <a:r>
-              <a:t>- Each course can set up the same zest differently. For keyboarding, that's a different passage.</a:t>
+              <a:t>This is the part teachers like most. Canvas SpeedGrader normally shows a file or a text box. With Zest, every activity can bring its own page for SpeedGrader, so the teacher sees the actual work.</a:t>
+            </a:r>
+          </a:p>
+          <a:p/>
+          <a:p>
+            <a:r>
+              <a:t>[CLICK] Launch Lab: every shot the student took, drawn on one field.</a:t>
             </a:r>
           </a:p>
           <a:p>
             <a:r>
-              <a:t>- When we found a bug, we fixed the package once and updated every copy at once. No broken links, and no student lost any work.</a:t>
+              <a:t>[CLICK] Graph Match: the student's curve on top of the target, for each graph.</a:t>
             </a:r>
           </a:p>
           <a:p>
             <a:r>
-              <a:t>- It works on managed Chromebooks that block third-party cookies. That one took some doing.</a:t>
+              <a:t>[CLICK] Sketch &amp; Label: the drawing, with a replay of how they drew it.</a:t>
+            </a:r>
+          </a:p>
+          <a:p>
+            <a:r>
+              <a:t>[CLICK] Escape the Archive: a timeline of every wrong try and hint.</a:t>
+            </a:r>
+          </a:p>
+          <a:p/>
+          <a:p>
+            <a:r>
+              <a:t>The AI builds these too. In the prompt for Sketch &amp; Label, the teacher just said "in SpeedGrader I want to see their drawing and watch how they drew it."</a:t>
+            </a:r>
+          </a:p>
+          <a:p/>
+          <a:p>
+            <a:r>
+              <a:t>[Kyle: once the zests are on your sandbox, a screenshot of one of these inside real Canvas SpeedGrader would be the strongest image for this slide.]</a:t>
             </a:r>
           </a:p>
         </p:txBody>
@@ -892,13 +916,23 @@
           <a:lstStyle/>
           <a:p>
             <a:r>
-              <a:t>TIME: 0:20 (clock 14:20)</a:t>
+              <a:t>TIME: 1:00 (clock 14:30)</a:t>
             </a:r>
           </a:p>
           <a:p/>
           <a:p>
             <a:r>
-              <a:t>So what else can you make? Every one of these came from a prompt, the same way you saw in the recording. They're on my sandbox. The next four slides have QR codes, so try them on your phone while I talk. On a phone they open in a preview mode, so nothing gets saved.</a:t>
+              <a:t>[CLICK] Each course can set up the same zest differently. For keyboarding, that's a different passage.</a:t>
+            </a:r>
+          </a:p>
+          <a:p>
+            <a:r>
+              <a:t>[CLICK] When we found a bug, we fixed the package once and updated every copy at once. No broken links, and no student lost any work.</a:t>
+            </a:r>
+          </a:p>
+          <a:p>
+            <a:r>
+              <a:t>[CLICK] It works on managed Chromebooks that block third-party cookies. That one took some doing.</a:t>
             </a:r>
           </a:p>
         </p:txBody>
@@ -956,25 +990,13 @@
           <a:lstStyle/>
           <a:p>
             <a:r>
-              <a:t>TIME: 1:10 (clock 15:30)</a:t>
+              <a:t>TIME: 0:20 (clock 14:50)</a:t>
             </a:r>
           </a:p>
           <a:p/>
           <a:p>
             <a:r>
-              <a:t>Launch Lab. Physics.</a:t>
-            </a:r>
-          </a:p>
-          <a:p/>
-          <a:p>
-            <a:r>
-              <a:t>The prompt is on the slide. Students lock in a predicted angle, then take one scored launch. After that they can take practice shots. A lot of them discover that two different angles hit the same target, which is a nice conversation starter.</a:t>
-            </a:r>
-          </a:p>
-          <a:p/>
-          <a:p>
-            <a:r>
-              <a:t>The teacher sets the target distances, the launch speed and how close counts as a hit. It's auto-graded. In SpeedGrader the teacher sees every scored shot drawn on one field.</a:t>
+              <a:t>So what else can you make? Every one of these came from a prompt, the same way you saw in the recording. They're on my sandbox. The next four slides have QR codes, so try them on your phone while I talk. On a phone they open in a preview mode, so nothing gets saved.</a:t>
             </a:r>
           </a:p>
         </p:txBody>
@@ -1032,25 +1054,31 @@
           <a:lstStyle/>
           <a:p>
             <a:r>
-              <a:t>TIME: 1:10 (clock 16:40)</a:t>
+              <a:t>TIME: 1:05 (clock 15:55)</a:t>
             </a:r>
           </a:p>
           <a:p/>
           <a:p>
             <a:r>
-              <a:t>Graph Match. Algebra 2.</a:t>
+              <a:t>Launch Lab. Physics.</a:t>
             </a:r>
           </a:p>
           <a:p/>
           <a:p>
             <a:r>
-              <a:t>Students move a, h and k until their curve covers the target. The equation updates as they go.</a:t>
+              <a:t>Same sentence as the recording. This time I answered a few follow-up questions: five rounds, practice shots after each scored one, and settings for the targets, launch speed and how close counts as a hit. That's the difference between this one and the one you saw built.</a:t>
             </a:r>
           </a:p>
           <a:p/>
           <a:p>
             <a:r>
-              <a:t>The part I want you to notice: the teacher picks the target functions on a settings page. The AI built that settings page too, from "I want to pick the target functions myself." One package, set up differently for each class.</a:t>
+              <a:t>Students lock in a predicted angle, then take one scored launch. After that they can take practice shots. A lot of them discover that two different angles hit the same target, which is a nice conversation starter.</a:t>
+            </a:r>
+          </a:p>
+          <a:p/>
+          <a:p>
+            <a:r>
+              <a:t>[CLICK] And this is what the teacher sees in SpeedGrader: every scored shot drawn on one field, and a table of each round.</a:t>
             </a:r>
           </a:p>
         </p:txBody>
@@ -1108,31 +1136,31 @@
           <a:lstStyle/>
           <a:p>
             <a:r>
-              <a:t>TIME: 1:10 (clock 17:50)</a:t>
+              <a:t>TIME: 1:05 (clock 17:00)</a:t>
             </a:r>
           </a:p>
           <a:p/>
           <a:p>
             <a:r>
-              <a:t>Sketch and Label. Life science. This one is teacher-graded.</a:t>
+              <a:t>Graph Match. Algebra 2.</a:t>
             </a:r>
           </a:p>
           <a:p/>
           <a:p>
             <a:r>
-              <a:t>Students draw arrows and write labels right on a plant cell, then explain what the chloroplast does.</a:t>
+              <a:t>Students move a, h and k until their curve covers the target. The equation updates as they go.</a:t>
             </a:r>
           </a:p>
           <a:p/>
           <a:p>
             <a:r>
-              <a:t>In SpeedGrader, the teacher can replay the drawing, stroke by stroke, and see how the student got there, including what they erased. On your phone, if you submit in preview, you can watch your own replay.</a:t>
+              <a:t>The part I want you to notice: the teacher picks the target functions on a settings page. The AI built that settings page too, from "I want to pick the target functions myself." One package, set up differently for each class.</a:t>
             </a:r>
           </a:p>
           <a:p/>
           <a:p>
             <a:r>
-              <a:t>(Two things the AI added that the prompt didn't ask for, and we kept: label suggestions while typing, and the replay link after a preview submit.)</a:t>
+              <a:t>[CLICK] In SpeedGrader: each graph, with the student's curve on top of the target.</a:t>
             </a:r>
           </a:p>
         </p:txBody>
@@ -1190,25 +1218,31 @@
           <a:lstStyle/>
           <a:p>
             <a:r>
-              <a:t>TIME: 1:10 (clock 19:00)</a:t>
+              <a:t>TIME: 1:05 (clock 18:05)</a:t>
             </a:r>
           </a:p>
           <a:p/>
           <a:p>
             <a:r>
-              <a:t>Escape the Archive. U.S. History.</a:t>
+              <a:t>Sketch and Label. Life science. This one is teacher-graded.</a:t>
             </a:r>
           </a:p>
           <a:p/>
           <a:p>
             <a:r>
-              <a:t>Four locks, each opened with a clue from a primary source. One of them is the Little Rock Nine, and the lock quotes President Eisenhower's September 1957 address.</a:t>
+              <a:t>Students draw arrows and write labels right on a plant cell, then explain what the chloroplast does.</a:t>
             </a:r>
           </a:p>
           <a:p/>
           <a:p>
             <a:r>
-              <a:t>Hints cost points, and the teacher can turn them off. SpeedGrader shows a timeline of every wrong try and hint, so you can see where a student got stuck.</a:t>
+              <a:t>[CLICK] In SpeedGrader, the teacher can replay the drawing, stroke by stroke, and see how the student got there, including what they erased. On your phone, if you submit in preview, you can watch your own replay.</a:t>
+            </a:r>
+          </a:p>
+          <a:p/>
+          <a:p>
+            <a:r>
+              <a:t>(Two things the AI added that the prompt didn't ask for, and we kept: label suggestions while typing, and the replay link after a preview submit.)</a:t>
             </a:r>
           </a:p>
         </p:txBody>
@@ -1266,40 +1300,31 @@
           <a:lstStyle/>
           <a:p>
             <a:r>
-              <a:t>TIME: 0:45 (clock 19:45)</a:t>
+              <a:t>TIME: 1:05 (clock 19:10)</a:t>
             </a:r>
           </a:p>
           <a:p/>
           <a:p>
             <a:r>
-              <a:t>Why build it ourselves instead of buying something?</a:t>
+              <a:t>Escape the Archive. U.S. History.</a:t>
             </a:r>
           </a:p>
           <a:p/>
           <a:p>
             <a:r>
-              <a:t>- We needed the grades and the student's work inside Canvas, not in another tool.</a:t>
-            </a:r>
-          </a:p>
-          <a:p>
-            <a:r>
-              <a:t>- Student data stays on our server.</a:t>
-            </a:r>
-          </a:p>
-          <a:p>
-            <a:r>
-              <a:t>- No per-seat license.</a:t>
-            </a:r>
-          </a:p>
-          <a:p>
-            <a:r>
-              <a:t>- We already had content that needed a home.</a:t>
+              <a:t>Four locks, each opened with a clue from a primary source. One of them is the Little Rock Nine, and the lock quotes President Eisenhower's September 1957 address.</a:t>
             </a:r>
           </a:p>
           <a:p/>
           <a:p>
             <a:r>
-              <a:t>[Kyle: replace with your real reasons.]</a:t>
+              <a:t>Hints cost points, and the teacher can turn them off or set a time limit.</a:t>
+            </a:r>
+          </a:p>
+          <a:p/>
+          <a:p>
+            <a:r>
+              <a:t>[CLICK] SpeedGrader shows a timeline of every wrong try and hint, so you can see where a student got stuck.</a:t>
             </a:r>
           </a:p>
         </p:txBody>
@@ -1357,37 +1382,40 @@
           <a:lstStyle/>
           <a:p>
             <a:r>
-              <a:t>TIME: 1:30 (clock 21:15)</a:t>
+              <a:t>TIME: 0:45 (clock 19:55)</a:t>
             </a:r>
           </a:p>
           <a:p/>
           <a:p>
             <a:r>
-              <a:t>This is the part I want you to take home.</a:t>
+              <a:t>Why build it ourselves instead of buying something?</a:t>
             </a:r>
           </a:p>
           <a:p/>
           <a:p>
             <a:r>
-              <a:t>A zest is one file. Any program running Zest can upload it, and grading and review work the same way on their server. Your keyboarding activity can be my keyboarding activity.</a:t>
+              <a:t>[CLICK] We needed the grades and the student's work inside Canvas, not in another tool.</a:t>
+            </a:r>
+          </a:p>
+          <a:p>
+            <a:r>
+              <a:t>[CLICK] Student data stays on our server.</a:t>
+            </a:r>
+          </a:p>
+          <a:p>
+            <a:r>
+              <a:t>[CLICK] No per-seat license.</a:t>
+            </a:r>
+          </a:p>
+          <a:p>
+            <a:r>
+              <a:t>[CLICK] We already had content that needed a home.</a:t>
             </a:r>
           </a:p>
           <a:p/>
           <a:p>
             <a:r>
-              <a:t>We wrote the package format down in a published specification so that stays true, and the zest-creator template you saw in the recording is public, so anyone can build them.</a:t>
-            </a:r>
-          </a:p>
-          <a:p/>
-          <a:p>
-            <a:r>
-              <a:t>Picture a shared library of gradable activities across virtual programs. That's where I'd like this to go.</a:t>
-            </a:r>
-          </a:p>
-          <a:p/>
-          <a:p>
-            <a:r>
-              <a:t>[Kyle: decide whether to show the GitHub links for zest-spec and zest-creator.]</a:t>
+              <a:t>[Kyle: replace with your real reasons.]</a:t>
             </a:r>
           </a:p>
         </p:txBody>
@@ -1445,34 +1473,37 @@
           <a:lstStyle/>
           <a:p>
             <a:r>
-              <a:t>TIME: 0:45 (clock 22:00)</a:t>
+              <a:t>TIME: 1:30 (clock 21:25)</a:t>
             </a:r>
           </a:p>
           <a:p/>
           <a:p>
             <a:r>
-              <a:t>It wasn't all easy.</a:t>
+              <a:t>This is the part I want you to take home.</a:t>
             </a:r>
           </a:p>
           <a:p/>
           <a:p>
             <a:r>
-              <a:t>- LTI and Canvas integration was most of the work. Again.</a:t>
+              <a:t>A zest is one file. Any program running Zest can upload it, and grading and review work the same way on their server. Your keyboarding activity can be my keyboarding activity.</a:t>
             </a:r>
           </a:p>
+          <a:p/>
           <a:p>
             <a:r>
-              <a:t>- Canvas silently blocks pop-up alerts inside assignments, and assignment frames can't resize. Every zest has to be built around that.</a:t>
+              <a:t>[CLICK] We wrote the package format down in a published specification so that stays true, and the zest-creator template you saw in the recording is public, so anyone can build them.</a:t>
             </a:r>
           </a:p>
+          <a:p/>
           <a:p>
             <a:r>
-              <a:t>- Managed Chromebooks block third-party cookies, so launches had to work without them.</a:t>
+              <a:t>Picture a shared library of gradable activities across virtual programs. That's where I'd like this to go.</a:t>
             </a:r>
           </a:p>
+          <a:p/>
           <a:p>
             <a:r>
-              <a:t>- Rule number one was never lose student work. We test every change with fake teachers, students and admins going through real launches.</a:t>
+              <a:t>[Kyle: decide whether to show the GitHub links for zest-spec and zest-creator.]</a:t>
             </a:r>
           </a:p>
         </p:txBody>
@@ -1530,34 +1561,34 @@
           <a:lstStyle/>
           <a:p>
             <a:r>
-              <a:t>TIME: 1:15 (clock 23:15)</a:t>
+              <a:t>TIME: 0:45 (clock 22:10)</a:t>
             </a:r>
           </a:p>
           <a:p/>
           <a:p>
             <a:r>
-              <a:t>The fair question: can you trust what the AI made?</a:t>
+              <a:t>It wasn't all easy.</a:t>
             </a:r>
           </a:p>
           <a:p/>
           <a:p>
             <a:r>
-              <a:t>- Every package gets checked when it's built, and a separate review looks for anything that sends data out or tracks students.</a:t>
+              <a:t>[CLICK] LTI and Canvas integration was most of the work. Again.</a:t>
             </a:r>
           </a:p>
           <a:p>
             <a:r>
-              <a:t>- Zest runs every package in a sandbox, with permissions off by default.</a:t>
+              <a:t>[CLICK] Canvas silently blocks pop-up alerts inside assignments, and assignment frames can't resize. Every zest has to be built around that.</a:t>
             </a:r>
           </a:p>
           <a:p>
             <a:r>
-              <a:t>- But somebody still has to test it as a student, and a subject expert should check the content. AI can get a fact or an answer key wrong.</a:t>
+              <a:t>[CLICK] Managed Chromebooks block third-party cookies, so launches had to work without them.</a:t>
             </a:r>
           </a:p>
           <a:p>
             <a:r>
-              <a:t>- Auto-graded scores are calculated in the browser. A student who knows what they're doing could fake one. For anything high stakes, use teacher grading.</a:t>
+              <a:t>[CLICK] Rule number one was never lose student work. We test every change with fake teachers, students and admins going through real launches.</a:t>
             </a:r>
           </a:p>
         </p:txBody>
@@ -1685,33 +1716,34 @@
           <a:lstStyle/>
           <a:p>
             <a:r>
-              <a:t>TIME: 0:45 (clock 24:00)</a:t>
+              <a:t>TIME: 1:15 (clock 23:25)</a:t>
             </a:r>
           </a:p>
           <a:p/>
           <a:p>
             <a:r>
-              <a:t>What's next:</a:t>
+              <a:t>The fair question: can you trust what the AI made?</a:t>
+            </a:r>
+          </a:p>
+          <a:p/>
+          <a:p>
+            <a:r>
+              <a:t>[CLICK] Every package gets checked when it's built, and a separate review looks for anything that sends data out or tracks students.</a:t>
             </a:r>
           </a:p>
           <a:p>
             <a:r>
-              <a:t>- We're releasing the server code under the MIT license.</a:t>
+              <a:t>[CLICK] Zest runs every package in a sandbox, with permissions off by default.</a:t>
             </a:r>
           </a:p>
           <a:p>
             <a:r>
-              <a:t>- Next security step: serving packages from a separate domain.</a:t>
+              <a:t>[CLICK] But somebody still has to test it as a student, and a subject expert should check the content. AI can get a fact or an answer key wrong.</a:t>
             </a:r>
           </a:p>
           <a:p>
             <a:r>
-              <a:t>- An accessibility review. I'm not claiming WCAG conformance yet.</a:t>
-            </a:r>
-          </a:p>
-          <a:p>
-            <a:r>
-              <a:t>- Other LMSs. We've done the research on Brightspace, Schoology and Buzz, but Canvas is the only one today.</a:t>
+              <a:t>Also on that last card: auto-graded scores are calculated in the browser. A student who knows what they're doing could fake one. For anything high stakes, use teacher grading.</a:t>
             </a:r>
           </a:p>
         </p:txBody>
@@ -1769,7 +1801,91 @@
           <a:lstStyle/>
           <a:p>
             <a:r>
-              <a:t>TIME: 0:45 (clock 24:45)</a:t>
+              <a:t>TIME: 0:45 (clock 24:10)</a:t>
+            </a:r>
+          </a:p>
+          <a:p/>
+          <a:p>
+            <a:r>
+              <a:t>What's next:</a:t>
+            </a:r>
+          </a:p>
+          <a:p>
+            <a:r>
+              <a:t>[CLICK] We're releasing the server code under the MIT license.</a:t>
+            </a:r>
+          </a:p>
+          <a:p>
+            <a:r>
+              <a:t>[CLICK] Next security step: serving packages from a separate domain.</a:t>
+            </a:r>
+          </a:p>
+          <a:p>
+            <a:r>
+              <a:t>[CLICK] An accessibility review. I'm not claiming WCAG conformance yet.</a:t>
+            </a:r>
+          </a:p>
+          <a:p>
+            <a:r>
+              <a:t>[CLICK] Other LMSs. We've done the research on Brightspace, Schoology and Buzz, but Canvas is the only one today.</a:t>
+            </a:r>
+          </a:p>
+        </p:txBody>
+      </p:sp>
+    </p:spTree>
+  </p:cSld>
+  <p:clrMapOvr>
+    <a:masterClrMapping/>
+  </p:clrMapOvr>
+</p:notes>
+</file>
+
+<file path=ppt/notesSlides/notesSlide22.xml><?xml version="1.0" encoding="utf-8"?>
+<p:notes xmlns:a="http://schemas.openxmlformats.org/drawingml/2006/main" xmlns:p="http://schemas.openxmlformats.org/presentationml/2006/main" xmlns:r="http://schemas.openxmlformats.org/officeDocument/2006/relationships">
+  <p:cSld>
+    <p:spTree>
+      <p:nvGrpSpPr>
+        <p:cNvPr id="1" name=""/>
+        <p:cNvGrpSpPr/>
+        <p:nvPr/>
+      </p:nvGrpSpPr>
+      <p:grpSpPr>
+        <a:xfrm>
+          <a:off x="0" y="0"/>
+          <a:ext cx="0" cy="0"/>
+          <a:chOff x="0" y="0"/>
+          <a:chExt cx="0" cy="0"/>
+        </a:xfrm>
+      </p:grpSpPr>
+      <p:sp>
+        <p:nvSpPr>
+          <p:cNvPr id="2" name="Slide Image Placeholder 1"/>
+          <p:cNvSpPr>
+            <a:spLocks noGrp="1"/>
+          </p:cNvSpPr>
+          <p:nvPr>
+            <p:ph type="sldImg" idx="2"/>
+          </p:nvPr>
+        </p:nvSpPr>
+        <p:spPr/>
+      </p:sp>
+      <p:sp>
+        <p:nvSpPr>
+          <p:cNvPr id="3" name="Notes Placeholder 2"/>
+          <p:cNvSpPr>
+            <a:spLocks noGrp="1"/>
+          </p:cNvSpPr>
+          <p:nvPr>
+            <p:ph type="body" idx="1"/>
+          </p:nvPr>
+        </p:nvSpPr>
+        <p:spPr/>
+        <p:txBody>
+          <a:bodyPr/>
+          <a:lstStyle/>
+          <a:p>
+            <a:r>
+              <a:t>TIME: 0:45 (clock 24:55)</a:t>
             </a:r>
           </a:p>
           <a:p/>
@@ -1800,7 +1916,7 @@
 </p:notes>
 </file>
 
-<file path=ppt/notesSlides/notesSlide22.xml><?xml version="1.0" encoding="utf-8"?>
+<file path=ppt/notesSlides/notesSlide23.xml><?xml version="1.0" encoding="utf-8"?>
 <p:notes xmlns:a="http://schemas.openxmlformats.org/drawingml/2006/main" xmlns:p="http://schemas.openxmlformats.org/presentationml/2006/main" xmlns:r="http://schemas.openxmlformats.org/officeDocument/2006/relationships">
   <p:cSld>
     <p:spTree>
@@ -2048,7 +2164,7 @@
           <a:p/>
           <a:p>
             <a:r>
-              <a:t>Keep your hand up if you've figured out how to grade them.</a:t>
+              <a:t>[CLICK] Keep your hand up if it puts a grade in your gradebook.</a:t>
             </a:r>
           </a:p>
           <a:p/>
@@ -2124,7 +2240,13 @@
           <a:p/>
           <a:p>
             <a:r>
-              <a:t>That's the whole prompt. The activity on the left is what came out: students predict a launch angle, fire, and see where it lands. The teacher sets the target distances. It's auto-graded.</a:t>
+              <a:t>That's the whole prompt.</a:t>
+            </a:r>
+          </a:p>
+          <a:p/>
+          <a:p>
+            <a:r>
+              <a:t>[CLICK] And this is what came out, about three minutes later. Students calculate a launch angle, fire, and see where it lands. It's auto-graded. It even put the range formula in a hint.</a:t>
             </a:r>
           </a:p>
           <a:p/>
@@ -2188,13 +2310,13 @@
           <a:lstStyle/>
           <a:p>
             <a:r>
-              <a:t>TIME: 3:00 (clock 6:00)</a:t>
+              <a:t>TIME: 2:30 (clock 5:30)</a:t>
             </a:r>
           </a:p>
           <a:p/>
           <a:p>
             <a:r>
-              <a:t>PLAY THE BUILD RECORDING. It's sped up; talk over it.</a:t>
+              <a:t>PLAY THE BUILD RECORDING (1:41). It's a real run, sped up; talk over it.</a:t>
             </a:r>
           </a:p>
           <a:p/>
@@ -2205,12 +2327,12 @@
           </a:p>
           <a:p>
             <a:r>
-              <a:t>- It asks a few plain questions. Graded or not? Should it save progress? What should the teacher be able to change?</a:t>
+              <a:t>- It didn't ask me anything this time. It picked sensible defaults on its own: one target at 45 meters, three launches, full points on the first hit. (Sometimes it asks a couple of plain questions, like whether it should be graded.)</a:t>
             </a:r>
           </a:p>
           <a:p>
             <a:r>
-              <a:t>- Then it builds the activity. This part is sped up a lot.</a:t>
+              <a:t>- The thinking part is sped up 20 times. The whole build took under three minutes.</a:t>
             </a:r>
           </a:p>
           <a:p>
@@ -2220,13 +2342,13 @@
           </a:p>
           <a:p>
             <a:r>
-              <a:t>- (If the recording includes it) The file gets uploaded in Canvas and a student plays it.</a:t>
+              <a:t>- Then the file goes into Canvas. This part is our stand-in Canvas, the test harness we use for every change. A student misses once, hits on the second try, and submits. The gradebook gets 8 out of 10.</a:t>
             </a:r>
           </a:p>
           <a:p/>
           <a:p>
             <a:r>
-              <a:t>Notice there's no code on screen that the teacher has to read. They describe it, answer a few questions, and test it.</a:t>
+              <a:t>Notice there's no code on screen that the teacher has to read.</a:t>
             </a:r>
           </a:p>
           <a:p/>
@@ -2290,35 +2412,35 @@
           <a:lstStyle/>
           <a:p>
             <a:r>
-              <a:t>TIME: 1:15 (clock 7:15)</a:t>
+              <a:t>TIME: 1:15 (clock 6:45)</a:t>
             </a:r>
           </a:p>
           <a:p/>
           <a:p>
             <a:r>
-              <a:t>So what's the catch? An interactive on its own is just a web page.</a:t>
+              <a:t>So what's the catch?</a:t>
             </a:r>
           </a:p>
           <a:p/>
           <a:p>
             <a:r>
-              <a:t>- There's no grade in the gradebook. Somebody has to copy scores over, or it just doesn't count.</a:t>
+              <a:t>[CLICK] There's no grade in the gradebook. Somebody has to copy scores over, or it just doesn't count.</a:t>
             </a:r>
           </a:p>
           <a:p>
             <a:r>
-              <a:t>- There's no record of what the student did. The teacher can't see the work.</a:t>
+              <a:t>[CLICK] There's no record of what the student did. The teacher can't see the work.</a:t>
             </a:r>
           </a:p>
           <a:p>
             <a:r>
-              <a:t>- And it's usually another login, or another vendor with another contract.</a:t>
+              <a:t>[CLICK] And it's usually another login, or another vendor with another contract.</a:t>
             </a:r>
           </a:p>
           <a:p/>
           <a:p>
             <a:r>
-              <a:t>That's the problem Zest solves.</a:t>
+              <a:t>[CLICK] An interactive on its own is just a web page. That's the problem Zest solves.</a:t>
             </a:r>
           </a:p>
         </p:txBody>
@@ -2376,7 +2498,7 @@
           <a:lstStyle/>
           <a:p>
             <a:r>
-              <a:t>TIME: 1:45 (clock 9:00)</a:t>
+              <a:t>TIME: 1:45 (clock 8:30)</a:t>
             </a:r>
           </a:p>
           <a:p/>
@@ -2388,22 +2510,22 @@
           <a:p/>
           <a:p>
             <a:r>
-              <a:t>Walk the three boxes:</a:t>
+              <a:t>Walk the three boxes, one click each:</a:t>
             </a:r>
           </a:p>
           <a:p>
             <a:r>
-              <a:t>1. In Canvas, the teacher clicks Embed Interactive Content in the editor and uploads or picks a zest.</a:t>
+              <a:t>[CLICK] In Canvas, the teacher clicks Embed Interactive Content in the editor and uploads or picks a zest.</a:t>
             </a:r>
           </a:p>
           <a:p>
             <a:r>
-              <a:t>2. Zest runs the activity. It can be a graded assignment, auto-graded or teacher-graded, or just a live element on a page.</a:t>
+              <a:t>[CLICK] Zest runs the activity. It can be a graded assignment, auto-graded or teacher-graded, or just a live element on a page.</a:t>
             </a:r>
           </a:p>
           <a:p>
             <a:r>
-              <a:t>3. The grade goes to the gradebook, and the teacher sees the student's actual work in SpeedGrader.</a:t>
+              <a:t>[CLICK] The grade goes to the gradebook, and the teacher gets a custom view in SpeedGrader that shows the student's actual work. I'll come back to that.</a:t>
             </a:r>
           </a:p>
           <a:p/>
@@ -2473,25 +2595,31 @@
           <a:lstStyle/>
           <a:p>
             <a:r>
-              <a:t>TIME: 1:00 (clock 10:00)</a:t>
+              <a:t>TIME: 1:00 (clock 9:30)</a:t>
             </a:r>
           </a:p>
           <a:p/>
           <a:p>
             <a:r>
-              <a:t>How it started. We needed coding tools for our computer science courses, and the system we had was expensive. So we built our own.</a:t>
+              <a:t>How it started.</a:t>
             </a:r>
           </a:p>
           <a:p/>
           <a:p>
             <a:r>
-              <a:t>Then we added our keyboarding class, which is what I'm about to show you.</a:t>
+              <a:t>[CLICK] We needed coding tools for our computer science courses, and the system we had was expensive. So we built our own.</a:t>
             </a:r>
           </a:p>
           <a:p/>
           <a:p>
             <a:r>
-              <a:t>And now we're going to keep adding more. Anything that runs in a browser can be a zest.</a:t>
+              <a:t>[CLICK] Then we added our keyboarding class, which is what I'm about to show you.</a:t>
+            </a:r>
+          </a:p>
+          <a:p/>
+          <a:p>
+            <a:r>
+              <a:t>[CLICK] And now we're going to keep adding more. Anything that runs in a browser can be a zest.</a:t>
             </a:r>
           </a:p>
           <a:p/>
@@ -2555,7 +2683,7 @@
           <a:lstStyle/>
           <a:p>
             <a:r>
-              <a:t>TIME: 3:00 (clock 13:00)</a:t>
+              <a:t>TIME: 3:00 (clock 12:30)</a:t>
             </a:r>
           </a:p>
           <a:p/>
@@ -2577,7 +2705,7 @@
           </a:p>
           <a:p>
             <a:r>
-              <a:t>3. As the teacher: open SpeedGrader. This is the package's own review page, so you see what the student actually typed.</a:t>
+              <a:t>3. As the teacher: open SpeedGrader. Slow down here. This is the package's own review page inside SpeedGrader, so you see what the student actually typed, per attempt.</a:t>
             </a:r>
           </a:p>
           <a:p>
@@ -21964,6 +22092,958 @@
     <p:bg>
       <p:bgPr>
         <a:solidFill>
+          <a:srgbClr val="000000"/>
+        </a:solidFill>
+      </p:bgPr>
+    </p:bg>
+    <p:spTree>
+      <p:nvGrpSpPr>
+        <p:cNvPr id="558" name="Shape 558"/>
+        <p:cNvGrpSpPr/>
+        <p:nvPr/>
+      </p:nvGrpSpPr>
+      <p:grpSpPr>
+        <a:xfrm>
+          <a:off x="0" y="0"/>
+          <a:ext cx="0" cy="0"/>
+          <a:chOff x="0" y="0"/>
+          <a:chExt cx="0" cy="0"/>
+        </a:xfrm>
+      </p:grpSpPr>
+      <p:sp>
+        <p:nvSpPr>
+          <p:cNvPr id="559" name="Google Shape;559;p53"/>
+          <p:cNvSpPr/>
+          <p:nvPr/>
+        </p:nvSpPr>
+        <p:spPr>
+          <a:xfrm>
+            <a:off x="5188625" y="4418750"/>
+            <a:ext cx="1374000" cy="1344900"/>
+          </a:xfrm>
+          <a:prstGeom prst="donut">
+            <a:avLst>
+              <a:gd fmla="val 13443" name="adj"/>
+            </a:avLst>
+          </a:prstGeom>
+          <a:solidFill>
+            <a:srgbClr val="C0C0C0"/>
+          </a:solidFill>
+          <a:ln cap="flat" cmpd="sng" w="9525">
+            <a:solidFill>
+              <a:srgbClr val="C0C0C0"/>
+            </a:solidFill>
+            <a:prstDash val="solid"/>
+            <a:round/>
+            <a:headEnd len="sm" w="sm" type="none"/>
+            <a:tailEnd len="sm" w="sm" type="none"/>
+          </a:ln>
+        </p:spPr>
+        <p:txBody>
+          <a:bodyPr anchorCtr="0" anchor="ctr" bIns="91425" lIns="91425" spcFirstLastPara="1" rIns="91425" wrap="square" tIns="91425">
+            <a:noAutofit/>
+          </a:bodyPr>
+          <a:lstStyle/>
+          <a:p>
+            <a:pPr indent="0" lvl="0" marL="0" rtl="0" algn="l">
+              <a:spcBef>
+                <a:spcPts val="0"/>
+              </a:spcBef>
+              <a:spcAft>
+                <a:spcPts val="0"/>
+              </a:spcAft>
+              <a:buNone/>
+            </a:pPr>
+            <a:r>
+              <a:t/>
+            </a:r>
+            <a:endParaRPr/>
+          </a:p>
+        </p:txBody>
+      </p:sp>
+      <p:pic>
+        <p:nvPicPr>
+          <p:cNvPr id="560" name="Google Shape;560;p53"/>
+          <p:cNvPicPr preferRelativeResize="0"/>
+          <p:nvPr/>
+        </p:nvPicPr>
+        <p:blipFill rotWithShape="1">
+          <a:blip r:embed="rId3">
+            <a:alphaModFix/>
+          </a:blip>
+          <a:srcRect b="0" l="0" r="0" t="0"/>
+          <a:stretch/>
+        </p:blipFill>
+        <p:spPr>
+          <a:xfrm flipH="1" rot="5400000">
+            <a:off x="0" y="0"/>
+            <a:ext cx="2571750" cy="2571750"/>
+          </a:xfrm>
+          <a:prstGeom prst="rect">
+            <a:avLst/>
+          </a:prstGeom>
+          <a:noFill/>
+          <a:ln>
+            <a:noFill/>
+          </a:ln>
+        </p:spPr>
+      </p:pic>
+      <p:pic>
+        <p:nvPicPr>
+          <p:cNvPr id="561" name="Google Shape;561;p53"/>
+          <p:cNvPicPr preferRelativeResize="0"/>
+          <p:nvPr/>
+        </p:nvPicPr>
+        <p:blipFill rotWithShape="1">
+          <a:blip r:embed="rId4">
+            <a:alphaModFix/>
+          </a:blip>
+          <a:srcRect b="0" l="0" r="0" t="0"/>
+          <a:stretch/>
+        </p:blipFill>
+        <p:spPr>
+          <a:xfrm rot="5400000">
+            <a:off x="0" y="3792331"/>
+            <a:ext cx="1351170" cy="1351169"/>
+          </a:xfrm>
+          <a:prstGeom prst="rect">
+            <a:avLst/>
+          </a:prstGeom>
+          <a:noFill/>
+          <a:ln>
+            <a:noFill/>
+          </a:ln>
+        </p:spPr>
+      </p:pic>
+      <p:pic>
+        <p:nvPicPr>
+          <p:cNvPr id="568" name="Google Shape;568;p53"/>
+          <p:cNvPicPr preferRelativeResize="0"/>
+          <p:nvPr/>
+        </p:nvPicPr>
+        <p:blipFill rotWithShape="1">
+          <a:blip r:embed="rId5">
+            <a:alphaModFix/>
+          </a:blip>
+          <a:srcRect b="0" l="0" r="0" t="0"/>
+          <a:stretch/>
+        </p:blipFill>
+        <p:spPr>
+          <a:xfrm>
+            <a:off x="79132" y="4418758"/>
+            <a:ext cx="1078263" cy="653248"/>
+          </a:xfrm>
+          <a:prstGeom prst="rect">
+            <a:avLst/>
+          </a:prstGeom>
+          <a:noFill/>
+          <a:ln>
+            <a:noFill/>
+          </a:ln>
+        </p:spPr>
+      </p:pic>
+      <p:sp>
+        <p:nvSpPr>
+          <p:cNvPr id="569" name="TextBox 568"/>
+          <p:cNvSpPr txBox="1"/>
+          <p:nvPr/>
+        </p:nvSpPr>
+        <p:spPr>
+          <a:xfrm>
+            <a:off x="512064" y="274320"/>
+            <a:ext cx="8046720" cy="548640"/>
+          </a:xfrm>
+          <a:prstGeom prst="rect">
+            <a:avLst/>
+          </a:prstGeom>
+          <a:noFill/>
+        </p:spPr>
+        <p:txBody>
+          <a:bodyPr wrap="square" anchor="t" lIns="0" rIns="0" tIns="0" bIns="0">
+            <a:spAutoFit/>
+          </a:bodyPr>
+          <a:lstStyle/>
+          <a:p>
+            <a:pPr algn="l">
+              <a:spcAft>
+                <a:spcPts val="0"/>
+              </a:spcAft>
+            </a:pPr>
+            <a:r>
+              <a:rPr sz="3000" b="1" i="0">
+                <a:solidFill>
+                  <a:srgbClr val="FFFFFF"/>
+                </a:solidFill>
+                <a:latin typeface="League Spartan"/>
+              </a:rPr>
+              <a:t>A Custom View in SpeedGrader</a:t>
+            </a:r>
+          </a:p>
+        </p:txBody>
+      </p:sp>
+      <p:sp>
+        <p:nvSpPr>
+          <p:cNvPr id="570" name="TextBox 569"/>
+          <p:cNvSpPr txBox="1"/>
+          <p:nvPr/>
+        </p:nvSpPr>
+        <p:spPr>
+          <a:xfrm>
+            <a:off x="512064" y="841248"/>
+            <a:ext cx="7863840" cy="548640"/>
+          </a:xfrm>
+          <a:prstGeom prst="rect">
+            <a:avLst/>
+          </a:prstGeom>
+          <a:noFill/>
+        </p:spPr>
+        <p:txBody>
+          <a:bodyPr wrap="square" anchor="t" lIns="0" rIns="0" tIns="0" bIns="0">
+            <a:spAutoFit/>
+          </a:bodyPr>
+          <a:lstStyle/>
+          <a:p>
+            <a:pPr algn="l">
+              <a:spcAft>
+                <a:spcPts val="600"/>
+              </a:spcAft>
+            </a:pPr>
+            <a:r>
+              <a:rPr sz="1300" b="0" i="0">
+                <a:solidFill>
+                  <a:srgbClr val="FFFFFF"/>
+                </a:solidFill>
+                <a:latin typeface="Roboto"/>
+              </a:rPr>
+              <a:t>Each zest brings its own page for the teacher. SpeedGrader shows the actual work, not a file or a link.</a:t>
+            </a:r>
+          </a:p>
+        </p:txBody>
+      </p:sp>
+      <p:pic>
+        <p:nvPicPr>
+          <p:cNvPr id="571" name="Picture 570" descr="launch-lab-review.png"/>
+          <p:cNvPicPr>
+            <a:picLocks noChangeAspect="1"/>
+          </p:cNvPicPr>
+          <p:nvPr/>
+        </p:nvPicPr>
+        <p:blipFill>
+          <a:blip r:embed="rId2"/>
+          <a:stretch>
+            <a:fillRect/>
+          </a:stretch>
+        </p:blipFill>
+        <p:spPr>
+          <a:xfrm>
+            <a:off x="822960" y="1691640"/>
+            <a:ext cx="3931920" cy="2611041"/>
+          </a:xfrm>
+          <a:prstGeom prst="rect">
+            <a:avLst/>
+          </a:prstGeom>
+          <a:ln w="12700">
+            <a:solidFill>
+              <a:srgbClr val="25AEFA"/>
+            </a:solidFill>
+          </a:ln>
+        </p:spPr>
+      </p:pic>
+      <p:sp>
+        <p:nvSpPr>
+          <p:cNvPr id="572" name="Rounded Rectangle 571"/>
+          <p:cNvSpPr/>
+          <p:nvPr/>
+        </p:nvSpPr>
+        <p:spPr>
+          <a:xfrm>
+            <a:off x="822960" y="1417320"/>
+            <a:ext cx="3291840" cy="274320"/>
+          </a:xfrm>
+          <a:prstGeom prst="roundRect">
+            <a:avLst/>
+          </a:prstGeom>
+          <a:solidFill>
+            <a:srgbClr val="1B3168"/>
+          </a:solidFill>
+          <a:ln>
+            <a:noFill/>
+          </a:ln>
+          <a:effectLst/>
+        </p:spPr>
+        <p:style>
+          <a:lnRef idx="1">
+            <a:schemeClr val="accent1"/>
+          </a:lnRef>
+          <a:fillRef idx="3">
+            <a:schemeClr val="accent1"/>
+          </a:fillRef>
+          <a:effectRef idx="2">
+            <a:schemeClr val="accent1"/>
+          </a:effectRef>
+          <a:fontRef idx="minor">
+            <a:schemeClr val="lt1"/>
+          </a:fontRef>
+        </p:style>
+        <p:txBody>
+          <a:bodyPr rtlCol="0" anchor="ctr" tIns="0" bIns="0"/>
+          <a:lstStyle/>
+          <a:p>
+            <a:pPr algn="ctr"/>
+            <a:r>
+              <a:rPr sz="1000" b="1">
+                <a:solidFill>
+                  <a:srgbClr val="FFFFFF"/>
+                </a:solidFill>
+                <a:latin typeface="Roboto"/>
+              </a:rPr>
+              <a:t>Launch Lab: every shot, on one field</a:t>
+            </a:r>
+          </a:p>
+        </p:txBody>
+      </p:sp>
+      <p:pic>
+        <p:nvPicPr>
+          <p:cNvPr id="573" name="Picture 572" descr="graph-match-review.png"/>
+          <p:cNvPicPr>
+            <a:picLocks noChangeAspect="1"/>
+          </p:cNvPicPr>
+          <p:nvPr/>
+        </p:nvPicPr>
+        <p:blipFill>
+          <a:blip r:embed="rId6"/>
+          <a:stretch>
+            <a:fillRect/>
+          </a:stretch>
+        </p:blipFill>
+        <p:spPr>
+          <a:xfrm>
+            <a:off x="2011680" y="1947672"/>
+            <a:ext cx="3931920" cy="2611041"/>
+          </a:xfrm>
+          <a:prstGeom prst="rect">
+            <a:avLst/>
+          </a:prstGeom>
+          <a:ln w="12700">
+            <a:solidFill>
+              <a:srgbClr val="25AEFA"/>
+            </a:solidFill>
+          </a:ln>
+        </p:spPr>
+      </p:pic>
+      <p:sp>
+        <p:nvSpPr>
+          <p:cNvPr id="574" name="Rounded Rectangle 573"/>
+          <p:cNvSpPr/>
+          <p:nvPr/>
+        </p:nvSpPr>
+        <p:spPr>
+          <a:xfrm>
+            <a:off x="2011680" y="1673351"/>
+            <a:ext cx="3291840" cy="274320"/>
+          </a:xfrm>
+          <a:prstGeom prst="roundRect">
+            <a:avLst/>
+          </a:prstGeom>
+          <a:solidFill>
+            <a:srgbClr val="1B3168"/>
+          </a:solidFill>
+          <a:ln>
+            <a:noFill/>
+          </a:ln>
+          <a:effectLst/>
+        </p:spPr>
+        <p:style>
+          <a:lnRef idx="1">
+            <a:schemeClr val="accent1"/>
+          </a:lnRef>
+          <a:fillRef idx="3">
+            <a:schemeClr val="accent1"/>
+          </a:fillRef>
+          <a:effectRef idx="2">
+            <a:schemeClr val="accent1"/>
+          </a:effectRef>
+          <a:fontRef idx="minor">
+            <a:schemeClr val="lt1"/>
+          </a:fontRef>
+        </p:style>
+        <p:txBody>
+          <a:bodyPr rtlCol="0" anchor="ctr" tIns="0" bIns="0"/>
+          <a:lstStyle/>
+          <a:p>
+            <a:pPr algn="ctr"/>
+            <a:r>
+              <a:rPr sz="1000" b="1">
+                <a:solidFill>
+                  <a:srgbClr val="FFFFFF"/>
+                </a:solidFill>
+                <a:latin typeface="Roboto"/>
+              </a:rPr>
+              <a:t>Graph Match: their curve over the target</a:t>
+            </a:r>
+          </a:p>
+        </p:txBody>
+      </p:sp>
+      <p:pic>
+        <p:nvPicPr>
+          <p:cNvPr id="575" name="Picture 574" descr="sketch-label-review.png"/>
+          <p:cNvPicPr>
+            <a:picLocks noChangeAspect="1"/>
+          </p:cNvPicPr>
+          <p:nvPr/>
+        </p:nvPicPr>
+        <p:blipFill>
+          <a:blip r:embed="rId7"/>
+          <a:stretch>
+            <a:fillRect/>
+          </a:stretch>
+        </p:blipFill>
+        <p:spPr>
+          <a:xfrm>
+            <a:off x="3200400" y="2203704"/>
+            <a:ext cx="3931920" cy="2611041"/>
+          </a:xfrm>
+          <a:prstGeom prst="rect">
+            <a:avLst/>
+          </a:prstGeom>
+          <a:ln w="12700">
+            <a:solidFill>
+              <a:srgbClr val="25AEFA"/>
+            </a:solidFill>
+          </a:ln>
+        </p:spPr>
+      </p:pic>
+      <p:sp>
+        <p:nvSpPr>
+          <p:cNvPr id="576" name="Rounded Rectangle 575"/>
+          <p:cNvSpPr/>
+          <p:nvPr/>
+        </p:nvSpPr>
+        <p:spPr>
+          <a:xfrm>
+            <a:off x="3200400" y="1929384"/>
+            <a:ext cx="3291840" cy="274320"/>
+          </a:xfrm>
+          <a:prstGeom prst="roundRect">
+            <a:avLst/>
+          </a:prstGeom>
+          <a:solidFill>
+            <a:srgbClr val="1B3168"/>
+          </a:solidFill>
+          <a:ln>
+            <a:noFill/>
+          </a:ln>
+          <a:effectLst/>
+        </p:spPr>
+        <p:style>
+          <a:lnRef idx="1">
+            <a:schemeClr val="accent1"/>
+          </a:lnRef>
+          <a:fillRef idx="3">
+            <a:schemeClr val="accent1"/>
+          </a:fillRef>
+          <a:effectRef idx="2">
+            <a:schemeClr val="accent1"/>
+          </a:effectRef>
+          <a:fontRef idx="minor">
+            <a:schemeClr val="lt1"/>
+          </a:fontRef>
+        </p:style>
+        <p:txBody>
+          <a:bodyPr rtlCol="0" anchor="ctr" tIns="0" bIns="0"/>
+          <a:lstStyle/>
+          <a:p>
+            <a:pPr algn="ctr"/>
+            <a:r>
+              <a:rPr sz="1000" b="1">
+                <a:solidFill>
+                  <a:srgbClr val="FFFFFF"/>
+                </a:solidFill>
+                <a:latin typeface="Roboto"/>
+              </a:rPr>
+              <a:t>Sketch &amp; Label: replay of the drawing</a:t>
+            </a:r>
+          </a:p>
+        </p:txBody>
+      </p:sp>
+      <p:pic>
+        <p:nvPicPr>
+          <p:cNvPr id="577" name="Picture 576" descr="escape-the-archive-review.png"/>
+          <p:cNvPicPr>
+            <a:picLocks noChangeAspect="1"/>
+          </p:cNvPicPr>
+          <p:nvPr/>
+        </p:nvPicPr>
+        <p:blipFill>
+          <a:blip r:embed="rId8"/>
+          <a:stretch>
+            <a:fillRect/>
+          </a:stretch>
+        </p:blipFill>
+        <p:spPr>
+          <a:xfrm>
+            <a:off x="4389120" y="2459736"/>
+            <a:ext cx="3931920" cy="2611041"/>
+          </a:xfrm>
+          <a:prstGeom prst="rect">
+            <a:avLst/>
+          </a:prstGeom>
+          <a:ln w="12700">
+            <a:solidFill>
+              <a:srgbClr val="25AEFA"/>
+            </a:solidFill>
+          </a:ln>
+        </p:spPr>
+      </p:pic>
+      <p:sp>
+        <p:nvSpPr>
+          <p:cNvPr id="578" name="Rounded Rectangle 577"/>
+          <p:cNvSpPr/>
+          <p:nvPr/>
+        </p:nvSpPr>
+        <p:spPr>
+          <a:xfrm>
+            <a:off x="4389120" y="2185416"/>
+            <a:ext cx="3291840" cy="274320"/>
+          </a:xfrm>
+          <a:prstGeom prst="roundRect">
+            <a:avLst/>
+          </a:prstGeom>
+          <a:solidFill>
+            <a:srgbClr val="1B3168"/>
+          </a:solidFill>
+          <a:ln>
+            <a:noFill/>
+          </a:ln>
+          <a:effectLst/>
+        </p:spPr>
+        <p:style>
+          <a:lnRef idx="1">
+            <a:schemeClr val="accent1"/>
+          </a:lnRef>
+          <a:fillRef idx="3">
+            <a:schemeClr val="accent1"/>
+          </a:fillRef>
+          <a:effectRef idx="2">
+            <a:schemeClr val="accent1"/>
+          </a:effectRef>
+          <a:fontRef idx="minor">
+            <a:schemeClr val="lt1"/>
+          </a:fontRef>
+        </p:style>
+        <p:txBody>
+          <a:bodyPr rtlCol="0" anchor="ctr" tIns="0" bIns="0"/>
+          <a:lstStyle/>
+          <a:p>
+            <a:pPr algn="ctr"/>
+            <a:r>
+              <a:rPr sz="1000" b="1">
+                <a:solidFill>
+                  <a:srgbClr val="FFFFFF"/>
+                </a:solidFill>
+                <a:latin typeface="Roboto"/>
+              </a:rPr>
+              <a:t>Escape the Archive: every wrong try and hint</a:t>
+            </a:r>
+          </a:p>
+        </p:txBody>
+      </p:sp>
+    </p:spTree>
+  </p:cSld>
+  <p:clrMapOvr>
+    <a:masterClrMapping/>
+  </p:clrMapOvr>
+  <p:timing>
+    <p:tnLst>
+      <p:par>
+        <p:cTn id="1" dur="indefinite" restart="never" nodeType="tmRoot">
+          <p:childTnLst>
+            <p:seq concurrent="1" nextAc="seek">
+              <p:cTn id="2" dur="indefinite" nodeType="mainSeq">
+                <p:childTnLst>
+                  <p:par>
+                    <p:cTn id="9" fill="hold">
+                      <p:stCondLst>
+                        <p:cond delay="indefinite"/>
+                      </p:stCondLst>
+                      <p:childTnLst>
+                        <p:par>
+                          <p:cTn id="10" fill="hold">
+                            <p:stCondLst>
+                              <p:cond delay="0"/>
+                            </p:stCondLst>
+                            <p:childTnLst>
+                              <p:par>
+                                <p:cTn id="3" presetID="10" presetClass="entr" presetSubtype="0" fill="hold" nodeType="clickEffect">
+                                  <p:stCondLst>
+                                    <p:cond delay="0"/>
+                                  </p:stCondLst>
+                                  <p:childTnLst>
+                                    <p:set>
+                                      <p:cBhvr>
+                                        <p:cTn id="4" dur="1" fill="hold">
+                                          <p:stCondLst>
+                                            <p:cond delay="0"/>
+                                          </p:stCondLst>
+                                        </p:cTn>
+                                        <p:tgtEl>
+                                          <p:spTgt spid="571"/>
+                                        </p:tgtEl>
+                                        <p:attrNameLst>
+                                          <p:attrName>style.visibility</p:attrName>
+                                        </p:attrNameLst>
+                                      </p:cBhvr>
+                                      <p:to>
+                                        <p:strVal val="visible"/>
+                                      </p:to>
+                                    </p:set>
+                                    <p:animEffect transition="in" filter="fade">
+                                      <p:cBhvr>
+                                        <p:cTn id="5" dur="500"/>
+                                        <p:tgtEl>
+                                          <p:spTgt spid="571"/>
+                                        </p:tgtEl>
+                                      </p:cBhvr>
+                                    </p:animEffect>
+                                  </p:childTnLst>
+                                </p:cTn>
+                              </p:par>
+                              <p:par>
+                                <p:cTn id="6" presetID="10" presetClass="entr" presetSubtype="0" fill="hold" nodeType="withEffect">
+                                  <p:stCondLst>
+                                    <p:cond delay="0"/>
+                                  </p:stCondLst>
+                                  <p:childTnLst>
+                                    <p:set>
+                                      <p:cBhvr>
+                                        <p:cTn id="7" dur="1" fill="hold">
+                                          <p:stCondLst>
+                                            <p:cond delay="0"/>
+                                          </p:stCondLst>
+                                        </p:cTn>
+                                        <p:tgtEl>
+                                          <p:spTgt spid="572"/>
+                                        </p:tgtEl>
+                                        <p:attrNameLst>
+                                          <p:attrName>style.visibility</p:attrName>
+                                        </p:attrNameLst>
+                                      </p:cBhvr>
+                                      <p:to>
+                                        <p:strVal val="visible"/>
+                                      </p:to>
+                                    </p:set>
+                                    <p:animEffect transition="in" filter="fade">
+                                      <p:cBhvr>
+                                        <p:cTn id="8" dur="500"/>
+                                        <p:tgtEl>
+                                          <p:spTgt spid="572"/>
+                                        </p:tgtEl>
+                                      </p:cBhvr>
+                                    </p:animEffect>
+                                  </p:childTnLst>
+                                </p:cTn>
+                              </p:par>
+                            </p:childTnLst>
+                          </p:cTn>
+                        </p:par>
+                      </p:childTnLst>
+                    </p:cTn>
+                  </p:par>
+                  <p:par>
+                    <p:cTn id="17" fill="hold">
+                      <p:stCondLst>
+                        <p:cond delay="indefinite"/>
+                      </p:stCondLst>
+                      <p:childTnLst>
+                        <p:par>
+                          <p:cTn id="18" fill="hold">
+                            <p:stCondLst>
+                              <p:cond delay="0"/>
+                            </p:stCondLst>
+                            <p:childTnLst>
+                              <p:par>
+                                <p:cTn id="11" presetID="10" presetClass="entr" presetSubtype="0" fill="hold" nodeType="clickEffect">
+                                  <p:stCondLst>
+                                    <p:cond delay="0"/>
+                                  </p:stCondLst>
+                                  <p:childTnLst>
+                                    <p:set>
+                                      <p:cBhvr>
+                                        <p:cTn id="12" dur="1" fill="hold">
+                                          <p:stCondLst>
+                                            <p:cond delay="0"/>
+                                          </p:stCondLst>
+                                        </p:cTn>
+                                        <p:tgtEl>
+                                          <p:spTgt spid="573"/>
+                                        </p:tgtEl>
+                                        <p:attrNameLst>
+                                          <p:attrName>style.visibility</p:attrName>
+                                        </p:attrNameLst>
+                                      </p:cBhvr>
+                                      <p:to>
+                                        <p:strVal val="visible"/>
+                                      </p:to>
+                                    </p:set>
+                                    <p:animEffect transition="in" filter="fade">
+                                      <p:cBhvr>
+                                        <p:cTn id="13" dur="500"/>
+                                        <p:tgtEl>
+                                          <p:spTgt spid="573"/>
+                                        </p:tgtEl>
+                                      </p:cBhvr>
+                                    </p:animEffect>
+                                  </p:childTnLst>
+                                </p:cTn>
+                              </p:par>
+                              <p:par>
+                                <p:cTn id="14" presetID="10" presetClass="entr" presetSubtype="0" fill="hold" nodeType="withEffect">
+                                  <p:stCondLst>
+                                    <p:cond delay="0"/>
+                                  </p:stCondLst>
+                                  <p:childTnLst>
+                                    <p:set>
+                                      <p:cBhvr>
+                                        <p:cTn id="15" dur="1" fill="hold">
+                                          <p:stCondLst>
+                                            <p:cond delay="0"/>
+                                          </p:stCondLst>
+                                        </p:cTn>
+                                        <p:tgtEl>
+                                          <p:spTgt spid="574"/>
+                                        </p:tgtEl>
+                                        <p:attrNameLst>
+                                          <p:attrName>style.visibility</p:attrName>
+                                        </p:attrNameLst>
+                                      </p:cBhvr>
+                                      <p:to>
+                                        <p:strVal val="visible"/>
+                                      </p:to>
+                                    </p:set>
+                                    <p:animEffect transition="in" filter="fade">
+                                      <p:cBhvr>
+                                        <p:cTn id="16" dur="500"/>
+                                        <p:tgtEl>
+                                          <p:spTgt spid="574"/>
+                                        </p:tgtEl>
+                                      </p:cBhvr>
+                                    </p:animEffect>
+                                  </p:childTnLst>
+                                </p:cTn>
+                              </p:par>
+                            </p:childTnLst>
+                          </p:cTn>
+                        </p:par>
+                      </p:childTnLst>
+                    </p:cTn>
+                  </p:par>
+                  <p:par>
+                    <p:cTn id="25" fill="hold">
+                      <p:stCondLst>
+                        <p:cond delay="indefinite"/>
+                      </p:stCondLst>
+                      <p:childTnLst>
+                        <p:par>
+                          <p:cTn id="26" fill="hold">
+                            <p:stCondLst>
+                              <p:cond delay="0"/>
+                            </p:stCondLst>
+                            <p:childTnLst>
+                              <p:par>
+                                <p:cTn id="19" presetID="10" presetClass="entr" presetSubtype="0" fill="hold" nodeType="clickEffect">
+                                  <p:stCondLst>
+                                    <p:cond delay="0"/>
+                                  </p:stCondLst>
+                                  <p:childTnLst>
+                                    <p:set>
+                                      <p:cBhvr>
+                                        <p:cTn id="20" dur="1" fill="hold">
+                                          <p:stCondLst>
+                                            <p:cond delay="0"/>
+                                          </p:stCondLst>
+                                        </p:cTn>
+                                        <p:tgtEl>
+                                          <p:spTgt spid="575"/>
+                                        </p:tgtEl>
+                                        <p:attrNameLst>
+                                          <p:attrName>style.visibility</p:attrName>
+                                        </p:attrNameLst>
+                                      </p:cBhvr>
+                                      <p:to>
+                                        <p:strVal val="visible"/>
+                                      </p:to>
+                                    </p:set>
+                                    <p:animEffect transition="in" filter="fade">
+                                      <p:cBhvr>
+                                        <p:cTn id="21" dur="500"/>
+                                        <p:tgtEl>
+                                          <p:spTgt spid="575"/>
+                                        </p:tgtEl>
+                                      </p:cBhvr>
+                                    </p:animEffect>
+                                  </p:childTnLst>
+                                </p:cTn>
+                              </p:par>
+                              <p:par>
+                                <p:cTn id="22" presetID="10" presetClass="entr" presetSubtype="0" fill="hold" nodeType="withEffect">
+                                  <p:stCondLst>
+                                    <p:cond delay="0"/>
+                                  </p:stCondLst>
+                                  <p:childTnLst>
+                                    <p:set>
+                                      <p:cBhvr>
+                                        <p:cTn id="23" dur="1" fill="hold">
+                                          <p:stCondLst>
+                                            <p:cond delay="0"/>
+                                          </p:stCondLst>
+                                        </p:cTn>
+                                        <p:tgtEl>
+                                          <p:spTgt spid="576"/>
+                                        </p:tgtEl>
+                                        <p:attrNameLst>
+                                          <p:attrName>style.visibility</p:attrName>
+                                        </p:attrNameLst>
+                                      </p:cBhvr>
+                                      <p:to>
+                                        <p:strVal val="visible"/>
+                                      </p:to>
+                                    </p:set>
+                                    <p:animEffect transition="in" filter="fade">
+                                      <p:cBhvr>
+                                        <p:cTn id="24" dur="500"/>
+                                        <p:tgtEl>
+                                          <p:spTgt spid="576"/>
+                                        </p:tgtEl>
+                                      </p:cBhvr>
+                                    </p:animEffect>
+                                  </p:childTnLst>
+                                </p:cTn>
+                              </p:par>
+                            </p:childTnLst>
+                          </p:cTn>
+                        </p:par>
+                      </p:childTnLst>
+                    </p:cTn>
+                  </p:par>
+                  <p:par>
+                    <p:cTn id="33" fill="hold">
+                      <p:stCondLst>
+                        <p:cond delay="indefinite"/>
+                      </p:stCondLst>
+                      <p:childTnLst>
+                        <p:par>
+                          <p:cTn id="34" fill="hold">
+                            <p:stCondLst>
+                              <p:cond delay="0"/>
+                            </p:stCondLst>
+                            <p:childTnLst>
+                              <p:par>
+                                <p:cTn id="27" presetID="10" presetClass="entr" presetSubtype="0" fill="hold" nodeType="clickEffect">
+                                  <p:stCondLst>
+                                    <p:cond delay="0"/>
+                                  </p:stCondLst>
+                                  <p:childTnLst>
+                                    <p:set>
+                                      <p:cBhvr>
+                                        <p:cTn id="28" dur="1" fill="hold">
+                                          <p:stCondLst>
+                                            <p:cond delay="0"/>
+                                          </p:stCondLst>
+                                        </p:cTn>
+                                        <p:tgtEl>
+                                          <p:spTgt spid="577"/>
+                                        </p:tgtEl>
+                                        <p:attrNameLst>
+                                          <p:attrName>style.visibility</p:attrName>
+                                        </p:attrNameLst>
+                                      </p:cBhvr>
+                                      <p:to>
+                                        <p:strVal val="visible"/>
+                                      </p:to>
+                                    </p:set>
+                                    <p:animEffect transition="in" filter="fade">
+                                      <p:cBhvr>
+                                        <p:cTn id="29" dur="500"/>
+                                        <p:tgtEl>
+                                          <p:spTgt spid="577"/>
+                                        </p:tgtEl>
+                                      </p:cBhvr>
+                                    </p:animEffect>
+                                  </p:childTnLst>
+                                </p:cTn>
+                              </p:par>
+                              <p:par>
+                                <p:cTn id="30" presetID="10" presetClass="entr" presetSubtype="0" fill="hold" nodeType="withEffect">
+                                  <p:stCondLst>
+                                    <p:cond delay="0"/>
+                                  </p:stCondLst>
+                                  <p:childTnLst>
+                                    <p:set>
+                                      <p:cBhvr>
+                                        <p:cTn id="31" dur="1" fill="hold">
+                                          <p:stCondLst>
+                                            <p:cond delay="0"/>
+                                          </p:stCondLst>
+                                        </p:cTn>
+                                        <p:tgtEl>
+                                          <p:spTgt spid="578"/>
+                                        </p:tgtEl>
+                                        <p:attrNameLst>
+                                          <p:attrName>style.visibility</p:attrName>
+                                        </p:attrNameLst>
+                                      </p:cBhvr>
+                                      <p:to>
+                                        <p:strVal val="visible"/>
+                                      </p:to>
+                                    </p:set>
+                                    <p:animEffect transition="in" filter="fade">
+                                      <p:cBhvr>
+                                        <p:cTn id="32" dur="500"/>
+                                        <p:tgtEl>
+                                          <p:spTgt spid="578"/>
+                                        </p:tgtEl>
+                                      </p:cBhvr>
+                                    </p:animEffect>
+                                  </p:childTnLst>
+                                </p:cTn>
+                              </p:par>
+                            </p:childTnLst>
+                          </p:cTn>
+                        </p:par>
+                      </p:childTnLst>
+                    </p:cTn>
+                  </p:par>
+                </p:childTnLst>
+              </p:cTn>
+              <p:prevCondLst>
+                <p:cond evt="onPrev" delay="0">
+                  <p:tgtEl>
+                    <p:sldTgt/>
+                  </p:tgtEl>
+                </p:cond>
+              </p:prevCondLst>
+              <p:nextCondLst>
+                <p:cond evt="onNext" delay="0">
+                  <p:tgtEl>
+                    <p:sldTgt/>
+                  </p:tgtEl>
+                </p:cond>
+              </p:nextCondLst>
+            </p:seq>
+          </p:childTnLst>
+        </p:cTn>
+      </p:par>
+    </p:tnLst>
+  </p:timing>
+</p:sld>
+</file>
+
+<file path=ppt/slides/slide11.xml><?xml version="1.0" encoding="utf-8"?>
+<p:sld xmlns:a="http://schemas.openxmlformats.org/drawingml/2006/main" xmlns:r="http://schemas.openxmlformats.org/officeDocument/2006/relationships" xmlns:mc="http://schemas.openxmlformats.org/markup-compatibility/2006" xmlns:mv="urn:schemas-microsoft-com:mac:vml" xmlns:p="http://schemas.openxmlformats.org/presentationml/2006/main" xmlns:c="http://schemas.openxmlformats.org/drawingml/2006/chart" xmlns:dgm="http://schemas.openxmlformats.org/drawingml/2006/diagram" xmlns:o="urn:schemas-microsoft-com:office:office" xmlns:v="urn:schemas-microsoft-com:vml" xmlns:pvml="urn:schemas-microsoft-com:office:powerpoint" xmlns:com="http://schemas.openxmlformats.org/drawingml/2006/compatibility" xmlns:p14="http://schemas.microsoft.com/office/powerpoint/2010/main" xmlns:p15="http://schemas.microsoft.com/office/powerpoint/2012/main" xmlns:ahyp="http://schemas.microsoft.com/office/drawing/2018/hyperlinkcolor">
+  <p:cSld>
+    <p:bg>
+      <p:bgPr>
+        <a:solidFill>
           <a:srgbClr val="C0C0C0"/>
         </a:solidFill>
       </p:bgPr>
@@ -22799,10 +23879,304 @@
   <p:clrMapOvr>
     <a:masterClrMapping/>
   </p:clrMapOvr>
+  <p:timing>
+    <p:tnLst>
+      <p:par>
+        <p:cTn id="1" dur="indefinite" restart="never" nodeType="tmRoot">
+          <p:childTnLst>
+            <p:seq concurrent="1" nextAc="seek">
+              <p:cTn id="2" dur="indefinite" nodeType="mainSeq">
+                <p:childTnLst>
+                  <p:par>
+                    <p:cTn id="9" fill="hold">
+                      <p:stCondLst>
+                        <p:cond delay="indefinite"/>
+                      </p:stCondLst>
+                      <p:childTnLst>
+                        <p:par>
+                          <p:cTn id="10" fill="hold">
+                            <p:stCondLst>
+                              <p:cond delay="0"/>
+                            </p:stCondLst>
+                            <p:childTnLst>
+                              <p:par>
+                                <p:cTn id="3" presetID="10" presetClass="entr" presetSubtype="0" fill="hold" nodeType="clickEffect">
+                                  <p:stCondLst>
+                                    <p:cond delay="0"/>
+                                  </p:stCondLst>
+                                  <p:childTnLst>
+                                    <p:set>
+                                      <p:cBhvr>
+                                        <p:cTn id="4" dur="1" fill="hold">
+                                          <p:stCondLst>
+                                            <p:cond delay="0"/>
+                                          </p:stCondLst>
+                                        </p:cTn>
+                                        <p:tgtEl>
+                                          <p:spTgt spid="597"/>
+                                        </p:tgtEl>
+                                        <p:attrNameLst>
+                                          <p:attrName>style.visibility</p:attrName>
+                                        </p:attrNameLst>
+                                      </p:cBhvr>
+                                      <p:to>
+                                        <p:strVal val="visible"/>
+                                      </p:to>
+                                    </p:set>
+                                    <p:animEffect transition="in" filter="fade">
+                                      <p:cBhvr>
+                                        <p:cTn id="5" dur="500"/>
+                                        <p:tgtEl>
+                                          <p:spTgt spid="597"/>
+                                        </p:tgtEl>
+                                      </p:cBhvr>
+                                    </p:animEffect>
+                                  </p:childTnLst>
+                                </p:cTn>
+                              </p:par>
+                              <p:par>
+                                <p:cTn id="6" presetID="10" presetClass="entr" presetSubtype="0" fill="hold" nodeType="withEffect">
+                                  <p:stCondLst>
+                                    <p:cond delay="0"/>
+                                  </p:stCondLst>
+                                  <p:childTnLst>
+                                    <p:set>
+                                      <p:cBhvr>
+                                        <p:cTn id="7" dur="1" fill="hold">
+                                          <p:stCondLst>
+                                            <p:cond delay="0"/>
+                                          </p:stCondLst>
+                                        </p:cTn>
+                                        <p:tgtEl>
+                                          <p:spTgt spid="607"/>
+                                        </p:tgtEl>
+                                        <p:attrNameLst>
+                                          <p:attrName>style.visibility</p:attrName>
+                                        </p:attrNameLst>
+                                      </p:cBhvr>
+                                      <p:to>
+                                        <p:strVal val="visible"/>
+                                      </p:to>
+                                    </p:set>
+                                    <p:animEffect transition="in" filter="fade">
+                                      <p:cBhvr>
+                                        <p:cTn id="8" dur="500"/>
+                                        <p:tgtEl>
+                                          <p:spTgt spid="607"/>
+                                        </p:tgtEl>
+                                      </p:cBhvr>
+                                    </p:animEffect>
+                                  </p:childTnLst>
+                                </p:cTn>
+                              </p:par>
+                            </p:childTnLst>
+                          </p:cTn>
+                        </p:par>
+                      </p:childTnLst>
+                    </p:cTn>
+                  </p:par>
+                  <p:par>
+                    <p:cTn id="17" fill="hold">
+                      <p:stCondLst>
+                        <p:cond delay="indefinite"/>
+                      </p:stCondLst>
+                      <p:childTnLst>
+                        <p:par>
+                          <p:cTn id="18" fill="hold">
+                            <p:stCondLst>
+                              <p:cond delay="0"/>
+                            </p:stCondLst>
+                            <p:childTnLst>
+                              <p:par>
+                                <p:cTn id="11" presetID="10" presetClass="entr" presetSubtype="0" fill="hold" nodeType="clickEffect">
+                                  <p:stCondLst>
+                                    <p:cond delay="0"/>
+                                  </p:stCondLst>
+                                  <p:childTnLst>
+                                    <p:set>
+                                      <p:cBhvr>
+                                        <p:cTn id="12" dur="1" fill="hold">
+                                          <p:stCondLst>
+                                            <p:cond delay="0"/>
+                                          </p:stCondLst>
+                                        </p:cTn>
+                                        <p:tgtEl>
+                                          <p:spTgt spid="601"/>
+                                        </p:tgtEl>
+                                        <p:attrNameLst>
+                                          <p:attrName>style.visibility</p:attrName>
+                                        </p:attrNameLst>
+                                      </p:cBhvr>
+                                      <p:to>
+                                        <p:strVal val="visible"/>
+                                      </p:to>
+                                    </p:set>
+                                    <p:animEffect transition="in" filter="fade">
+                                      <p:cBhvr>
+                                        <p:cTn id="13" dur="500"/>
+                                        <p:tgtEl>
+                                          <p:spTgt spid="601"/>
+                                        </p:tgtEl>
+                                      </p:cBhvr>
+                                    </p:animEffect>
+                                  </p:childTnLst>
+                                </p:cTn>
+                              </p:par>
+                              <p:par>
+                                <p:cTn id="14" presetID="10" presetClass="entr" presetSubtype="0" fill="hold" nodeType="withEffect">
+                                  <p:stCondLst>
+                                    <p:cond delay="0"/>
+                                  </p:stCondLst>
+                                  <p:childTnLst>
+                                    <p:set>
+                                      <p:cBhvr>
+                                        <p:cTn id="15" dur="1" fill="hold">
+                                          <p:stCondLst>
+                                            <p:cond delay="0"/>
+                                          </p:stCondLst>
+                                        </p:cTn>
+                                        <p:tgtEl>
+                                          <p:spTgt spid="608"/>
+                                        </p:tgtEl>
+                                        <p:attrNameLst>
+                                          <p:attrName>style.visibility</p:attrName>
+                                        </p:attrNameLst>
+                                      </p:cBhvr>
+                                      <p:to>
+                                        <p:strVal val="visible"/>
+                                      </p:to>
+                                    </p:set>
+                                    <p:animEffect transition="in" filter="fade">
+                                      <p:cBhvr>
+                                        <p:cTn id="16" dur="500"/>
+                                        <p:tgtEl>
+                                          <p:spTgt spid="608"/>
+                                        </p:tgtEl>
+                                      </p:cBhvr>
+                                    </p:animEffect>
+                                  </p:childTnLst>
+                                </p:cTn>
+                              </p:par>
+                            </p:childTnLst>
+                          </p:cTn>
+                        </p:par>
+                      </p:childTnLst>
+                    </p:cTn>
+                  </p:par>
+                  <p:par>
+                    <p:cTn id="25" fill="hold">
+                      <p:stCondLst>
+                        <p:cond delay="indefinite"/>
+                      </p:stCondLst>
+                      <p:childTnLst>
+                        <p:par>
+                          <p:cTn id="26" fill="hold">
+                            <p:stCondLst>
+                              <p:cond delay="0"/>
+                            </p:stCondLst>
+                            <p:childTnLst>
+                              <p:par>
+                                <p:cTn id="19" presetID="10" presetClass="entr" presetSubtype="0" fill="hold" nodeType="clickEffect">
+                                  <p:stCondLst>
+                                    <p:cond delay="0"/>
+                                  </p:stCondLst>
+                                  <p:childTnLst>
+                                    <p:set>
+                                      <p:cBhvr>
+                                        <p:cTn id="20" dur="1" fill="hold">
+                                          <p:stCondLst>
+                                            <p:cond delay="0"/>
+                                          </p:stCondLst>
+                                        </p:cTn>
+                                        <p:tgtEl>
+                                          <p:spTgt spid="605"/>
+                                        </p:tgtEl>
+                                        <p:attrNameLst>
+                                          <p:attrName>style.visibility</p:attrName>
+                                        </p:attrNameLst>
+                                      </p:cBhvr>
+                                      <p:to>
+                                        <p:strVal val="visible"/>
+                                      </p:to>
+                                    </p:set>
+                                    <p:animEffect transition="in" filter="fade">
+                                      <p:cBhvr>
+                                        <p:cTn id="21" dur="500"/>
+                                        <p:tgtEl>
+                                          <p:spTgt spid="605"/>
+                                        </p:tgtEl>
+                                      </p:cBhvr>
+                                    </p:animEffect>
+                                  </p:childTnLst>
+                                </p:cTn>
+                              </p:par>
+                              <p:par>
+                                <p:cTn id="22" presetID="10" presetClass="entr" presetSubtype="0" fill="hold" nodeType="withEffect">
+                                  <p:stCondLst>
+                                    <p:cond delay="0"/>
+                                  </p:stCondLst>
+                                  <p:childTnLst>
+                                    <p:set>
+                                      <p:cBhvr>
+                                        <p:cTn id="23" dur="1" fill="hold">
+                                          <p:stCondLst>
+                                            <p:cond delay="0"/>
+                                          </p:stCondLst>
+                                        </p:cTn>
+                                        <p:tgtEl>
+                                          <p:spTgt spid="609"/>
+                                        </p:tgtEl>
+                                        <p:attrNameLst>
+                                          <p:attrName>style.visibility</p:attrName>
+                                        </p:attrNameLst>
+                                      </p:cBhvr>
+                                      <p:to>
+                                        <p:strVal val="visible"/>
+                                      </p:to>
+                                    </p:set>
+                                    <p:animEffect transition="in" filter="fade">
+                                      <p:cBhvr>
+                                        <p:cTn id="24" dur="500"/>
+                                        <p:tgtEl>
+                                          <p:spTgt spid="609"/>
+                                        </p:tgtEl>
+                                      </p:cBhvr>
+                                    </p:animEffect>
+                                  </p:childTnLst>
+                                </p:cTn>
+                              </p:par>
+                            </p:childTnLst>
+                          </p:cTn>
+                        </p:par>
+                      </p:childTnLst>
+                    </p:cTn>
+                  </p:par>
+                </p:childTnLst>
+              </p:cTn>
+              <p:prevCondLst>
+                <p:cond evt="onPrev" delay="0">
+                  <p:tgtEl>
+                    <p:sldTgt/>
+                  </p:tgtEl>
+                </p:cond>
+              </p:prevCondLst>
+              <p:nextCondLst>
+                <p:cond evt="onNext" delay="0">
+                  <p:tgtEl>
+                    <p:sldTgt/>
+                  </p:tgtEl>
+                </p:cond>
+              </p:nextCondLst>
+            </p:seq>
+          </p:childTnLst>
+        </p:cTn>
+      </p:par>
+    </p:tnLst>
+  </p:timing>
 </p:sld>
 </file>
 
-<file path=ppt/slides/slide11.xml><?xml version="1.0" encoding="utf-8"?>
+<file path=ppt/slides/slide12.xml><?xml version="1.0" encoding="utf-8"?>
 <p:sld xmlns:a="http://schemas.openxmlformats.org/drawingml/2006/main" xmlns:r="http://schemas.openxmlformats.org/officeDocument/2006/relationships" xmlns:mc="http://schemas.openxmlformats.org/markup-compatibility/2006" xmlns:mv="urn:schemas-microsoft-com:mac:vml" xmlns:p="http://schemas.openxmlformats.org/presentationml/2006/main" xmlns:c="http://schemas.openxmlformats.org/drawingml/2006/chart" xmlns:dgm="http://schemas.openxmlformats.org/drawingml/2006/diagram" xmlns:o="urn:schemas-microsoft-com:office:office" xmlns:v="urn:schemas-microsoft-com:vml" xmlns:pvml="urn:schemas-microsoft-com:office:powerpoint" xmlns:com="http://schemas.openxmlformats.org/drawingml/2006/compatibility" xmlns:p14="http://schemas.microsoft.com/office/powerpoint/2010/main" xmlns:p15="http://schemas.microsoft.com/office/powerpoint/2012/main" xmlns:ahyp="http://schemas.microsoft.com/office/drawing/2018/hyperlinkcolor">
   <p:cSld>
     <p:bg>
@@ -23614,7 +24988,7 @@
 </p:sld>
 </file>
 
-<file path=ppt/slides/slide12.xml><?xml version="1.0" encoding="utf-8"?>
+<file path=ppt/slides/slide13.xml><?xml version="1.0" encoding="utf-8"?>
 <p:sld xmlns:a="http://schemas.openxmlformats.org/drawingml/2006/main" xmlns:r="http://schemas.openxmlformats.org/officeDocument/2006/relationships" xmlns:mc="http://schemas.openxmlformats.org/markup-compatibility/2006" xmlns:mv="urn:schemas-microsoft-com:mac:vml" xmlns:p="http://schemas.openxmlformats.org/presentationml/2006/main" xmlns:c="http://schemas.openxmlformats.org/drawingml/2006/chart" xmlns:dgm="http://schemas.openxmlformats.org/drawingml/2006/diagram" xmlns:o="urn:schemas-microsoft-com:office:office" xmlns:v="urn:schemas-microsoft-com:vml" xmlns:pvml="urn:schemas-microsoft-com:office:powerpoint" xmlns:com="http://schemas.openxmlformats.org/drawingml/2006/compatibility" xmlns:p14="http://schemas.microsoft.com/office/powerpoint/2010/main" xmlns:p15="http://schemas.microsoft.com/office/powerpoint/2012/main" xmlns:ahyp="http://schemas.microsoft.com/office/drawing/2018/hyperlinkcolor">
   <p:cSld>
     <p:spTree>
@@ -23960,8 +25334,8 @@
         </p:blipFill>
         <p:spPr>
           <a:xfrm>
-            <a:off x="274319" y="965477"/>
-            <a:ext cx="4114800" cy="2732484"/>
+            <a:off x="228600" y="767238"/>
+            <a:ext cx="4023360" cy="2671762"/>
           </a:xfrm>
           <a:prstGeom prst="rect">
             <a:avLst/>
@@ -24140,7 +25514,7 @@
                 </a:solidFill>
                 <a:latin typeface="Roboto"/>
               </a:rPr>
-              <a:t>The teacher sets the targets. SpeedGrader shows every shot.</a:t>
+              <a:t>Same sentence as before, plus a few answers about rounds and practice shots.</a:t>
             </a:r>
           </a:p>
         </p:txBody>
@@ -24201,15 +25575,215 @@
           </a:p>
         </p:txBody>
       </p:sp>
+      <p:pic>
+        <p:nvPicPr>
+          <p:cNvPr id="256" name="Picture 255" descr="launch-lab-review.png"/>
+          <p:cNvPicPr>
+            <a:picLocks noChangeAspect="1"/>
+          </p:cNvPicPr>
+          <p:nvPr/>
+        </p:nvPicPr>
+        <p:blipFill>
+          <a:blip r:embed="rId9"/>
+          <a:stretch>
+            <a:fillRect/>
+          </a:stretch>
+        </p:blipFill>
+        <p:spPr>
+          <a:xfrm>
+            <a:off x="1783080" y="2148840"/>
+            <a:ext cx="2926080" cy="1943100"/>
+          </a:xfrm>
+          <a:prstGeom prst="rect">
+            <a:avLst/>
+          </a:prstGeom>
+          <a:ln w="12700">
+            <a:solidFill>
+              <a:srgbClr val="1B3168"/>
+            </a:solidFill>
+          </a:ln>
+        </p:spPr>
+      </p:pic>
+      <p:sp>
+        <p:nvSpPr>
+          <p:cNvPr id="257" name="Rounded Rectangle 256"/>
+          <p:cNvSpPr/>
+          <p:nvPr/>
+        </p:nvSpPr>
+        <p:spPr>
+          <a:xfrm>
+            <a:off x="1783080" y="1847088"/>
+            <a:ext cx="2331720" cy="274320"/>
+          </a:xfrm>
+          <a:prstGeom prst="roundRect">
+            <a:avLst/>
+          </a:prstGeom>
+          <a:solidFill>
+            <a:srgbClr val="1B3168"/>
+          </a:solidFill>
+          <a:ln>
+            <a:noFill/>
+          </a:ln>
+          <a:effectLst/>
+        </p:spPr>
+        <p:style>
+          <a:lnRef idx="1">
+            <a:schemeClr val="accent1"/>
+          </a:lnRef>
+          <a:fillRef idx="3">
+            <a:schemeClr val="accent1"/>
+          </a:fillRef>
+          <a:effectRef idx="2">
+            <a:schemeClr val="accent1"/>
+          </a:effectRef>
+          <a:fontRef idx="minor">
+            <a:schemeClr val="lt1"/>
+          </a:fontRef>
+        </p:style>
+        <p:txBody>
+          <a:bodyPr rtlCol="0" anchor="ctr" tIns="0" bIns="0"/>
+          <a:lstStyle/>
+          <a:p>
+            <a:pPr algn="ctr"/>
+            <a:r>
+              <a:rPr sz="950" b="1">
+                <a:solidFill>
+                  <a:srgbClr val="FFFFFF"/>
+                </a:solidFill>
+                <a:latin typeface="Roboto"/>
+              </a:rPr>
+              <a:t>What the teacher sees in SpeedGrader</a:t>
+            </a:r>
+          </a:p>
+        </p:txBody>
+      </p:sp>
     </p:spTree>
   </p:cSld>
   <p:clrMapOvr>
     <a:masterClrMapping/>
   </p:clrMapOvr>
+  <p:timing>
+    <p:tnLst>
+      <p:par>
+        <p:cTn id="1" dur="indefinite" restart="never" nodeType="tmRoot">
+          <p:childTnLst>
+            <p:seq concurrent="1" nextAc="seek">
+              <p:cTn id="2" dur="indefinite" nodeType="mainSeq">
+                <p:childTnLst>
+                  <p:par>
+                    <p:cTn id="9" fill="hold">
+                      <p:stCondLst>
+                        <p:cond delay="indefinite"/>
+                      </p:stCondLst>
+                      <p:childTnLst>
+                        <p:par>
+                          <p:cTn id="10" fill="hold">
+                            <p:stCondLst>
+                              <p:cond delay="0"/>
+                            </p:stCondLst>
+                            <p:childTnLst>
+                              <p:par>
+                                <p:cTn id="3" presetID="10" presetClass="entr" presetSubtype="0" fill="hold" nodeType="clickEffect">
+                                  <p:stCondLst>
+                                    <p:cond delay="0"/>
+                                  </p:stCondLst>
+                                  <p:childTnLst>
+                                    <p:set>
+                                      <p:cBhvr>
+                                        <p:cTn id="4" dur="1" fill="hold">
+                                          <p:stCondLst>
+                                            <p:cond delay="0"/>
+                                          </p:stCondLst>
+                                        </p:cTn>
+                                        <p:tgtEl>
+                                          <p:spTgt spid="256"/>
+                                        </p:tgtEl>
+                                        <p:attrNameLst>
+                                          <p:attrName>style.visibility</p:attrName>
+                                        </p:attrNameLst>
+                                      </p:cBhvr>
+                                      <p:to>
+                                        <p:strVal val="visible"/>
+                                      </p:to>
+                                    </p:set>
+                                    <p:animEffect transition="in" filter="fade">
+                                      <p:cBhvr>
+                                        <p:cTn id="5" dur="500"/>
+                                        <p:tgtEl>
+                                          <p:spTgt spid="256"/>
+                                        </p:tgtEl>
+                                      </p:cBhvr>
+                                    </p:animEffect>
+                                  </p:childTnLst>
+                                </p:cTn>
+                              </p:par>
+                              <p:par>
+                                <p:cTn id="6" presetID="10" presetClass="entr" presetSubtype="0" fill="hold" nodeType="withEffect">
+                                  <p:stCondLst>
+                                    <p:cond delay="0"/>
+                                  </p:stCondLst>
+                                  <p:childTnLst>
+                                    <p:set>
+                                      <p:cBhvr>
+                                        <p:cTn id="7" dur="1" fill="hold">
+                                          <p:stCondLst>
+                                            <p:cond delay="0"/>
+                                          </p:stCondLst>
+                                        </p:cTn>
+                                        <p:tgtEl>
+                                          <p:spTgt spid="257"/>
+                                        </p:tgtEl>
+                                        <p:attrNameLst>
+                                          <p:attrName>style.visibility</p:attrName>
+                                        </p:attrNameLst>
+                                      </p:cBhvr>
+                                      <p:to>
+                                        <p:strVal val="visible"/>
+                                      </p:to>
+                                    </p:set>
+                                    <p:animEffect transition="in" filter="fade">
+                                      <p:cBhvr>
+                                        <p:cTn id="8" dur="500"/>
+                                        <p:tgtEl>
+                                          <p:spTgt spid="257"/>
+                                        </p:tgtEl>
+                                      </p:cBhvr>
+                                    </p:animEffect>
+                                  </p:childTnLst>
+                                </p:cTn>
+                              </p:par>
+                            </p:childTnLst>
+                          </p:cTn>
+                        </p:par>
+                      </p:childTnLst>
+                    </p:cTn>
+                  </p:par>
+                </p:childTnLst>
+              </p:cTn>
+              <p:prevCondLst>
+                <p:cond evt="onPrev" delay="0">
+                  <p:tgtEl>
+                    <p:sldTgt/>
+                  </p:tgtEl>
+                </p:cond>
+              </p:prevCondLst>
+              <p:nextCondLst>
+                <p:cond evt="onNext" delay="0">
+                  <p:tgtEl>
+                    <p:sldTgt/>
+                  </p:tgtEl>
+                </p:cond>
+              </p:nextCondLst>
+            </p:seq>
+          </p:childTnLst>
+        </p:cTn>
+      </p:par>
+    </p:tnLst>
+  </p:timing>
 </p:sld>
 </file>
 
-<file path=ppt/slides/slide13.xml><?xml version="1.0" encoding="utf-8"?>
+<file path=ppt/slides/slide14.xml><?xml version="1.0" encoding="utf-8"?>
 <p:sld xmlns:a="http://schemas.openxmlformats.org/drawingml/2006/main" xmlns:r="http://schemas.openxmlformats.org/officeDocument/2006/relationships" xmlns:mc="http://schemas.openxmlformats.org/markup-compatibility/2006" xmlns:mv="urn:schemas-microsoft-com:mac:vml" xmlns:p="http://schemas.openxmlformats.org/presentationml/2006/main" xmlns:c="http://schemas.openxmlformats.org/drawingml/2006/chart" xmlns:dgm="http://schemas.openxmlformats.org/drawingml/2006/diagram" xmlns:o="urn:schemas-microsoft-com:office:office" xmlns:v="urn:schemas-microsoft-com:vml" xmlns:pvml="urn:schemas-microsoft-com:office:powerpoint" xmlns:com="http://schemas.openxmlformats.org/drawingml/2006/compatibility" xmlns:p14="http://schemas.microsoft.com/office/powerpoint/2010/main" xmlns:p15="http://schemas.microsoft.com/office/powerpoint/2012/main" xmlns:ahyp="http://schemas.microsoft.com/office/drawing/2018/hyperlinkcolor">
   <p:cSld>
     <p:spTree>
@@ -24555,8 +26129,8 @@
         </p:blipFill>
         <p:spPr>
           <a:xfrm>
-            <a:off x="274319" y="965477"/>
-            <a:ext cx="4114800" cy="2732484"/>
+            <a:off x="228600" y="767238"/>
+            <a:ext cx="4023360" cy="2671762"/>
           </a:xfrm>
           <a:prstGeom prst="rect">
             <a:avLst/>
@@ -24796,15 +26370,215 @@
           </a:p>
         </p:txBody>
       </p:sp>
+      <p:pic>
+        <p:nvPicPr>
+          <p:cNvPr id="256" name="Picture 255" descr="graph-match-review.png"/>
+          <p:cNvPicPr>
+            <a:picLocks noChangeAspect="1"/>
+          </p:cNvPicPr>
+          <p:nvPr/>
+        </p:nvPicPr>
+        <p:blipFill>
+          <a:blip r:embed="rId9"/>
+          <a:stretch>
+            <a:fillRect/>
+          </a:stretch>
+        </p:blipFill>
+        <p:spPr>
+          <a:xfrm>
+            <a:off x="1783080" y="2148840"/>
+            <a:ext cx="2926080" cy="1943100"/>
+          </a:xfrm>
+          <a:prstGeom prst="rect">
+            <a:avLst/>
+          </a:prstGeom>
+          <a:ln w="12700">
+            <a:solidFill>
+              <a:srgbClr val="1B3168"/>
+            </a:solidFill>
+          </a:ln>
+        </p:spPr>
+      </p:pic>
+      <p:sp>
+        <p:nvSpPr>
+          <p:cNvPr id="257" name="Rounded Rectangle 256"/>
+          <p:cNvSpPr/>
+          <p:nvPr/>
+        </p:nvSpPr>
+        <p:spPr>
+          <a:xfrm>
+            <a:off x="1783080" y="1847088"/>
+            <a:ext cx="2331720" cy="274320"/>
+          </a:xfrm>
+          <a:prstGeom prst="roundRect">
+            <a:avLst/>
+          </a:prstGeom>
+          <a:solidFill>
+            <a:srgbClr val="1B3168"/>
+          </a:solidFill>
+          <a:ln>
+            <a:noFill/>
+          </a:ln>
+          <a:effectLst/>
+        </p:spPr>
+        <p:style>
+          <a:lnRef idx="1">
+            <a:schemeClr val="accent1"/>
+          </a:lnRef>
+          <a:fillRef idx="3">
+            <a:schemeClr val="accent1"/>
+          </a:fillRef>
+          <a:effectRef idx="2">
+            <a:schemeClr val="accent1"/>
+          </a:effectRef>
+          <a:fontRef idx="minor">
+            <a:schemeClr val="lt1"/>
+          </a:fontRef>
+        </p:style>
+        <p:txBody>
+          <a:bodyPr rtlCol="0" anchor="ctr" tIns="0" bIns="0"/>
+          <a:lstStyle/>
+          <a:p>
+            <a:pPr algn="ctr"/>
+            <a:r>
+              <a:rPr sz="950" b="1">
+                <a:solidFill>
+                  <a:srgbClr val="FFFFFF"/>
+                </a:solidFill>
+                <a:latin typeface="Roboto"/>
+              </a:rPr>
+              <a:t>What the teacher sees in SpeedGrader</a:t>
+            </a:r>
+          </a:p>
+        </p:txBody>
+      </p:sp>
     </p:spTree>
   </p:cSld>
   <p:clrMapOvr>
     <a:masterClrMapping/>
   </p:clrMapOvr>
+  <p:timing>
+    <p:tnLst>
+      <p:par>
+        <p:cTn id="1" dur="indefinite" restart="never" nodeType="tmRoot">
+          <p:childTnLst>
+            <p:seq concurrent="1" nextAc="seek">
+              <p:cTn id="2" dur="indefinite" nodeType="mainSeq">
+                <p:childTnLst>
+                  <p:par>
+                    <p:cTn id="9" fill="hold">
+                      <p:stCondLst>
+                        <p:cond delay="indefinite"/>
+                      </p:stCondLst>
+                      <p:childTnLst>
+                        <p:par>
+                          <p:cTn id="10" fill="hold">
+                            <p:stCondLst>
+                              <p:cond delay="0"/>
+                            </p:stCondLst>
+                            <p:childTnLst>
+                              <p:par>
+                                <p:cTn id="3" presetID="10" presetClass="entr" presetSubtype="0" fill="hold" nodeType="clickEffect">
+                                  <p:stCondLst>
+                                    <p:cond delay="0"/>
+                                  </p:stCondLst>
+                                  <p:childTnLst>
+                                    <p:set>
+                                      <p:cBhvr>
+                                        <p:cTn id="4" dur="1" fill="hold">
+                                          <p:stCondLst>
+                                            <p:cond delay="0"/>
+                                          </p:stCondLst>
+                                        </p:cTn>
+                                        <p:tgtEl>
+                                          <p:spTgt spid="256"/>
+                                        </p:tgtEl>
+                                        <p:attrNameLst>
+                                          <p:attrName>style.visibility</p:attrName>
+                                        </p:attrNameLst>
+                                      </p:cBhvr>
+                                      <p:to>
+                                        <p:strVal val="visible"/>
+                                      </p:to>
+                                    </p:set>
+                                    <p:animEffect transition="in" filter="fade">
+                                      <p:cBhvr>
+                                        <p:cTn id="5" dur="500"/>
+                                        <p:tgtEl>
+                                          <p:spTgt spid="256"/>
+                                        </p:tgtEl>
+                                      </p:cBhvr>
+                                    </p:animEffect>
+                                  </p:childTnLst>
+                                </p:cTn>
+                              </p:par>
+                              <p:par>
+                                <p:cTn id="6" presetID="10" presetClass="entr" presetSubtype="0" fill="hold" nodeType="withEffect">
+                                  <p:stCondLst>
+                                    <p:cond delay="0"/>
+                                  </p:stCondLst>
+                                  <p:childTnLst>
+                                    <p:set>
+                                      <p:cBhvr>
+                                        <p:cTn id="7" dur="1" fill="hold">
+                                          <p:stCondLst>
+                                            <p:cond delay="0"/>
+                                          </p:stCondLst>
+                                        </p:cTn>
+                                        <p:tgtEl>
+                                          <p:spTgt spid="257"/>
+                                        </p:tgtEl>
+                                        <p:attrNameLst>
+                                          <p:attrName>style.visibility</p:attrName>
+                                        </p:attrNameLst>
+                                      </p:cBhvr>
+                                      <p:to>
+                                        <p:strVal val="visible"/>
+                                      </p:to>
+                                    </p:set>
+                                    <p:animEffect transition="in" filter="fade">
+                                      <p:cBhvr>
+                                        <p:cTn id="8" dur="500"/>
+                                        <p:tgtEl>
+                                          <p:spTgt spid="257"/>
+                                        </p:tgtEl>
+                                      </p:cBhvr>
+                                    </p:animEffect>
+                                  </p:childTnLst>
+                                </p:cTn>
+                              </p:par>
+                            </p:childTnLst>
+                          </p:cTn>
+                        </p:par>
+                      </p:childTnLst>
+                    </p:cTn>
+                  </p:par>
+                </p:childTnLst>
+              </p:cTn>
+              <p:prevCondLst>
+                <p:cond evt="onPrev" delay="0">
+                  <p:tgtEl>
+                    <p:sldTgt/>
+                  </p:tgtEl>
+                </p:cond>
+              </p:prevCondLst>
+              <p:nextCondLst>
+                <p:cond evt="onNext" delay="0">
+                  <p:tgtEl>
+                    <p:sldTgt/>
+                  </p:tgtEl>
+                </p:cond>
+              </p:nextCondLst>
+            </p:seq>
+          </p:childTnLst>
+        </p:cTn>
+      </p:par>
+    </p:tnLst>
+  </p:timing>
 </p:sld>
 </file>
 
-<file path=ppt/slides/slide14.xml><?xml version="1.0" encoding="utf-8"?>
+<file path=ppt/slides/slide15.xml><?xml version="1.0" encoding="utf-8"?>
 <p:sld xmlns:a="http://schemas.openxmlformats.org/drawingml/2006/main" xmlns:r="http://schemas.openxmlformats.org/officeDocument/2006/relationships" xmlns:mc="http://schemas.openxmlformats.org/markup-compatibility/2006" xmlns:mv="urn:schemas-microsoft-com:mac:vml" xmlns:p="http://schemas.openxmlformats.org/presentationml/2006/main" xmlns:c="http://schemas.openxmlformats.org/drawingml/2006/chart" xmlns:dgm="http://schemas.openxmlformats.org/drawingml/2006/diagram" xmlns:o="urn:schemas-microsoft-com:office:office" xmlns:v="urn:schemas-microsoft-com:vml" xmlns:pvml="urn:schemas-microsoft-com:office:powerpoint" xmlns:com="http://schemas.openxmlformats.org/drawingml/2006/compatibility" xmlns:p14="http://schemas.microsoft.com/office/powerpoint/2010/main" xmlns:p15="http://schemas.microsoft.com/office/powerpoint/2012/main" xmlns:ahyp="http://schemas.microsoft.com/office/drawing/2018/hyperlinkcolor">
   <p:cSld>
     <p:spTree>
@@ -25150,8 +26924,8 @@
         </p:blipFill>
         <p:spPr>
           <a:xfrm>
-            <a:off x="274319" y="965477"/>
-            <a:ext cx="4114800" cy="2732484"/>
+            <a:off x="228600" y="767238"/>
+            <a:ext cx="4023360" cy="2671762"/>
           </a:xfrm>
           <a:prstGeom prst="rect">
             <a:avLst/>
@@ -25330,7 +27104,7 @@
                 </a:solidFill>
                 <a:latin typeface="Roboto"/>
               </a:rPr>
-              <a:t>In SpeedGrader you can replay the drawing stroke by stroke.</a:t>
+              <a:t>Students can draw with a finger on a phone or tablet.</a:t>
             </a:r>
           </a:p>
         </p:txBody>
@@ -25391,15 +27165,215 @@
           </a:p>
         </p:txBody>
       </p:sp>
+      <p:pic>
+        <p:nvPicPr>
+          <p:cNvPr id="256" name="Picture 255" descr="sketch-label-review.png"/>
+          <p:cNvPicPr>
+            <a:picLocks noChangeAspect="1"/>
+          </p:cNvPicPr>
+          <p:nvPr/>
+        </p:nvPicPr>
+        <p:blipFill>
+          <a:blip r:embed="rId9"/>
+          <a:stretch>
+            <a:fillRect/>
+          </a:stretch>
+        </p:blipFill>
+        <p:spPr>
+          <a:xfrm>
+            <a:off x="1783080" y="2148840"/>
+            <a:ext cx="2926080" cy="1943100"/>
+          </a:xfrm>
+          <a:prstGeom prst="rect">
+            <a:avLst/>
+          </a:prstGeom>
+          <a:ln w="12700">
+            <a:solidFill>
+              <a:srgbClr val="1B3168"/>
+            </a:solidFill>
+          </a:ln>
+        </p:spPr>
+      </p:pic>
+      <p:sp>
+        <p:nvSpPr>
+          <p:cNvPr id="257" name="Rounded Rectangle 256"/>
+          <p:cNvSpPr/>
+          <p:nvPr/>
+        </p:nvSpPr>
+        <p:spPr>
+          <a:xfrm>
+            <a:off x="1783080" y="1847088"/>
+            <a:ext cx="2331720" cy="274320"/>
+          </a:xfrm>
+          <a:prstGeom prst="roundRect">
+            <a:avLst/>
+          </a:prstGeom>
+          <a:solidFill>
+            <a:srgbClr val="1B3168"/>
+          </a:solidFill>
+          <a:ln>
+            <a:noFill/>
+          </a:ln>
+          <a:effectLst/>
+        </p:spPr>
+        <p:style>
+          <a:lnRef idx="1">
+            <a:schemeClr val="accent1"/>
+          </a:lnRef>
+          <a:fillRef idx="3">
+            <a:schemeClr val="accent1"/>
+          </a:fillRef>
+          <a:effectRef idx="2">
+            <a:schemeClr val="accent1"/>
+          </a:effectRef>
+          <a:fontRef idx="minor">
+            <a:schemeClr val="lt1"/>
+          </a:fontRef>
+        </p:style>
+        <p:txBody>
+          <a:bodyPr rtlCol="0" anchor="ctr" tIns="0" bIns="0"/>
+          <a:lstStyle/>
+          <a:p>
+            <a:pPr algn="ctr"/>
+            <a:r>
+              <a:rPr sz="950" b="1">
+                <a:solidFill>
+                  <a:srgbClr val="FFFFFF"/>
+                </a:solidFill>
+                <a:latin typeface="Roboto"/>
+              </a:rPr>
+              <a:t>What the teacher sees in SpeedGrader</a:t>
+            </a:r>
+          </a:p>
+        </p:txBody>
+      </p:sp>
     </p:spTree>
   </p:cSld>
   <p:clrMapOvr>
     <a:masterClrMapping/>
   </p:clrMapOvr>
+  <p:timing>
+    <p:tnLst>
+      <p:par>
+        <p:cTn id="1" dur="indefinite" restart="never" nodeType="tmRoot">
+          <p:childTnLst>
+            <p:seq concurrent="1" nextAc="seek">
+              <p:cTn id="2" dur="indefinite" nodeType="mainSeq">
+                <p:childTnLst>
+                  <p:par>
+                    <p:cTn id="9" fill="hold">
+                      <p:stCondLst>
+                        <p:cond delay="indefinite"/>
+                      </p:stCondLst>
+                      <p:childTnLst>
+                        <p:par>
+                          <p:cTn id="10" fill="hold">
+                            <p:stCondLst>
+                              <p:cond delay="0"/>
+                            </p:stCondLst>
+                            <p:childTnLst>
+                              <p:par>
+                                <p:cTn id="3" presetID="10" presetClass="entr" presetSubtype="0" fill="hold" nodeType="clickEffect">
+                                  <p:stCondLst>
+                                    <p:cond delay="0"/>
+                                  </p:stCondLst>
+                                  <p:childTnLst>
+                                    <p:set>
+                                      <p:cBhvr>
+                                        <p:cTn id="4" dur="1" fill="hold">
+                                          <p:stCondLst>
+                                            <p:cond delay="0"/>
+                                          </p:stCondLst>
+                                        </p:cTn>
+                                        <p:tgtEl>
+                                          <p:spTgt spid="256"/>
+                                        </p:tgtEl>
+                                        <p:attrNameLst>
+                                          <p:attrName>style.visibility</p:attrName>
+                                        </p:attrNameLst>
+                                      </p:cBhvr>
+                                      <p:to>
+                                        <p:strVal val="visible"/>
+                                      </p:to>
+                                    </p:set>
+                                    <p:animEffect transition="in" filter="fade">
+                                      <p:cBhvr>
+                                        <p:cTn id="5" dur="500"/>
+                                        <p:tgtEl>
+                                          <p:spTgt spid="256"/>
+                                        </p:tgtEl>
+                                      </p:cBhvr>
+                                    </p:animEffect>
+                                  </p:childTnLst>
+                                </p:cTn>
+                              </p:par>
+                              <p:par>
+                                <p:cTn id="6" presetID="10" presetClass="entr" presetSubtype="0" fill="hold" nodeType="withEffect">
+                                  <p:stCondLst>
+                                    <p:cond delay="0"/>
+                                  </p:stCondLst>
+                                  <p:childTnLst>
+                                    <p:set>
+                                      <p:cBhvr>
+                                        <p:cTn id="7" dur="1" fill="hold">
+                                          <p:stCondLst>
+                                            <p:cond delay="0"/>
+                                          </p:stCondLst>
+                                        </p:cTn>
+                                        <p:tgtEl>
+                                          <p:spTgt spid="257"/>
+                                        </p:tgtEl>
+                                        <p:attrNameLst>
+                                          <p:attrName>style.visibility</p:attrName>
+                                        </p:attrNameLst>
+                                      </p:cBhvr>
+                                      <p:to>
+                                        <p:strVal val="visible"/>
+                                      </p:to>
+                                    </p:set>
+                                    <p:animEffect transition="in" filter="fade">
+                                      <p:cBhvr>
+                                        <p:cTn id="8" dur="500"/>
+                                        <p:tgtEl>
+                                          <p:spTgt spid="257"/>
+                                        </p:tgtEl>
+                                      </p:cBhvr>
+                                    </p:animEffect>
+                                  </p:childTnLst>
+                                </p:cTn>
+                              </p:par>
+                            </p:childTnLst>
+                          </p:cTn>
+                        </p:par>
+                      </p:childTnLst>
+                    </p:cTn>
+                  </p:par>
+                </p:childTnLst>
+              </p:cTn>
+              <p:prevCondLst>
+                <p:cond evt="onPrev" delay="0">
+                  <p:tgtEl>
+                    <p:sldTgt/>
+                  </p:tgtEl>
+                </p:cond>
+              </p:prevCondLst>
+              <p:nextCondLst>
+                <p:cond evt="onNext" delay="0">
+                  <p:tgtEl>
+                    <p:sldTgt/>
+                  </p:tgtEl>
+                </p:cond>
+              </p:nextCondLst>
+            </p:seq>
+          </p:childTnLst>
+        </p:cTn>
+      </p:par>
+    </p:tnLst>
+  </p:timing>
 </p:sld>
 </file>
 
-<file path=ppt/slides/slide15.xml><?xml version="1.0" encoding="utf-8"?>
+<file path=ppt/slides/slide16.xml><?xml version="1.0" encoding="utf-8"?>
 <p:sld xmlns:a="http://schemas.openxmlformats.org/drawingml/2006/main" xmlns:r="http://schemas.openxmlformats.org/officeDocument/2006/relationships" xmlns:mc="http://schemas.openxmlformats.org/markup-compatibility/2006" xmlns:mv="urn:schemas-microsoft-com:mac:vml" xmlns:p="http://schemas.openxmlformats.org/presentationml/2006/main" xmlns:c="http://schemas.openxmlformats.org/drawingml/2006/chart" xmlns:dgm="http://schemas.openxmlformats.org/drawingml/2006/diagram" xmlns:o="urn:schemas-microsoft-com:office:office" xmlns:v="urn:schemas-microsoft-com:vml" xmlns:pvml="urn:schemas-microsoft-com:office:powerpoint" xmlns:com="http://schemas.openxmlformats.org/drawingml/2006/compatibility" xmlns:p14="http://schemas.microsoft.com/office/powerpoint/2010/main" xmlns:p15="http://schemas.microsoft.com/office/powerpoint/2012/main" xmlns:ahyp="http://schemas.microsoft.com/office/drawing/2018/hyperlinkcolor">
   <p:cSld>
     <p:spTree>
@@ -25745,8 +27719,8 @@
         </p:blipFill>
         <p:spPr>
           <a:xfrm>
-            <a:off x="274319" y="965477"/>
-            <a:ext cx="4114800" cy="2732484"/>
+            <a:off x="228600" y="767238"/>
+            <a:ext cx="4023360" cy="2671762"/>
           </a:xfrm>
           <a:prstGeom prst="rect">
             <a:avLst/>
@@ -25925,7 +27899,7 @@
                 </a:solidFill>
                 <a:latin typeface="Roboto"/>
               </a:rPr>
-              <a:t>SpeedGrader shows every wrong try and hint on a timeline.</a:t>
+              <a:t>Hints cost points. The teacher can turn them off or set a time limit.</a:t>
             </a:r>
           </a:p>
         </p:txBody>
@@ -25986,15 +27960,215 @@
           </a:p>
         </p:txBody>
       </p:sp>
+      <p:pic>
+        <p:nvPicPr>
+          <p:cNvPr id="256" name="Picture 255" descr="escape-the-archive-review.png"/>
+          <p:cNvPicPr>
+            <a:picLocks noChangeAspect="1"/>
+          </p:cNvPicPr>
+          <p:nvPr/>
+        </p:nvPicPr>
+        <p:blipFill>
+          <a:blip r:embed="rId9"/>
+          <a:stretch>
+            <a:fillRect/>
+          </a:stretch>
+        </p:blipFill>
+        <p:spPr>
+          <a:xfrm>
+            <a:off x="1783080" y="2148840"/>
+            <a:ext cx="2926080" cy="1943100"/>
+          </a:xfrm>
+          <a:prstGeom prst="rect">
+            <a:avLst/>
+          </a:prstGeom>
+          <a:ln w="12700">
+            <a:solidFill>
+              <a:srgbClr val="1B3168"/>
+            </a:solidFill>
+          </a:ln>
+        </p:spPr>
+      </p:pic>
+      <p:sp>
+        <p:nvSpPr>
+          <p:cNvPr id="257" name="Rounded Rectangle 256"/>
+          <p:cNvSpPr/>
+          <p:nvPr/>
+        </p:nvSpPr>
+        <p:spPr>
+          <a:xfrm>
+            <a:off x="1783080" y="1847088"/>
+            <a:ext cx="2331720" cy="274320"/>
+          </a:xfrm>
+          <a:prstGeom prst="roundRect">
+            <a:avLst/>
+          </a:prstGeom>
+          <a:solidFill>
+            <a:srgbClr val="1B3168"/>
+          </a:solidFill>
+          <a:ln>
+            <a:noFill/>
+          </a:ln>
+          <a:effectLst/>
+        </p:spPr>
+        <p:style>
+          <a:lnRef idx="1">
+            <a:schemeClr val="accent1"/>
+          </a:lnRef>
+          <a:fillRef idx="3">
+            <a:schemeClr val="accent1"/>
+          </a:fillRef>
+          <a:effectRef idx="2">
+            <a:schemeClr val="accent1"/>
+          </a:effectRef>
+          <a:fontRef idx="minor">
+            <a:schemeClr val="lt1"/>
+          </a:fontRef>
+        </p:style>
+        <p:txBody>
+          <a:bodyPr rtlCol="0" anchor="ctr" tIns="0" bIns="0"/>
+          <a:lstStyle/>
+          <a:p>
+            <a:pPr algn="ctr"/>
+            <a:r>
+              <a:rPr sz="950" b="1">
+                <a:solidFill>
+                  <a:srgbClr val="FFFFFF"/>
+                </a:solidFill>
+                <a:latin typeface="Roboto"/>
+              </a:rPr>
+              <a:t>What the teacher sees in SpeedGrader</a:t>
+            </a:r>
+          </a:p>
+        </p:txBody>
+      </p:sp>
     </p:spTree>
   </p:cSld>
   <p:clrMapOvr>
     <a:masterClrMapping/>
   </p:clrMapOvr>
+  <p:timing>
+    <p:tnLst>
+      <p:par>
+        <p:cTn id="1" dur="indefinite" restart="never" nodeType="tmRoot">
+          <p:childTnLst>
+            <p:seq concurrent="1" nextAc="seek">
+              <p:cTn id="2" dur="indefinite" nodeType="mainSeq">
+                <p:childTnLst>
+                  <p:par>
+                    <p:cTn id="9" fill="hold">
+                      <p:stCondLst>
+                        <p:cond delay="indefinite"/>
+                      </p:stCondLst>
+                      <p:childTnLst>
+                        <p:par>
+                          <p:cTn id="10" fill="hold">
+                            <p:stCondLst>
+                              <p:cond delay="0"/>
+                            </p:stCondLst>
+                            <p:childTnLst>
+                              <p:par>
+                                <p:cTn id="3" presetID="10" presetClass="entr" presetSubtype="0" fill="hold" nodeType="clickEffect">
+                                  <p:stCondLst>
+                                    <p:cond delay="0"/>
+                                  </p:stCondLst>
+                                  <p:childTnLst>
+                                    <p:set>
+                                      <p:cBhvr>
+                                        <p:cTn id="4" dur="1" fill="hold">
+                                          <p:stCondLst>
+                                            <p:cond delay="0"/>
+                                          </p:stCondLst>
+                                        </p:cTn>
+                                        <p:tgtEl>
+                                          <p:spTgt spid="256"/>
+                                        </p:tgtEl>
+                                        <p:attrNameLst>
+                                          <p:attrName>style.visibility</p:attrName>
+                                        </p:attrNameLst>
+                                      </p:cBhvr>
+                                      <p:to>
+                                        <p:strVal val="visible"/>
+                                      </p:to>
+                                    </p:set>
+                                    <p:animEffect transition="in" filter="fade">
+                                      <p:cBhvr>
+                                        <p:cTn id="5" dur="500"/>
+                                        <p:tgtEl>
+                                          <p:spTgt spid="256"/>
+                                        </p:tgtEl>
+                                      </p:cBhvr>
+                                    </p:animEffect>
+                                  </p:childTnLst>
+                                </p:cTn>
+                              </p:par>
+                              <p:par>
+                                <p:cTn id="6" presetID="10" presetClass="entr" presetSubtype="0" fill="hold" nodeType="withEffect">
+                                  <p:stCondLst>
+                                    <p:cond delay="0"/>
+                                  </p:stCondLst>
+                                  <p:childTnLst>
+                                    <p:set>
+                                      <p:cBhvr>
+                                        <p:cTn id="7" dur="1" fill="hold">
+                                          <p:stCondLst>
+                                            <p:cond delay="0"/>
+                                          </p:stCondLst>
+                                        </p:cTn>
+                                        <p:tgtEl>
+                                          <p:spTgt spid="257"/>
+                                        </p:tgtEl>
+                                        <p:attrNameLst>
+                                          <p:attrName>style.visibility</p:attrName>
+                                        </p:attrNameLst>
+                                      </p:cBhvr>
+                                      <p:to>
+                                        <p:strVal val="visible"/>
+                                      </p:to>
+                                    </p:set>
+                                    <p:animEffect transition="in" filter="fade">
+                                      <p:cBhvr>
+                                        <p:cTn id="8" dur="500"/>
+                                        <p:tgtEl>
+                                          <p:spTgt spid="257"/>
+                                        </p:tgtEl>
+                                      </p:cBhvr>
+                                    </p:animEffect>
+                                  </p:childTnLst>
+                                </p:cTn>
+                              </p:par>
+                            </p:childTnLst>
+                          </p:cTn>
+                        </p:par>
+                      </p:childTnLst>
+                    </p:cTn>
+                  </p:par>
+                </p:childTnLst>
+              </p:cTn>
+              <p:prevCondLst>
+                <p:cond evt="onPrev" delay="0">
+                  <p:tgtEl>
+                    <p:sldTgt/>
+                  </p:tgtEl>
+                </p:cond>
+              </p:prevCondLst>
+              <p:nextCondLst>
+                <p:cond evt="onNext" delay="0">
+                  <p:tgtEl>
+                    <p:sldTgt/>
+                  </p:tgtEl>
+                </p:cond>
+              </p:nextCondLst>
+            </p:seq>
+          </p:childTnLst>
+        </p:cTn>
+      </p:par>
+    </p:tnLst>
+  </p:timing>
 </p:sld>
 </file>
 
-<file path=ppt/slides/slide16.xml><?xml version="1.0" encoding="utf-8"?>
+<file path=ppt/slides/slide17.xml><?xml version="1.0" encoding="utf-8"?>
 <p:sld xmlns:a="http://schemas.openxmlformats.org/drawingml/2006/main" xmlns:r="http://schemas.openxmlformats.org/officeDocument/2006/relationships" xmlns:mc="http://schemas.openxmlformats.org/markup-compatibility/2006" xmlns:mv="urn:schemas-microsoft-com:mac:vml" xmlns:p="http://schemas.openxmlformats.org/presentationml/2006/main" xmlns:c="http://schemas.openxmlformats.org/drawingml/2006/chart" xmlns:dgm="http://schemas.openxmlformats.org/drawingml/2006/diagram" xmlns:o="urn:schemas-microsoft-com:office:office" xmlns:v="urn:schemas-microsoft-com:vml" xmlns:pvml="urn:schemas-microsoft-com:office:powerpoint" xmlns:com="http://schemas.openxmlformats.org/drawingml/2006/compatibility" xmlns:p14="http://schemas.microsoft.com/office/powerpoint/2010/main" xmlns:p15="http://schemas.microsoft.com/office/powerpoint/2012/main" xmlns:ahyp="http://schemas.microsoft.com/office/drawing/2018/hyperlinkcolor">
   <p:cSld>
     <p:spTree>
@@ -26379,8 +28553,8 @@
         </p:nvSpPr>
         <p:spPr>
           <a:xfrm>
-            <a:off x="512064" y="2331720"/>
-            <a:ext cx="3840480" cy="1645920"/>
+            <a:off x="512064" y="2240280"/>
+            <a:ext cx="3566160" cy="777240"/>
           </a:xfrm>
           <a:prstGeom prst="rect">
             <a:avLst/>
@@ -26411,7 +28585,7 @@
           <a:p>
             <a:pPr algn="l">
               <a:spcAft>
-                <a:spcPts val="1200"/>
+                <a:spcPts val="600"/>
               </a:spcAft>
             </a:pPr>
             <a:r>
@@ -26424,6 +28598,29 @@
               <a:t>Not in another tool</a:t>
             </a:r>
           </a:p>
+        </p:txBody>
+      </p:sp>
+      <p:sp>
+        <p:nvSpPr>
+          <p:cNvPr id="343" name="TextBox 342"/>
+          <p:cNvSpPr txBox="1"/>
+          <p:nvPr/>
+        </p:nvSpPr>
+        <p:spPr>
+          <a:xfrm>
+            <a:off x="512064" y="3063240"/>
+            <a:ext cx="3566160" cy="777240"/>
+          </a:xfrm>
+          <a:prstGeom prst="rect">
+            <a:avLst/>
+          </a:prstGeom>
+          <a:noFill/>
+        </p:spPr>
+        <p:txBody>
+          <a:bodyPr wrap="square" anchor="t" lIns="0" rIns="0" tIns="0" bIns="0">
+            <a:spAutoFit/>
+          </a:bodyPr>
+          <a:lstStyle/>
           <a:p>
             <a:pPr algn="l">
               <a:spcAft>
@@ -26443,7 +28640,7 @@
           <a:p>
             <a:pPr algn="l">
               <a:spcAft>
-                <a:spcPts val="0"/>
+                <a:spcPts val="600"/>
               </a:spcAft>
             </a:pPr>
             <a:r>
@@ -26460,14 +28657,14 @@
       </p:sp>
       <p:sp>
         <p:nvSpPr>
-          <p:cNvPr id="343" name="TextBox 342"/>
+          <p:cNvPr id="344" name="TextBox 343"/>
           <p:cNvSpPr txBox="1"/>
           <p:nvPr/>
         </p:nvSpPr>
         <p:spPr>
           <a:xfrm>
-            <a:off x="5157216" y="2331720"/>
-            <a:ext cx="3474720" cy="1645920"/>
+            <a:off x="5157216" y="2240280"/>
+            <a:ext cx="3566160" cy="777240"/>
           </a:xfrm>
           <a:prstGeom prst="rect">
             <a:avLst/>
@@ -26498,7 +28695,7 @@
           <a:p>
             <a:pPr algn="l">
               <a:spcAft>
-                <a:spcPts val="1200"/>
+                <a:spcPts val="600"/>
               </a:spcAft>
             </a:pPr>
             <a:r>
@@ -26511,6 +28708,29 @@
               <a:t>Add students without a new contract</a:t>
             </a:r>
           </a:p>
+        </p:txBody>
+      </p:sp>
+      <p:sp>
+        <p:nvSpPr>
+          <p:cNvPr id="345" name="TextBox 344"/>
+          <p:cNvSpPr txBox="1"/>
+          <p:nvPr/>
+        </p:nvSpPr>
+        <p:spPr>
+          <a:xfrm>
+            <a:off x="5157216" y="3063240"/>
+            <a:ext cx="3566160" cy="777240"/>
+          </a:xfrm>
+          <a:prstGeom prst="rect">
+            <a:avLst/>
+          </a:prstGeom>
+          <a:noFill/>
+        </p:spPr>
+        <p:txBody>
+          <a:bodyPr wrap="square" anchor="t" lIns="0" rIns="0" tIns="0" bIns="0">
+            <a:spAutoFit/>
+          </a:bodyPr>
+          <a:lstStyle/>
           <a:p>
             <a:pPr algn="l">
               <a:spcAft>
@@ -26530,7 +28750,7 @@
           <a:p>
             <a:pPr algn="l">
               <a:spcAft>
-                <a:spcPts val="0"/>
+                <a:spcPts val="600"/>
               </a:spcAft>
             </a:pPr>
             <a:r>
@@ -26550,10 +28770,252 @@
   <p:clrMapOvr>
     <a:masterClrMapping/>
   </p:clrMapOvr>
+  <p:timing>
+    <p:tnLst>
+      <p:par>
+        <p:cTn id="1" dur="indefinite" restart="never" nodeType="tmRoot">
+          <p:childTnLst>
+            <p:seq concurrent="1" nextAc="seek">
+              <p:cTn id="2" dur="indefinite" nodeType="mainSeq">
+                <p:childTnLst>
+                  <p:par>
+                    <p:cTn id="6" fill="hold">
+                      <p:stCondLst>
+                        <p:cond delay="indefinite"/>
+                      </p:stCondLst>
+                      <p:childTnLst>
+                        <p:par>
+                          <p:cTn id="7" fill="hold">
+                            <p:stCondLst>
+                              <p:cond delay="0"/>
+                            </p:stCondLst>
+                            <p:childTnLst>
+                              <p:par>
+                                <p:cTn id="3" presetID="10" presetClass="entr" presetSubtype="0" fill="hold" nodeType="clickEffect">
+                                  <p:stCondLst>
+                                    <p:cond delay="0"/>
+                                  </p:stCondLst>
+                                  <p:childTnLst>
+                                    <p:set>
+                                      <p:cBhvr>
+                                        <p:cTn id="4" dur="1" fill="hold">
+                                          <p:stCondLst>
+                                            <p:cond delay="0"/>
+                                          </p:stCondLst>
+                                        </p:cTn>
+                                        <p:tgtEl>
+                                          <p:spTgt spid="342"/>
+                                        </p:tgtEl>
+                                        <p:attrNameLst>
+                                          <p:attrName>style.visibility</p:attrName>
+                                        </p:attrNameLst>
+                                      </p:cBhvr>
+                                      <p:to>
+                                        <p:strVal val="visible"/>
+                                      </p:to>
+                                    </p:set>
+                                    <p:animEffect transition="in" filter="fade">
+                                      <p:cBhvr>
+                                        <p:cTn id="5" dur="500"/>
+                                        <p:tgtEl>
+                                          <p:spTgt spid="342"/>
+                                        </p:tgtEl>
+                                      </p:cBhvr>
+                                    </p:animEffect>
+                                  </p:childTnLst>
+                                </p:cTn>
+                              </p:par>
+                            </p:childTnLst>
+                          </p:cTn>
+                        </p:par>
+                      </p:childTnLst>
+                    </p:cTn>
+                  </p:par>
+                  <p:par>
+                    <p:cTn id="11" fill="hold">
+                      <p:stCondLst>
+                        <p:cond delay="indefinite"/>
+                      </p:stCondLst>
+                      <p:childTnLst>
+                        <p:par>
+                          <p:cTn id="12" fill="hold">
+                            <p:stCondLst>
+                              <p:cond delay="0"/>
+                            </p:stCondLst>
+                            <p:childTnLst>
+                              <p:par>
+                                <p:cTn id="8" presetID="10" presetClass="entr" presetSubtype="0" fill="hold" nodeType="clickEffect">
+                                  <p:stCondLst>
+                                    <p:cond delay="0"/>
+                                  </p:stCondLst>
+                                  <p:childTnLst>
+                                    <p:set>
+                                      <p:cBhvr>
+                                        <p:cTn id="9" dur="1" fill="hold">
+                                          <p:stCondLst>
+                                            <p:cond delay="0"/>
+                                          </p:stCondLst>
+                                        </p:cTn>
+                                        <p:tgtEl>
+                                          <p:spTgt spid="343"/>
+                                        </p:tgtEl>
+                                        <p:attrNameLst>
+                                          <p:attrName>style.visibility</p:attrName>
+                                        </p:attrNameLst>
+                                      </p:cBhvr>
+                                      <p:to>
+                                        <p:strVal val="visible"/>
+                                      </p:to>
+                                    </p:set>
+                                    <p:animEffect transition="in" filter="fade">
+                                      <p:cBhvr>
+                                        <p:cTn id="10" dur="500"/>
+                                        <p:tgtEl>
+                                          <p:spTgt spid="343"/>
+                                        </p:tgtEl>
+                                      </p:cBhvr>
+                                    </p:animEffect>
+                                  </p:childTnLst>
+                                </p:cTn>
+                              </p:par>
+                            </p:childTnLst>
+                          </p:cTn>
+                        </p:par>
+                      </p:childTnLst>
+                    </p:cTn>
+                  </p:par>
+                  <p:par>
+                    <p:cTn id="16" fill="hold">
+                      <p:stCondLst>
+                        <p:cond delay="indefinite"/>
+                      </p:stCondLst>
+                      <p:childTnLst>
+                        <p:par>
+                          <p:cTn id="17" fill="hold">
+                            <p:stCondLst>
+                              <p:cond delay="0"/>
+                            </p:stCondLst>
+                            <p:childTnLst>
+                              <p:par>
+                                <p:cTn id="13" presetID="10" presetClass="entr" presetSubtype="0" fill="hold" nodeType="clickEffect">
+                                  <p:stCondLst>
+                                    <p:cond delay="0"/>
+                                  </p:stCondLst>
+                                  <p:childTnLst>
+                                    <p:set>
+                                      <p:cBhvr>
+                                        <p:cTn id="14" dur="1" fill="hold">
+                                          <p:stCondLst>
+                                            <p:cond delay="0"/>
+                                          </p:stCondLst>
+                                        </p:cTn>
+                                        <p:tgtEl>
+                                          <p:spTgt spid="344"/>
+                                        </p:tgtEl>
+                                        <p:attrNameLst>
+                                          <p:attrName>style.visibility</p:attrName>
+                                        </p:attrNameLst>
+                                      </p:cBhvr>
+                                      <p:to>
+                                        <p:strVal val="visible"/>
+                                      </p:to>
+                                    </p:set>
+                                    <p:animEffect transition="in" filter="fade">
+                                      <p:cBhvr>
+                                        <p:cTn id="15" dur="500"/>
+                                        <p:tgtEl>
+                                          <p:spTgt spid="344"/>
+                                        </p:tgtEl>
+                                      </p:cBhvr>
+                                    </p:animEffect>
+                                  </p:childTnLst>
+                                </p:cTn>
+                              </p:par>
+                            </p:childTnLst>
+                          </p:cTn>
+                        </p:par>
+                      </p:childTnLst>
+                    </p:cTn>
+                  </p:par>
+                  <p:par>
+                    <p:cTn id="21" fill="hold">
+                      <p:stCondLst>
+                        <p:cond delay="indefinite"/>
+                      </p:stCondLst>
+                      <p:childTnLst>
+                        <p:par>
+                          <p:cTn id="22" fill="hold">
+                            <p:stCondLst>
+                              <p:cond delay="0"/>
+                            </p:stCondLst>
+                            <p:childTnLst>
+                              <p:par>
+                                <p:cTn id="18" presetID="10" presetClass="entr" presetSubtype="0" fill="hold" nodeType="clickEffect">
+                                  <p:stCondLst>
+                                    <p:cond delay="0"/>
+                                  </p:stCondLst>
+                                  <p:childTnLst>
+                                    <p:set>
+                                      <p:cBhvr>
+                                        <p:cTn id="19" dur="1" fill="hold">
+                                          <p:stCondLst>
+                                            <p:cond delay="0"/>
+                                          </p:stCondLst>
+                                        </p:cTn>
+                                        <p:tgtEl>
+                                          <p:spTgt spid="345"/>
+                                        </p:tgtEl>
+                                        <p:attrNameLst>
+                                          <p:attrName>style.visibility</p:attrName>
+                                        </p:attrNameLst>
+                                      </p:cBhvr>
+                                      <p:to>
+                                        <p:strVal val="visible"/>
+                                      </p:to>
+                                    </p:set>
+                                    <p:animEffect transition="in" filter="fade">
+                                      <p:cBhvr>
+                                        <p:cTn id="20" dur="500"/>
+                                        <p:tgtEl>
+                                          <p:spTgt spid="345"/>
+                                        </p:tgtEl>
+                                      </p:cBhvr>
+                                    </p:animEffect>
+                                  </p:childTnLst>
+                                </p:cTn>
+                              </p:par>
+                            </p:childTnLst>
+                          </p:cTn>
+                        </p:par>
+                      </p:childTnLst>
+                    </p:cTn>
+                  </p:par>
+                </p:childTnLst>
+              </p:cTn>
+              <p:prevCondLst>
+                <p:cond evt="onPrev" delay="0">
+                  <p:tgtEl>
+                    <p:sldTgt/>
+                  </p:tgtEl>
+                </p:cond>
+              </p:prevCondLst>
+              <p:nextCondLst>
+                <p:cond evt="onNext" delay="0">
+                  <p:tgtEl>
+                    <p:sldTgt/>
+                  </p:tgtEl>
+                </p:cond>
+              </p:nextCondLst>
+            </p:seq>
+          </p:childTnLst>
+        </p:cTn>
+      </p:par>
+    </p:tnLst>
+  </p:timing>
 </p:sld>
 </file>
 
-<file path=ppt/slides/slide17.xml><?xml version="1.0" encoding="utf-8"?>
+<file path=ppt/slides/slide18.xml><?xml version="1.0" encoding="utf-8"?>
 <p:sld xmlns:a="http://schemas.openxmlformats.org/drawingml/2006/main" xmlns:r="http://schemas.openxmlformats.org/officeDocument/2006/relationships" xmlns:mc="http://schemas.openxmlformats.org/markup-compatibility/2006" xmlns:mv="urn:schemas-microsoft-com:mac:vml" xmlns:p="http://schemas.openxmlformats.org/presentationml/2006/main" xmlns:c="http://schemas.openxmlformats.org/drawingml/2006/chart" xmlns:dgm="http://schemas.openxmlformats.org/drawingml/2006/diagram" xmlns:o="urn:schemas-microsoft-com:office:office" xmlns:v="urn:schemas-microsoft-com:vml" xmlns:pvml="urn:schemas-microsoft-com:office:powerpoint" xmlns:com="http://schemas.openxmlformats.org/drawingml/2006/compatibility" xmlns:p14="http://schemas.microsoft.com/office/powerpoint/2010/main" xmlns:p15="http://schemas.microsoft.com/office/powerpoint/2012/main" xmlns:ahyp="http://schemas.microsoft.com/office/drawing/2018/hyperlinkcolor">
   <p:cSld>
     <p:bg>
@@ -27030,10 +29492,128 @@
   <p:clrMapOvr>
     <a:masterClrMapping/>
   </p:clrMapOvr>
+  <p:timing>
+    <p:tnLst>
+      <p:par>
+        <p:cTn id="1" dur="indefinite" restart="never" nodeType="tmRoot">
+          <p:childTnLst>
+            <p:seq concurrent="1" nextAc="seek">
+              <p:cTn id="2" dur="indefinite" nodeType="mainSeq">
+                <p:childTnLst>
+                  <p:par>
+                    <p:cTn id="9" fill="hold">
+                      <p:stCondLst>
+                        <p:cond delay="indefinite"/>
+                      </p:stCondLst>
+                      <p:childTnLst>
+                        <p:par>
+                          <p:cTn id="10" fill="hold">
+                            <p:stCondLst>
+                              <p:cond delay="0"/>
+                            </p:stCondLst>
+                            <p:childTnLst>
+                              <p:par>
+                                <p:cTn id="3" presetID="10" presetClass="entr" presetSubtype="0" fill="hold" nodeType="clickEffect">
+                                  <p:stCondLst>
+                                    <p:cond delay="0"/>
+                                  </p:stCondLst>
+                                  <p:childTnLst>
+                                    <p:set>
+                                      <p:cBhvr>
+                                        <p:cTn id="4" dur="1" fill="hold">
+                                          <p:stCondLst>
+                                            <p:cond delay="0"/>
+                                          </p:stCondLst>
+                                        </p:cTn>
+                                        <p:tgtEl>
+                                          <p:spTgt spid="387"/>
+                                        </p:tgtEl>
+                                        <p:attrNameLst>
+                                          <p:attrName>style.visibility</p:attrName>
+                                        </p:attrNameLst>
+                                      </p:cBhvr>
+                                      <p:to>
+                                        <p:strVal val="visible"/>
+                                      </p:to>
+                                    </p:set>
+                                    <p:animEffect transition="in" filter="fade">
+                                      <p:cBhvr>
+                                        <p:cTn id="5" dur="500"/>
+                                        <p:tgtEl>
+                                          <p:spTgt spid="387"/>
+                                        </p:tgtEl>
+                                      </p:cBhvr>
+                                    </p:animEffect>
+                                  </p:childTnLst>
+                                </p:cTn>
+                              </p:par>
+                              <p:par>
+                                <p:cTn id="6" presetID="10" presetClass="entr" presetSubtype="0" fill="hold" nodeType="withEffect">
+                                  <p:stCondLst>
+                                    <p:cond delay="0"/>
+                                  </p:stCondLst>
+                                  <p:childTnLst>
+                                    <p:set>
+                                      <p:cBhvr>
+                                        <p:cTn id="7" dur="1" fill="hold">
+                                          <p:stCondLst>
+                                            <p:cond delay="0"/>
+                                          </p:stCondLst>
+                                        </p:cTn>
+                                        <p:tgtEl>
+                                          <p:spTgt spid="401"/>
+                                        </p:tgtEl>
+                                        <p:attrNameLst>
+                                          <p:attrName>style.visibility</p:attrName>
+                                        </p:attrNameLst>
+                                      </p:cBhvr>
+                                      <p:to>
+                                        <p:strVal val="visible"/>
+                                      </p:to>
+                                    </p:set>
+                                    <p:animEffect transition="in" filter="fade">
+                                      <p:cBhvr>
+                                        <p:cTn id="8" dur="500"/>
+                                        <p:tgtEl>
+                                          <p:spTgt spid="401"/>
+                                        </p:tgtEl>
+                                      </p:cBhvr>
+                                    </p:animEffect>
+                                  </p:childTnLst>
+                                </p:cTn>
+                              </p:par>
+                            </p:childTnLst>
+                          </p:cTn>
+                        </p:par>
+                      </p:childTnLst>
+                    </p:cTn>
+                  </p:par>
+                </p:childTnLst>
+              </p:cTn>
+              <p:prevCondLst>
+                <p:cond evt="onPrev" delay="0">
+                  <p:tgtEl>
+                    <p:sldTgt/>
+                  </p:tgtEl>
+                </p:cond>
+              </p:prevCondLst>
+              <p:nextCondLst>
+                <p:cond evt="onNext" delay="0">
+                  <p:tgtEl>
+                    <p:sldTgt/>
+                  </p:tgtEl>
+                </p:cond>
+              </p:nextCondLst>
+            </p:seq>
+          </p:childTnLst>
+        </p:cTn>
+      </p:par>
+    </p:tnLst>
+  </p:timing>
 </p:sld>
 </file>
 
-<file path=ppt/slides/slide18.xml><?xml version="1.0" encoding="utf-8"?>
+<file path=ppt/slides/slide19.xml><?xml version="1.0" encoding="utf-8"?>
 <p:sld xmlns:a="http://schemas.openxmlformats.org/drawingml/2006/main" xmlns:r="http://schemas.openxmlformats.org/officeDocument/2006/relationships" xmlns:mc="http://schemas.openxmlformats.org/markup-compatibility/2006" xmlns:mv="urn:schemas-microsoft-com:mac:vml" xmlns:p="http://schemas.openxmlformats.org/presentationml/2006/main" xmlns:c="http://schemas.openxmlformats.org/drawingml/2006/chart" xmlns:dgm="http://schemas.openxmlformats.org/drawingml/2006/diagram" xmlns:o="urn:schemas-microsoft-com:office:office" xmlns:v="urn:schemas-microsoft-com:vml" xmlns:pvml="urn:schemas-microsoft-com:office:powerpoint" xmlns:com="http://schemas.openxmlformats.org/drawingml/2006/compatibility" xmlns:p14="http://schemas.microsoft.com/office/powerpoint/2010/main" xmlns:p15="http://schemas.microsoft.com/office/powerpoint/2012/main" xmlns:ahyp="http://schemas.microsoft.com/office/drawing/2018/hyperlinkcolor">
   <p:cSld>
     <p:bg>
@@ -27692,662 +30272,248 @@
   <p:clrMapOvr>
     <a:masterClrMapping/>
   </p:clrMapOvr>
-</p:sld>
-</file>
-
-<file path=ppt/slides/slide19.xml><?xml version="1.0" encoding="utf-8"?>
-<p:sld xmlns:a="http://schemas.openxmlformats.org/drawingml/2006/main" xmlns:r="http://schemas.openxmlformats.org/officeDocument/2006/relationships" xmlns:mc="http://schemas.openxmlformats.org/markup-compatibility/2006" xmlns:mv="urn:schemas-microsoft-com:mac:vml" xmlns:p="http://schemas.openxmlformats.org/presentationml/2006/main" xmlns:c="http://schemas.openxmlformats.org/drawingml/2006/chart" xmlns:dgm="http://schemas.openxmlformats.org/drawingml/2006/diagram" xmlns:o="urn:schemas-microsoft-com:office:office" xmlns:v="urn:schemas-microsoft-com:vml" xmlns:pvml="urn:schemas-microsoft-com:office:powerpoint" xmlns:com="http://schemas.openxmlformats.org/drawingml/2006/compatibility" xmlns:p14="http://schemas.microsoft.com/office/powerpoint/2010/main" xmlns:p15="http://schemas.microsoft.com/office/powerpoint/2012/main" xmlns:ahyp="http://schemas.microsoft.com/office/drawing/2018/hyperlinkcolor">
-  <p:cSld>
-    <p:bg>
-      <p:bgPr>
-        <a:solidFill>
-          <a:srgbClr val="1B3168"/>
-        </a:solidFill>
-      </p:bgPr>
-    </p:bg>
-    <p:spTree>
-      <p:nvGrpSpPr>
-        <p:cNvPr id="458" name="Shape 458"/>
-        <p:cNvGrpSpPr/>
-        <p:nvPr/>
-      </p:nvGrpSpPr>
-      <p:grpSpPr>
-        <a:xfrm>
-          <a:off x="0" y="0"/>
-          <a:ext cx="0" cy="0"/>
-          <a:chOff x="0" y="0"/>
-          <a:chExt cx="0" cy="0"/>
-        </a:xfrm>
-      </p:grpSpPr>
-      <p:sp>
-        <p:nvSpPr>
-          <p:cNvPr id="459" name="Google Shape;459;p49"/>
-          <p:cNvSpPr/>
-          <p:nvPr/>
-        </p:nvSpPr>
-        <p:spPr>
-          <a:xfrm>
-            <a:off x="7155625" y="-762000"/>
-            <a:ext cx="2743200" cy="2688300"/>
-          </a:xfrm>
-          <a:prstGeom prst="donut">
-            <a:avLst>
-              <a:gd fmla="val 13443" name="adj"/>
-            </a:avLst>
-          </a:prstGeom>
-          <a:solidFill>
-            <a:srgbClr val="25AFFA"/>
-          </a:solidFill>
-          <a:ln cap="flat" cmpd="sng" w="9525">
-            <a:solidFill>
-              <a:srgbClr val="25AFFA"/>
-            </a:solidFill>
-            <a:prstDash val="solid"/>
-            <a:round/>
-            <a:headEnd len="sm" w="sm" type="none"/>
-            <a:tailEnd len="sm" w="sm" type="none"/>
-          </a:ln>
-        </p:spPr>
-        <p:txBody>
-          <a:bodyPr anchorCtr="0" anchor="ctr" bIns="91425" lIns="91425" spcFirstLastPara="1" rIns="91425" wrap="square" tIns="91425">
-            <a:noAutofit/>
-          </a:bodyPr>
-          <a:lstStyle/>
-          <a:p>
-            <a:pPr indent="0" lvl="0" marL="0" rtl="0" algn="l">
-              <a:spcBef>
-                <a:spcPts val="0"/>
-              </a:spcBef>
-              <a:spcAft>
-                <a:spcPts val="0"/>
-              </a:spcAft>
-              <a:buNone/>
-            </a:pPr>
-            <a:r>
-              <a:t/>
-            </a:r>
-            <a:endParaRPr/>
-          </a:p>
-        </p:txBody>
-      </p:sp>
-      <p:pic>
-        <p:nvPicPr>
-          <p:cNvPr id="460" name="Google Shape;460;p49"/>
-          <p:cNvPicPr preferRelativeResize="0"/>
-          <p:nvPr/>
-        </p:nvPicPr>
-        <p:blipFill rotWithShape="1">
-          <a:blip r:embed="rId3">
-            <a:alphaModFix/>
-          </a:blip>
-          <a:srcRect b="0" l="0" r="0" t="0"/>
-          <a:stretch/>
-        </p:blipFill>
-        <p:spPr>
-          <a:xfrm rot="-5400000">
-            <a:off x="-633564" y="623533"/>
-            <a:ext cx="2494130" cy="1247065"/>
-          </a:xfrm>
-          <a:prstGeom prst="rect">
-            <a:avLst/>
-          </a:prstGeom>
-          <a:noFill/>
-          <a:ln>
-            <a:noFill/>
-          </a:ln>
-        </p:spPr>
-      </p:pic>
-      <p:sp>
-        <p:nvSpPr>
-          <p:cNvPr id="461" name="Google Shape;461;p49"/>
-          <p:cNvSpPr/>
-          <p:nvPr/>
-        </p:nvSpPr>
-        <p:spPr>
-          <a:xfrm>
-            <a:off x="655268" y="2102484"/>
-            <a:ext cx="2522434" cy="2385784"/>
-          </a:xfrm>
-          <a:custGeom>
-            <a:rect b="b" l="l" r="r" t="t"/>
-            <a:pathLst>
-              <a:path extrusionOk="0" h="1109667" w="1173225">
-                <a:moveTo>
-                  <a:pt x="1048765" y="1109667"/>
-                </a:moveTo>
-                <a:lnTo>
-                  <a:pt x="124460" y="1109667"/>
-                </a:lnTo>
-                <a:cubicBezTo>
-                  <a:pt x="55880" y="1109667"/>
-                  <a:pt x="0" y="1053787"/>
-                  <a:pt x="0" y="985207"/>
-                </a:cubicBezTo>
-                <a:lnTo>
-                  <a:pt x="0" y="124460"/>
-                </a:lnTo>
-                <a:cubicBezTo>
-                  <a:pt x="0" y="55880"/>
-                  <a:pt x="55880" y="0"/>
-                  <a:pt x="124460" y="0"/>
-                </a:cubicBezTo>
-                <a:lnTo>
-                  <a:pt x="1048765" y="0"/>
-                </a:lnTo>
-                <a:cubicBezTo>
-                  <a:pt x="1117345" y="0"/>
-                  <a:pt x="1173225" y="55880"/>
-                  <a:pt x="1173225" y="124460"/>
-                </a:cubicBezTo>
-                <a:lnTo>
-                  <a:pt x="1173225" y="985207"/>
-                </a:lnTo>
-                <a:cubicBezTo>
-                  <a:pt x="1173225" y="1053787"/>
-                  <a:pt x="1117345" y="1109667"/>
-                  <a:pt x="1048765" y="1109667"/>
-                </a:cubicBezTo>
-                <a:close/>
-              </a:path>
-            </a:pathLst>
-          </a:custGeom>
-          <a:solidFill>
-            <a:srgbClr val="FFFFFF"/>
-          </a:solidFill>
-          <a:ln>
-            <a:noFill/>
-          </a:ln>
-        </p:spPr>
-        <p:txBody>
-          <a:bodyPr anchorCtr="0" anchor="ctr" bIns="45725" lIns="45725" spcFirstLastPara="1" rIns="45725" wrap="square" tIns="45725">
-            <a:noAutofit/>
-          </a:bodyPr>
-          <a:lstStyle/>
-          <a:p>
-            <a:pPr indent="0" lvl="0" marL="0" rtl="0" algn="l">
-              <a:spcBef>
-                <a:spcPts val="0"/>
-              </a:spcBef>
-              <a:spcAft>
-                <a:spcPts val="0"/>
-              </a:spcAft>
-              <a:buNone/>
-            </a:pPr>
-            <a:r>
-              <a:t/>
-            </a:r>
-            <a:endParaRPr/>
-          </a:p>
-        </p:txBody>
-      </p:sp>
-      <p:sp>
-        <p:nvSpPr>
-          <p:cNvPr id="462" name="Google Shape;462;p49"/>
-          <p:cNvSpPr/>
-          <p:nvPr/>
-        </p:nvSpPr>
-        <p:spPr>
-          <a:xfrm>
-            <a:off x="3310802" y="2102484"/>
-            <a:ext cx="2522434" cy="2385784"/>
-          </a:xfrm>
-          <a:custGeom>
-            <a:rect b="b" l="l" r="r" t="t"/>
-            <a:pathLst>
-              <a:path extrusionOk="0" h="1109667" w="1173225">
-                <a:moveTo>
-                  <a:pt x="1048765" y="1109667"/>
-                </a:moveTo>
-                <a:lnTo>
-                  <a:pt x="124460" y="1109667"/>
-                </a:lnTo>
-                <a:cubicBezTo>
-                  <a:pt x="55880" y="1109667"/>
-                  <a:pt x="0" y="1053787"/>
-                  <a:pt x="0" y="985207"/>
-                </a:cubicBezTo>
-                <a:lnTo>
-                  <a:pt x="0" y="124460"/>
-                </a:lnTo>
-                <a:cubicBezTo>
-                  <a:pt x="0" y="55880"/>
-                  <a:pt x="55880" y="0"/>
-                  <a:pt x="124460" y="0"/>
-                </a:cubicBezTo>
-                <a:lnTo>
-                  <a:pt x="1048765" y="0"/>
-                </a:lnTo>
-                <a:cubicBezTo>
-                  <a:pt x="1117345" y="0"/>
-                  <a:pt x="1173225" y="55880"/>
-                  <a:pt x="1173225" y="124460"/>
-                </a:cubicBezTo>
-                <a:lnTo>
-                  <a:pt x="1173225" y="985207"/>
-                </a:lnTo>
-                <a:cubicBezTo>
-                  <a:pt x="1173225" y="1053787"/>
-                  <a:pt x="1117345" y="1109667"/>
-                  <a:pt x="1048765" y="1109667"/>
-                </a:cubicBezTo>
-                <a:close/>
-              </a:path>
-            </a:pathLst>
-          </a:custGeom>
-          <a:solidFill>
-            <a:srgbClr val="FFFFFF"/>
-          </a:solidFill>
-          <a:ln>
-            <a:noFill/>
-          </a:ln>
-        </p:spPr>
-        <p:txBody>
-          <a:bodyPr anchorCtr="0" anchor="ctr" bIns="45725" lIns="45725" spcFirstLastPara="1" rIns="45725" wrap="square" tIns="45725">
-            <a:noAutofit/>
-          </a:bodyPr>
-          <a:lstStyle/>
-          <a:p>
-            <a:pPr indent="0" lvl="0" marL="0" rtl="0" algn="l">
-              <a:spcBef>
-                <a:spcPts val="0"/>
-              </a:spcBef>
-              <a:spcAft>
-                <a:spcPts val="0"/>
-              </a:spcAft>
-              <a:buNone/>
-            </a:pPr>
-            <a:r>
-              <a:t/>
-            </a:r>
-            <a:endParaRPr/>
-          </a:p>
-        </p:txBody>
-      </p:sp>
-      <p:sp>
-        <p:nvSpPr>
-          <p:cNvPr id="463" name="Google Shape;463;p49"/>
-          <p:cNvSpPr/>
-          <p:nvPr/>
-        </p:nvSpPr>
-        <p:spPr>
-          <a:xfrm>
-            <a:off x="5966338" y="2102484"/>
-            <a:ext cx="2522434" cy="2385784"/>
-          </a:xfrm>
-          <a:custGeom>
-            <a:rect b="b" l="l" r="r" t="t"/>
-            <a:pathLst>
-              <a:path extrusionOk="0" h="1109667" w="1173225">
-                <a:moveTo>
-                  <a:pt x="1048765" y="1109667"/>
-                </a:moveTo>
-                <a:lnTo>
-                  <a:pt x="124460" y="1109667"/>
-                </a:lnTo>
-                <a:cubicBezTo>
-                  <a:pt x="55880" y="1109667"/>
-                  <a:pt x="0" y="1053787"/>
-                  <a:pt x="0" y="985207"/>
-                </a:cubicBezTo>
-                <a:lnTo>
-                  <a:pt x="0" y="124460"/>
-                </a:lnTo>
-                <a:cubicBezTo>
-                  <a:pt x="0" y="55880"/>
-                  <a:pt x="55880" y="0"/>
-                  <a:pt x="124460" y="0"/>
-                </a:cubicBezTo>
-                <a:lnTo>
-                  <a:pt x="1048765" y="0"/>
-                </a:lnTo>
-                <a:cubicBezTo>
-                  <a:pt x="1117345" y="0"/>
-                  <a:pt x="1173225" y="55880"/>
-                  <a:pt x="1173225" y="124460"/>
-                </a:cubicBezTo>
-                <a:lnTo>
-                  <a:pt x="1173225" y="985207"/>
-                </a:lnTo>
-                <a:cubicBezTo>
-                  <a:pt x="1173225" y="1053787"/>
-                  <a:pt x="1117345" y="1109667"/>
-                  <a:pt x="1048765" y="1109667"/>
-                </a:cubicBezTo>
-                <a:close/>
-              </a:path>
-            </a:pathLst>
-          </a:custGeom>
-          <a:solidFill>
-            <a:srgbClr val="FFFFFF"/>
-          </a:solidFill>
-          <a:ln>
-            <a:noFill/>
-          </a:ln>
-        </p:spPr>
-        <p:txBody>
-          <a:bodyPr anchorCtr="0" anchor="ctr" bIns="45725" lIns="45725" spcFirstLastPara="1" rIns="45725" wrap="square" tIns="45725">
-            <a:noAutofit/>
-          </a:bodyPr>
-          <a:lstStyle/>
-          <a:p>
-            <a:pPr indent="0" lvl="0" marL="0" rtl="0" algn="l">
-              <a:spcBef>
-                <a:spcPts val="0"/>
-              </a:spcBef>
-              <a:spcAft>
-                <a:spcPts val="0"/>
-              </a:spcAft>
-              <a:buNone/>
-            </a:pPr>
-            <a:r>
-              <a:t/>
-            </a:r>
-            <a:endParaRPr/>
-          </a:p>
-        </p:txBody>
-      </p:sp>
-      <p:pic>
-        <p:nvPicPr>
-          <p:cNvPr id="470" name="Google Shape;470;p49"/>
-          <p:cNvPicPr preferRelativeResize="0"/>
-          <p:nvPr/>
-        </p:nvPicPr>
-        <p:blipFill rotWithShape="1">
-          <a:blip r:embed="rId4">
-            <a:alphaModFix/>
-          </a:blip>
-          <a:srcRect b="0" l="0" r="0" t="0"/>
-          <a:stretch/>
-        </p:blipFill>
-        <p:spPr>
-          <a:xfrm rot="5400000">
-            <a:off x="0" y="3792331"/>
-            <a:ext cx="1351170" cy="1351169"/>
-          </a:xfrm>
-          <a:prstGeom prst="rect">
-            <a:avLst/>
-          </a:prstGeom>
-          <a:noFill/>
-          <a:ln>
-            <a:noFill/>
-          </a:ln>
-        </p:spPr>
-      </p:pic>
-      <p:pic>
-        <p:nvPicPr>
-          <p:cNvPr id="471" name="Google Shape;471;p49"/>
-          <p:cNvPicPr preferRelativeResize="0"/>
-          <p:nvPr/>
-        </p:nvPicPr>
-        <p:blipFill rotWithShape="1">
-          <a:blip r:embed="rId5">
-            <a:alphaModFix/>
-          </a:blip>
-          <a:srcRect b="0" l="0" r="0" t="0"/>
-          <a:stretch/>
-        </p:blipFill>
-        <p:spPr>
-          <a:xfrm>
-            <a:off x="79132" y="4418758"/>
-            <a:ext cx="1078263" cy="653248"/>
-          </a:xfrm>
-          <a:prstGeom prst="rect">
-            <a:avLst/>
-          </a:prstGeom>
-          <a:noFill/>
-          <a:ln>
-            <a:noFill/>
-          </a:ln>
-        </p:spPr>
-      </p:pic>
-      <p:sp>
-        <p:nvSpPr>
-          <p:cNvPr id="472" name="TextBox 471"/>
-          <p:cNvSpPr txBox="1"/>
-          <p:nvPr/>
-        </p:nvSpPr>
-        <p:spPr>
-          <a:xfrm>
-            <a:off x="1188720" y="548640"/>
-            <a:ext cx="6766560" cy="548640"/>
-          </a:xfrm>
-          <a:prstGeom prst="rect">
-            <a:avLst/>
-          </a:prstGeom>
-          <a:noFill/>
-        </p:spPr>
-        <p:txBody>
-          <a:bodyPr wrap="square" anchor="t" lIns="0" rIns="0" tIns="0" bIns="0">
-            <a:spAutoFit/>
-          </a:bodyPr>
-          <a:lstStyle/>
-          <a:p>
-            <a:pPr algn="ctr">
-              <a:spcAft>
-                <a:spcPts val="0"/>
-              </a:spcAft>
-            </a:pPr>
-            <a:r>
-              <a:rPr sz="2800" b="1" i="0">
-                <a:solidFill>
-                  <a:srgbClr val="FFFFFF"/>
-                </a:solidFill>
-                <a:latin typeface="League Spartan"/>
-              </a:rPr>
-              <a:t>Can You Trust What the AI Made?</a:t>
-            </a:r>
-          </a:p>
-        </p:txBody>
-      </p:sp>
-      <p:sp>
-        <p:nvSpPr>
-          <p:cNvPr id="473" name="TextBox 472"/>
-          <p:cNvSpPr txBox="1"/>
-          <p:nvPr/>
-        </p:nvSpPr>
-        <p:spPr>
-          <a:xfrm>
-            <a:off x="1188720" y="1143000"/>
-            <a:ext cx="6766560" cy="457200"/>
-          </a:xfrm>
-          <a:prstGeom prst="rect">
-            <a:avLst/>
-          </a:prstGeom>
-          <a:noFill/>
-        </p:spPr>
-        <p:txBody>
-          <a:bodyPr wrap="square" anchor="t" lIns="0" rIns="0" tIns="0" bIns="0">
-            <a:spAutoFit/>
-          </a:bodyPr>
-          <a:lstStyle/>
-          <a:p>
-            <a:pPr algn="ctr">
-              <a:spcAft>
-                <a:spcPts val="600"/>
-              </a:spcAft>
-            </a:pPr>
-            <a:r>
-              <a:rPr sz="1300" b="0" i="0">
-                <a:solidFill>
-                  <a:srgbClr val="FFFFFF"/>
-                </a:solidFill>
-                <a:latin typeface="Roboto"/>
-              </a:rPr>
-              <a:t>What checks it, and what still needs a person</a:t>
-            </a:r>
-          </a:p>
-        </p:txBody>
-      </p:sp>
-      <p:sp>
-        <p:nvSpPr>
-          <p:cNvPr id="474" name="TextBox 473"/>
-          <p:cNvSpPr txBox="1"/>
-          <p:nvPr/>
-        </p:nvSpPr>
-        <p:spPr>
-          <a:xfrm>
-            <a:off x="859536" y="2331720"/>
-            <a:ext cx="2121408" cy="2011680"/>
-          </a:xfrm>
-          <a:prstGeom prst="rect">
-            <a:avLst/>
-          </a:prstGeom>
-          <a:noFill/>
-        </p:spPr>
-        <p:txBody>
-          <a:bodyPr wrap="square" anchor="t" lIns="0" rIns="0" tIns="0" bIns="0">
-            <a:spAutoFit/>
-          </a:bodyPr>
-          <a:lstStyle/>
-          <a:p>
-            <a:pPr algn="l">
-              <a:spcAft>
-                <a:spcPts val="800"/>
-              </a:spcAft>
-            </a:pPr>
-            <a:r>
-              <a:rPr sz="1800" b="1" i="0">
-                <a:solidFill>
-                  <a:srgbClr val="1B3168"/>
-                </a:solidFill>
-                <a:latin typeface="League Spartan"/>
-              </a:rPr>
-              <a:t>Checked</a:t>
-            </a:r>
-          </a:p>
-          <a:p>
-            <a:pPr algn="l">
-              <a:spcAft>
-                <a:spcPts val="600"/>
-              </a:spcAft>
-            </a:pPr>
-            <a:r>
-              <a:rPr sz="1300" b="0" i="0">
-                <a:solidFill>
-                  <a:srgbClr val="131313"/>
-                </a:solidFill>
-                <a:latin typeface="Roboto"/>
-              </a:rPr>
-              <a:t>Every package is checked when it’s built. A separate review looks for anything that sends data out or tracks students.</a:t>
-            </a:r>
-          </a:p>
-        </p:txBody>
-      </p:sp>
-      <p:sp>
-        <p:nvSpPr>
-          <p:cNvPr id="475" name="TextBox 474"/>
-          <p:cNvSpPr txBox="1"/>
-          <p:nvPr/>
-        </p:nvSpPr>
-        <p:spPr>
-          <a:xfrm>
-            <a:off x="3511296" y="2331720"/>
-            <a:ext cx="2121408" cy="2011680"/>
-          </a:xfrm>
-          <a:prstGeom prst="rect">
-            <a:avLst/>
-          </a:prstGeom>
-          <a:noFill/>
-        </p:spPr>
-        <p:txBody>
-          <a:bodyPr wrap="square" anchor="t" lIns="0" rIns="0" tIns="0" bIns="0">
-            <a:spAutoFit/>
-          </a:bodyPr>
-          <a:lstStyle/>
-          <a:p>
-            <a:pPr algn="l">
-              <a:spcAft>
-                <a:spcPts val="800"/>
-              </a:spcAft>
-            </a:pPr>
-            <a:r>
-              <a:rPr sz="1800" b="1" i="0">
-                <a:solidFill>
-                  <a:srgbClr val="1B3168"/>
-                </a:solidFill>
-                <a:latin typeface="League Spartan"/>
-              </a:rPr>
-              <a:t>Sandboxed</a:t>
-            </a:r>
-          </a:p>
-          <a:p>
-            <a:pPr algn="l">
-              <a:spcAft>
-                <a:spcPts val="600"/>
-              </a:spcAft>
-            </a:pPr>
-            <a:r>
-              <a:rPr sz="1300" b="0" i="0">
-                <a:solidFill>
-                  <a:srgbClr val="131313"/>
-                </a:solidFill>
-                <a:latin typeface="Roboto"/>
-              </a:rPr>
-              <a:t>Zest runs every package in a sandbox, with permissions off by default.</a:t>
-            </a:r>
-          </a:p>
-        </p:txBody>
-      </p:sp>
-      <p:sp>
-        <p:nvSpPr>
-          <p:cNvPr id="476" name="TextBox 475"/>
-          <p:cNvSpPr txBox="1"/>
-          <p:nvPr/>
-        </p:nvSpPr>
-        <p:spPr>
-          <a:xfrm>
-            <a:off x="6163055" y="2331720"/>
-            <a:ext cx="2121408" cy="2011680"/>
-          </a:xfrm>
-          <a:prstGeom prst="rect">
-            <a:avLst/>
-          </a:prstGeom>
-          <a:noFill/>
-        </p:spPr>
-        <p:txBody>
-          <a:bodyPr wrap="square" anchor="t" lIns="0" rIns="0" tIns="0" bIns="0">
-            <a:spAutoFit/>
-          </a:bodyPr>
-          <a:lstStyle/>
-          <a:p>
-            <a:pPr algn="l">
-              <a:spcAft>
-                <a:spcPts val="800"/>
-              </a:spcAft>
-            </a:pPr>
-            <a:r>
-              <a:rPr sz="1800" b="1" i="0">
-                <a:solidFill>
-                  <a:srgbClr val="1B3168"/>
-                </a:solidFill>
-                <a:latin typeface="League Spartan"/>
-              </a:rPr>
-              <a:t>Still a person’s job</a:t>
-            </a:r>
-          </a:p>
-          <a:p>
-            <a:pPr algn="l">
-              <a:spcAft>
-                <a:spcPts val="600"/>
-              </a:spcAft>
-            </a:pPr>
-            <a:r>
-              <a:rPr sz="1300" b="0" i="0">
-                <a:solidFill>
-                  <a:srgbClr val="131313"/>
-                </a:solidFill>
-                <a:latin typeface="Roboto"/>
-              </a:rPr>
-              <a:t>Test it as a student. Have a subject expert check it. Use teacher grading for high stakes.</a:t>
-            </a:r>
-          </a:p>
-        </p:txBody>
-      </p:sp>
-    </p:spTree>
-  </p:cSld>
-  <p:clrMapOvr>
-    <a:masterClrMapping/>
-  </p:clrMapOvr>
+  <p:timing>
+    <p:tnLst>
+      <p:par>
+        <p:cTn id="1" dur="indefinite" restart="never" nodeType="tmRoot">
+          <p:childTnLst>
+            <p:seq concurrent="1" nextAc="seek">
+              <p:cTn id="2" dur="indefinite" nodeType="mainSeq">
+                <p:childTnLst>
+                  <p:par>
+                    <p:cTn id="6" fill="hold">
+                      <p:stCondLst>
+                        <p:cond delay="indefinite"/>
+                      </p:stCondLst>
+                      <p:childTnLst>
+                        <p:par>
+                          <p:cTn id="7" fill="hold">
+                            <p:stCondLst>
+                              <p:cond delay="0"/>
+                            </p:stCondLst>
+                            <p:childTnLst>
+                              <p:par>
+                                <p:cTn id="3" presetID="10" presetClass="entr" presetSubtype="0" fill="hold" nodeType="clickEffect">
+                                  <p:stCondLst>
+                                    <p:cond delay="0"/>
+                                  </p:stCondLst>
+                                  <p:childTnLst>
+                                    <p:set>
+                                      <p:cBhvr>
+                                        <p:cTn id="4" dur="1" fill="hold">
+                                          <p:stCondLst>
+                                            <p:cond delay="0"/>
+                                          </p:stCondLst>
+                                        </p:cTn>
+                                        <p:tgtEl>
+                                          <p:spTgt spid="429"/>
+                                        </p:tgtEl>
+                                        <p:attrNameLst>
+                                          <p:attrName>style.visibility</p:attrName>
+                                        </p:attrNameLst>
+                                      </p:cBhvr>
+                                      <p:to>
+                                        <p:strVal val="visible"/>
+                                      </p:to>
+                                    </p:set>
+                                    <p:animEffect transition="in" filter="fade">
+                                      <p:cBhvr>
+                                        <p:cTn id="5" dur="500"/>
+                                        <p:tgtEl>
+                                          <p:spTgt spid="429"/>
+                                        </p:tgtEl>
+                                      </p:cBhvr>
+                                    </p:animEffect>
+                                  </p:childTnLst>
+                                </p:cTn>
+                              </p:par>
+                            </p:childTnLst>
+                          </p:cTn>
+                        </p:par>
+                      </p:childTnLst>
+                    </p:cTn>
+                  </p:par>
+                  <p:par>
+                    <p:cTn id="11" fill="hold">
+                      <p:stCondLst>
+                        <p:cond delay="indefinite"/>
+                      </p:stCondLst>
+                      <p:childTnLst>
+                        <p:par>
+                          <p:cTn id="12" fill="hold">
+                            <p:stCondLst>
+                              <p:cond delay="0"/>
+                            </p:stCondLst>
+                            <p:childTnLst>
+                              <p:par>
+                                <p:cTn id="8" presetID="10" presetClass="entr" presetSubtype="0" fill="hold" nodeType="clickEffect">
+                                  <p:stCondLst>
+                                    <p:cond delay="0"/>
+                                  </p:stCondLst>
+                                  <p:childTnLst>
+                                    <p:set>
+                                      <p:cBhvr>
+                                        <p:cTn id="9" dur="1" fill="hold">
+                                          <p:stCondLst>
+                                            <p:cond delay="0"/>
+                                          </p:stCondLst>
+                                        </p:cTn>
+                                        <p:tgtEl>
+                                          <p:spTgt spid="430"/>
+                                        </p:tgtEl>
+                                        <p:attrNameLst>
+                                          <p:attrName>style.visibility</p:attrName>
+                                        </p:attrNameLst>
+                                      </p:cBhvr>
+                                      <p:to>
+                                        <p:strVal val="visible"/>
+                                      </p:to>
+                                    </p:set>
+                                    <p:animEffect transition="in" filter="fade">
+                                      <p:cBhvr>
+                                        <p:cTn id="10" dur="500"/>
+                                        <p:tgtEl>
+                                          <p:spTgt spid="430"/>
+                                        </p:tgtEl>
+                                      </p:cBhvr>
+                                    </p:animEffect>
+                                  </p:childTnLst>
+                                </p:cTn>
+                              </p:par>
+                            </p:childTnLst>
+                          </p:cTn>
+                        </p:par>
+                      </p:childTnLst>
+                    </p:cTn>
+                  </p:par>
+                  <p:par>
+                    <p:cTn id="16" fill="hold">
+                      <p:stCondLst>
+                        <p:cond delay="indefinite"/>
+                      </p:stCondLst>
+                      <p:childTnLst>
+                        <p:par>
+                          <p:cTn id="17" fill="hold">
+                            <p:stCondLst>
+                              <p:cond delay="0"/>
+                            </p:stCondLst>
+                            <p:childTnLst>
+                              <p:par>
+                                <p:cTn id="13" presetID="10" presetClass="entr" presetSubtype="0" fill="hold" nodeType="clickEffect">
+                                  <p:stCondLst>
+                                    <p:cond delay="0"/>
+                                  </p:stCondLst>
+                                  <p:childTnLst>
+                                    <p:set>
+                                      <p:cBhvr>
+                                        <p:cTn id="14" dur="1" fill="hold">
+                                          <p:stCondLst>
+                                            <p:cond delay="0"/>
+                                          </p:stCondLst>
+                                        </p:cTn>
+                                        <p:tgtEl>
+                                          <p:spTgt spid="431"/>
+                                        </p:tgtEl>
+                                        <p:attrNameLst>
+                                          <p:attrName>style.visibility</p:attrName>
+                                        </p:attrNameLst>
+                                      </p:cBhvr>
+                                      <p:to>
+                                        <p:strVal val="visible"/>
+                                      </p:to>
+                                    </p:set>
+                                    <p:animEffect transition="in" filter="fade">
+                                      <p:cBhvr>
+                                        <p:cTn id="15" dur="500"/>
+                                        <p:tgtEl>
+                                          <p:spTgt spid="431"/>
+                                        </p:tgtEl>
+                                      </p:cBhvr>
+                                    </p:animEffect>
+                                  </p:childTnLst>
+                                </p:cTn>
+                              </p:par>
+                            </p:childTnLst>
+                          </p:cTn>
+                        </p:par>
+                      </p:childTnLst>
+                    </p:cTn>
+                  </p:par>
+                  <p:par>
+                    <p:cTn id="21" fill="hold">
+                      <p:stCondLst>
+                        <p:cond delay="indefinite"/>
+                      </p:stCondLst>
+                      <p:childTnLst>
+                        <p:par>
+                          <p:cTn id="22" fill="hold">
+                            <p:stCondLst>
+                              <p:cond delay="0"/>
+                            </p:stCondLst>
+                            <p:childTnLst>
+                              <p:par>
+                                <p:cTn id="18" presetID="10" presetClass="entr" presetSubtype="0" fill="hold" nodeType="clickEffect">
+                                  <p:stCondLst>
+                                    <p:cond delay="0"/>
+                                  </p:stCondLst>
+                                  <p:childTnLst>
+                                    <p:set>
+                                      <p:cBhvr>
+                                        <p:cTn id="19" dur="1" fill="hold">
+                                          <p:stCondLst>
+                                            <p:cond delay="0"/>
+                                          </p:stCondLst>
+                                        </p:cTn>
+                                        <p:tgtEl>
+                                          <p:spTgt spid="432"/>
+                                        </p:tgtEl>
+                                        <p:attrNameLst>
+                                          <p:attrName>style.visibility</p:attrName>
+                                        </p:attrNameLst>
+                                      </p:cBhvr>
+                                      <p:to>
+                                        <p:strVal val="visible"/>
+                                      </p:to>
+                                    </p:set>
+                                    <p:animEffect transition="in" filter="fade">
+                                      <p:cBhvr>
+                                        <p:cTn id="20" dur="500"/>
+                                        <p:tgtEl>
+                                          <p:spTgt spid="432"/>
+                                        </p:tgtEl>
+                                      </p:cBhvr>
+                                    </p:animEffect>
+                                  </p:childTnLst>
+                                </p:cTn>
+                              </p:par>
+                            </p:childTnLst>
+                          </p:cTn>
+                        </p:par>
+                      </p:childTnLst>
+                    </p:cTn>
+                  </p:par>
+                </p:childTnLst>
+              </p:cTn>
+              <p:prevCondLst>
+                <p:cond evt="onPrev" delay="0">
+                  <p:tgtEl>
+                    <p:sldTgt/>
+                  </p:tgtEl>
+                </p:cond>
+              </p:prevCondLst>
+              <p:nextCondLst>
+                <p:cond evt="onNext" delay="0">
+                  <p:tgtEl>
+                    <p:sldTgt/>
+                  </p:tgtEl>
+                </p:cond>
+              </p:nextCondLst>
+            </p:seq>
+          </p:childTnLst>
+        </p:cTn>
+      </p:par>
+    </p:tnLst>
+  </p:timing>
 </p:sld>
 </file>
 
@@ -28811,6 +30977,956 @@
 <file path=ppt/slides/slide20.xml><?xml version="1.0" encoding="utf-8"?>
 <p:sld xmlns:a="http://schemas.openxmlformats.org/drawingml/2006/main" xmlns:r="http://schemas.openxmlformats.org/officeDocument/2006/relationships" xmlns:mc="http://schemas.openxmlformats.org/markup-compatibility/2006" xmlns:mv="urn:schemas-microsoft-com:mac:vml" xmlns:p="http://schemas.openxmlformats.org/presentationml/2006/main" xmlns:c="http://schemas.openxmlformats.org/drawingml/2006/chart" xmlns:dgm="http://schemas.openxmlformats.org/drawingml/2006/diagram" xmlns:o="urn:schemas-microsoft-com:office:office" xmlns:v="urn:schemas-microsoft-com:vml" xmlns:pvml="urn:schemas-microsoft-com:office:powerpoint" xmlns:com="http://schemas.openxmlformats.org/drawingml/2006/compatibility" xmlns:p14="http://schemas.microsoft.com/office/powerpoint/2010/main" xmlns:p15="http://schemas.microsoft.com/office/powerpoint/2012/main" xmlns:ahyp="http://schemas.microsoft.com/office/drawing/2018/hyperlinkcolor">
   <p:cSld>
+    <p:bg>
+      <p:bgPr>
+        <a:solidFill>
+          <a:srgbClr val="1B3168"/>
+        </a:solidFill>
+      </p:bgPr>
+    </p:bg>
+    <p:spTree>
+      <p:nvGrpSpPr>
+        <p:cNvPr id="458" name="Shape 458"/>
+        <p:cNvGrpSpPr/>
+        <p:nvPr/>
+      </p:nvGrpSpPr>
+      <p:grpSpPr>
+        <a:xfrm>
+          <a:off x="0" y="0"/>
+          <a:ext cx="0" cy="0"/>
+          <a:chOff x="0" y="0"/>
+          <a:chExt cx="0" cy="0"/>
+        </a:xfrm>
+      </p:grpSpPr>
+      <p:sp>
+        <p:nvSpPr>
+          <p:cNvPr id="459" name="Google Shape;459;p49"/>
+          <p:cNvSpPr/>
+          <p:nvPr/>
+        </p:nvSpPr>
+        <p:spPr>
+          <a:xfrm>
+            <a:off x="7155625" y="-762000"/>
+            <a:ext cx="2743200" cy="2688300"/>
+          </a:xfrm>
+          <a:prstGeom prst="donut">
+            <a:avLst>
+              <a:gd fmla="val 13443" name="adj"/>
+            </a:avLst>
+          </a:prstGeom>
+          <a:solidFill>
+            <a:srgbClr val="25AFFA"/>
+          </a:solidFill>
+          <a:ln cap="flat" cmpd="sng" w="9525">
+            <a:solidFill>
+              <a:srgbClr val="25AFFA"/>
+            </a:solidFill>
+            <a:prstDash val="solid"/>
+            <a:round/>
+            <a:headEnd len="sm" w="sm" type="none"/>
+            <a:tailEnd len="sm" w="sm" type="none"/>
+          </a:ln>
+        </p:spPr>
+        <p:txBody>
+          <a:bodyPr anchorCtr="0" anchor="ctr" bIns="91425" lIns="91425" spcFirstLastPara="1" rIns="91425" wrap="square" tIns="91425">
+            <a:noAutofit/>
+          </a:bodyPr>
+          <a:lstStyle/>
+          <a:p>
+            <a:pPr indent="0" lvl="0" marL="0" rtl="0" algn="l">
+              <a:spcBef>
+                <a:spcPts val="0"/>
+              </a:spcBef>
+              <a:spcAft>
+                <a:spcPts val="0"/>
+              </a:spcAft>
+              <a:buNone/>
+            </a:pPr>
+            <a:r>
+              <a:t/>
+            </a:r>
+            <a:endParaRPr/>
+          </a:p>
+        </p:txBody>
+      </p:sp>
+      <p:pic>
+        <p:nvPicPr>
+          <p:cNvPr id="460" name="Google Shape;460;p49"/>
+          <p:cNvPicPr preferRelativeResize="0"/>
+          <p:nvPr/>
+        </p:nvPicPr>
+        <p:blipFill rotWithShape="1">
+          <a:blip r:embed="rId3">
+            <a:alphaModFix/>
+          </a:blip>
+          <a:srcRect b="0" l="0" r="0" t="0"/>
+          <a:stretch/>
+        </p:blipFill>
+        <p:spPr>
+          <a:xfrm rot="-5400000">
+            <a:off x="-633564" y="623533"/>
+            <a:ext cx="2494130" cy="1247065"/>
+          </a:xfrm>
+          <a:prstGeom prst="rect">
+            <a:avLst/>
+          </a:prstGeom>
+          <a:noFill/>
+          <a:ln>
+            <a:noFill/>
+          </a:ln>
+        </p:spPr>
+      </p:pic>
+      <p:sp>
+        <p:nvSpPr>
+          <p:cNvPr id="461" name="Google Shape;461;p49"/>
+          <p:cNvSpPr/>
+          <p:nvPr/>
+        </p:nvSpPr>
+        <p:spPr>
+          <a:xfrm>
+            <a:off x="655268" y="2102484"/>
+            <a:ext cx="2522434" cy="2385784"/>
+          </a:xfrm>
+          <a:custGeom>
+            <a:rect b="b" l="l" r="r" t="t"/>
+            <a:pathLst>
+              <a:path extrusionOk="0" h="1109667" w="1173225">
+                <a:moveTo>
+                  <a:pt x="1048765" y="1109667"/>
+                </a:moveTo>
+                <a:lnTo>
+                  <a:pt x="124460" y="1109667"/>
+                </a:lnTo>
+                <a:cubicBezTo>
+                  <a:pt x="55880" y="1109667"/>
+                  <a:pt x="0" y="1053787"/>
+                  <a:pt x="0" y="985207"/>
+                </a:cubicBezTo>
+                <a:lnTo>
+                  <a:pt x="0" y="124460"/>
+                </a:lnTo>
+                <a:cubicBezTo>
+                  <a:pt x="0" y="55880"/>
+                  <a:pt x="55880" y="0"/>
+                  <a:pt x="124460" y="0"/>
+                </a:cubicBezTo>
+                <a:lnTo>
+                  <a:pt x="1048765" y="0"/>
+                </a:lnTo>
+                <a:cubicBezTo>
+                  <a:pt x="1117345" y="0"/>
+                  <a:pt x="1173225" y="55880"/>
+                  <a:pt x="1173225" y="124460"/>
+                </a:cubicBezTo>
+                <a:lnTo>
+                  <a:pt x="1173225" y="985207"/>
+                </a:lnTo>
+                <a:cubicBezTo>
+                  <a:pt x="1173225" y="1053787"/>
+                  <a:pt x="1117345" y="1109667"/>
+                  <a:pt x="1048765" y="1109667"/>
+                </a:cubicBezTo>
+                <a:close/>
+              </a:path>
+            </a:pathLst>
+          </a:custGeom>
+          <a:solidFill>
+            <a:srgbClr val="FFFFFF"/>
+          </a:solidFill>
+          <a:ln>
+            <a:noFill/>
+          </a:ln>
+        </p:spPr>
+        <p:txBody>
+          <a:bodyPr anchorCtr="0" anchor="ctr" bIns="45725" lIns="45725" spcFirstLastPara="1" rIns="45725" wrap="square" tIns="45725">
+            <a:noAutofit/>
+          </a:bodyPr>
+          <a:lstStyle/>
+          <a:p>
+            <a:pPr indent="0" lvl="0" marL="0" rtl="0" algn="l">
+              <a:spcBef>
+                <a:spcPts val="0"/>
+              </a:spcBef>
+              <a:spcAft>
+                <a:spcPts val="0"/>
+              </a:spcAft>
+              <a:buNone/>
+            </a:pPr>
+            <a:r>
+              <a:t/>
+            </a:r>
+            <a:endParaRPr/>
+          </a:p>
+        </p:txBody>
+      </p:sp>
+      <p:sp>
+        <p:nvSpPr>
+          <p:cNvPr id="462" name="Google Shape;462;p49"/>
+          <p:cNvSpPr/>
+          <p:nvPr/>
+        </p:nvSpPr>
+        <p:spPr>
+          <a:xfrm>
+            <a:off x="3310802" y="2102484"/>
+            <a:ext cx="2522434" cy="2385784"/>
+          </a:xfrm>
+          <a:custGeom>
+            <a:rect b="b" l="l" r="r" t="t"/>
+            <a:pathLst>
+              <a:path extrusionOk="0" h="1109667" w="1173225">
+                <a:moveTo>
+                  <a:pt x="1048765" y="1109667"/>
+                </a:moveTo>
+                <a:lnTo>
+                  <a:pt x="124460" y="1109667"/>
+                </a:lnTo>
+                <a:cubicBezTo>
+                  <a:pt x="55880" y="1109667"/>
+                  <a:pt x="0" y="1053787"/>
+                  <a:pt x="0" y="985207"/>
+                </a:cubicBezTo>
+                <a:lnTo>
+                  <a:pt x="0" y="124460"/>
+                </a:lnTo>
+                <a:cubicBezTo>
+                  <a:pt x="0" y="55880"/>
+                  <a:pt x="55880" y="0"/>
+                  <a:pt x="124460" y="0"/>
+                </a:cubicBezTo>
+                <a:lnTo>
+                  <a:pt x="1048765" y="0"/>
+                </a:lnTo>
+                <a:cubicBezTo>
+                  <a:pt x="1117345" y="0"/>
+                  <a:pt x="1173225" y="55880"/>
+                  <a:pt x="1173225" y="124460"/>
+                </a:cubicBezTo>
+                <a:lnTo>
+                  <a:pt x="1173225" y="985207"/>
+                </a:lnTo>
+                <a:cubicBezTo>
+                  <a:pt x="1173225" y="1053787"/>
+                  <a:pt x="1117345" y="1109667"/>
+                  <a:pt x="1048765" y="1109667"/>
+                </a:cubicBezTo>
+                <a:close/>
+              </a:path>
+            </a:pathLst>
+          </a:custGeom>
+          <a:solidFill>
+            <a:srgbClr val="FFFFFF"/>
+          </a:solidFill>
+          <a:ln>
+            <a:noFill/>
+          </a:ln>
+        </p:spPr>
+        <p:txBody>
+          <a:bodyPr anchorCtr="0" anchor="ctr" bIns="45725" lIns="45725" spcFirstLastPara="1" rIns="45725" wrap="square" tIns="45725">
+            <a:noAutofit/>
+          </a:bodyPr>
+          <a:lstStyle/>
+          <a:p>
+            <a:pPr indent="0" lvl="0" marL="0" rtl="0" algn="l">
+              <a:spcBef>
+                <a:spcPts val="0"/>
+              </a:spcBef>
+              <a:spcAft>
+                <a:spcPts val="0"/>
+              </a:spcAft>
+              <a:buNone/>
+            </a:pPr>
+            <a:r>
+              <a:t/>
+            </a:r>
+            <a:endParaRPr/>
+          </a:p>
+        </p:txBody>
+      </p:sp>
+      <p:sp>
+        <p:nvSpPr>
+          <p:cNvPr id="463" name="Google Shape;463;p49"/>
+          <p:cNvSpPr/>
+          <p:nvPr/>
+        </p:nvSpPr>
+        <p:spPr>
+          <a:xfrm>
+            <a:off x="5966338" y="2102484"/>
+            <a:ext cx="2522434" cy="2385784"/>
+          </a:xfrm>
+          <a:custGeom>
+            <a:rect b="b" l="l" r="r" t="t"/>
+            <a:pathLst>
+              <a:path extrusionOk="0" h="1109667" w="1173225">
+                <a:moveTo>
+                  <a:pt x="1048765" y="1109667"/>
+                </a:moveTo>
+                <a:lnTo>
+                  <a:pt x="124460" y="1109667"/>
+                </a:lnTo>
+                <a:cubicBezTo>
+                  <a:pt x="55880" y="1109667"/>
+                  <a:pt x="0" y="1053787"/>
+                  <a:pt x="0" y="985207"/>
+                </a:cubicBezTo>
+                <a:lnTo>
+                  <a:pt x="0" y="124460"/>
+                </a:lnTo>
+                <a:cubicBezTo>
+                  <a:pt x="0" y="55880"/>
+                  <a:pt x="55880" y="0"/>
+                  <a:pt x="124460" y="0"/>
+                </a:cubicBezTo>
+                <a:lnTo>
+                  <a:pt x="1048765" y="0"/>
+                </a:lnTo>
+                <a:cubicBezTo>
+                  <a:pt x="1117345" y="0"/>
+                  <a:pt x="1173225" y="55880"/>
+                  <a:pt x="1173225" y="124460"/>
+                </a:cubicBezTo>
+                <a:lnTo>
+                  <a:pt x="1173225" y="985207"/>
+                </a:lnTo>
+                <a:cubicBezTo>
+                  <a:pt x="1173225" y="1053787"/>
+                  <a:pt x="1117345" y="1109667"/>
+                  <a:pt x="1048765" y="1109667"/>
+                </a:cubicBezTo>
+                <a:close/>
+              </a:path>
+            </a:pathLst>
+          </a:custGeom>
+          <a:solidFill>
+            <a:srgbClr val="FFFFFF"/>
+          </a:solidFill>
+          <a:ln>
+            <a:noFill/>
+          </a:ln>
+        </p:spPr>
+        <p:txBody>
+          <a:bodyPr anchorCtr="0" anchor="ctr" bIns="45725" lIns="45725" spcFirstLastPara="1" rIns="45725" wrap="square" tIns="45725">
+            <a:noAutofit/>
+          </a:bodyPr>
+          <a:lstStyle/>
+          <a:p>
+            <a:pPr indent="0" lvl="0" marL="0" rtl="0" algn="l">
+              <a:spcBef>
+                <a:spcPts val="0"/>
+              </a:spcBef>
+              <a:spcAft>
+                <a:spcPts val="0"/>
+              </a:spcAft>
+              <a:buNone/>
+            </a:pPr>
+            <a:r>
+              <a:t/>
+            </a:r>
+            <a:endParaRPr/>
+          </a:p>
+        </p:txBody>
+      </p:sp>
+      <p:pic>
+        <p:nvPicPr>
+          <p:cNvPr id="470" name="Google Shape;470;p49"/>
+          <p:cNvPicPr preferRelativeResize="0"/>
+          <p:nvPr/>
+        </p:nvPicPr>
+        <p:blipFill rotWithShape="1">
+          <a:blip r:embed="rId4">
+            <a:alphaModFix/>
+          </a:blip>
+          <a:srcRect b="0" l="0" r="0" t="0"/>
+          <a:stretch/>
+        </p:blipFill>
+        <p:spPr>
+          <a:xfrm rot="5400000">
+            <a:off x="0" y="3792331"/>
+            <a:ext cx="1351170" cy="1351169"/>
+          </a:xfrm>
+          <a:prstGeom prst="rect">
+            <a:avLst/>
+          </a:prstGeom>
+          <a:noFill/>
+          <a:ln>
+            <a:noFill/>
+          </a:ln>
+        </p:spPr>
+      </p:pic>
+      <p:pic>
+        <p:nvPicPr>
+          <p:cNvPr id="471" name="Google Shape;471;p49"/>
+          <p:cNvPicPr preferRelativeResize="0"/>
+          <p:nvPr/>
+        </p:nvPicPr>
+        <p:blipFill rotWithShape="1">
+          <a:blip r:embed="rId5">
+            <a:alphaModFix/>
+          </a:blip>
+          <a:srcRect b="0" l="0" r="0" t="0"/>
+          <a:stretch/>
+        </p:blipFill>
+        <p:spPr>
+          <a:xfrm>
+            <a:off x="79132" y="4418758"/>
+            <a:ext cx="1078263" cy="653248"/>
+          </a:xfrm>
+          <a:prstGeom prst="rect">
+            <a:avLst/>
+          </a:prstGeom>
+          <a:noFill/>
+          <a:ln>
+            <a:noFill/>
+          </a:ln>
+        </p:spPr>
+      </p:pic>
+      <p:sp>
+        <p:nvSpPr>
+          <p:cNvPr id="472" name="TextBox 471"/>
+          <p:cNvSpPr txBox="1"/>
+          <p:nvPr/>
+        </p:nvSpPr>
+        <p:spPr>
+          <a:xfrm>
+            <a:off x="1188720" y="548640"/>
+            <a:ext cx="6766560" cy="548640"/>
+          </a:xfrm>
+          <a:prstGeom prst="rect">
+            <a:avLst/>
+          </a:prstGeom>
+          <a:noFill/>
+        </p:spPr>
+        <p:txBody>
+          <a:bodyPr wrap="square" anchor="t" lIns="0" rIns="0" tIns="0" bIns="0">
+            <a:spAutoFit/>
+          </a:bodyPr>
+          <a:lstStyle/>
+          <a:p>
+            <a:pPr algn="ctr">
+              <a:spcAft>
+                <a:spcPts val="0"/>
+              </a:spcAft>
+            </a:pPr>
+            <a:r>
+              <a:rPr sz="2800" b="1" i="0">
+                <a:solidFill>
+                  <a:srgbClr val="FFFFFF"/>
+                </a:solidFill>
+                <a:latin typeface="League Spartan"/>
+              </a:rPr>
+              <a:t>Can You Trust What the AI Made?</a:t>
+            </a:r>
+          </a:p>
+        </p:txBody>
+      </p:sp>
+      <p:sp>
+        <p:nvSpPr>
+          <p:cNvPr id="473" name="TextBox 472"/>
+          <p:cNvSpPr txBox="1"/>
+          <p:nvPr/>
+        </p:nvSpPr>
+        <p:spPr>
+          <a:xfrm>
+            <a:off x="1188720" y="1143000"/>
+            <a:ext cx="6766560" cy="457200"/>
+          </a:xfrm>
+          <a:prstGeom prst="rect">
+            <a:avLst/>
+          </a:prstGeom>
+          <a:noFill/>
+        </p:spPr>
+        <p:txBody>
+          <a:bodyPr wrap="square" anchor="t" lIns="0" rIns="0" tIns="0" bIns="0">
+            <a:spAutoFit/>
+          </a:bodyPr>
+          <a:lstStyle/>
+          <a:p>
+            <a:pPr algn="ctr">
+              <a:spcAft>
+                <a:spcPts val="600"/>
+              </a:spcAft>
+            </a:pPr>
+            <a:r>
+              <a:rPr sz="1300" b="0" i="0">
+                <a:solidFill>
+                  <a:srgbClr val="FFFFFF"/>
+                </a:solidFill>
+                <a:latin typeface="Roboto"/>
+              </a:rPr>
+              <a:t>What checks it, and what still needs a person</a:t>
+            </a:r>
+          </a:p>
+        </p:txBody>
+      </p:sp>
+      <p:sp>
+        <p:nvSpPr>
+          <p:cNvPr id="474" name="TextBox 473"/>
+          <p:cNvSpPr txBox="1"/>
+          <p:nvPr/>
+        </p:nvSpPr>
+        <p:spPr>
+          <a:xfrm>
+            <a:off x="859536" y="2331720"/>
+            <a:ext cx="2121408" cy="2011680"/>
+          </a:xfrm>
+          <a:prstGeom prst="rect">
+            <a:avLst/>
+          </a:prstGeom>
+          <a:noFill/>
+        </p:spPr>
+        <p:txBody>
+          <a:bodyPr wrap="square" anchor="t" lIns="0" rIns="0" tIns="0" bIns="0">
+            <a:spAutoFit/>
+          </a:bodyPr>
+          <a:lstStyle/>
+          <a:p>
+            <a:pPr algn="l">
+              <a:spcAft>
+                <a:spcPts val="800"/>
+              </a:spcAft>
+            </a:pPr>
+            <a:r>
+              <a:rPr sz="1800" b="1" i="0">
+                <a:solidFill>
+                  <a:srgbClr val="1B3168"/>
+                </a:solidFill>
+                <a:latin typeface="League Spartan"/>
+              </a:rPr>
+              <a:t>Checked</a:t>
+            </a:r>
+          </a:p>
+          <a:p>
+            <a:pPr algn="l">
+              <a:spcAft>
+                <a:spcPts val="600"/>
+              </a:spcAft>
+            </a:pPr>
+            <a:r>
+              <a:rPr sz="1300" b="0" i="0">
+                <a:solidFill>
+                  <a:srgbClr val="131313"/>
+                </a:solidFill>
+                <a:latin typeface="Roboto"/>
+              </a:rPr>
+              <a:t>Every package is checked when it’s built. A separate review looks for anything that sends data out or tracks students.</a:t>
+            </a:r>
+          </a:p>
+        </p:txBody>
+      </p:sp>
+      <p:sp>
+        <p:nvSpPr>
+          <p:cNvPr id="475" name="TextBox 474"/>
+          <p:cNvSpPr txBox="1"/>
+          <p:nvPr/>
+        </p:nvSpPr>
+        <p:spPr>
+          <a:xfrm>
+            <a:off x="3511296" y="2331720"/>
+            <a:ext cx="2121408" cy="2011680"/>
+          </a:xfrm>
+          <a:prstGeom prst="rect">
+            <a:avLst/>
+          </a:prstGeom>
+          <a:noFill/>
+        </p:spPr>
+        <p:txBody>
+          <a:bodyPr wrap="square" anchor="t" lIns="0" rIns="0" tIns="0" bIns="0">
+            <a:spAutoFit/>
+          </a:bodyPr>
+          <a:lstStyle/>
+          <a:p>
+            <a:pPr algn="l">
+              <a:spcAft>
+                <a:spcPts val="800"/>
+              </a:spcAft>
+            </a:pPr>
+            <a:r>
+              <a:rPr sz="1800" b="1" i="0">
+                <a:solidFill>
+                  <a:srgbClr val="1B3168"/>
+                </a:solidFill>
+                <a:latin typeface="League Spartan"/>
+              </a:rPr>
+              <a:t>Sandboxed</a:t>
+            </a:r>
+          </a:p>
+          <a:p>
+            <a:pPr algn="l">
+              <a:spcAft>
+                <a:spcPts val="600"/>
+              </a:spcAft>
+            </a:pPr>
+            <a:r>
+              <a:rPr sz="1300" b="0" i="0">
+                <a:solidFill>
+                  <a:srgbClr val="131313"/>
+                </a:solidFill>
+                <a:latin typeface="Roboto"/>
+              </a:rPr>
+              <a:t>Zest runs every package in a sandbox, with permissions off by default.</a:t>
+            </a:r>
+          </a:p>
+        </p:txBody>
+      </p:sp>
+      <p:sp>
+        <p:nvSpPr>
+          <p:cNvPr id="476" name="TextBox 475"/>
+          <p:cNvSpPr txBox="1"/>
+          <p:nvPr/>
+        </p:nvSpPr>
+        <p:spPr>
+          <a:xfrm>
+            <a:off x="6163055" y="2331720"/>
+            <a:ext cx="2121408" cy="2011680"/>
+          </a:xfrm>
+          <a:prstGeom prst="rect">
+            <a:avLst/>
+          </a:prstGeom>
+          <a:noFill/>
+        </p:spPr>
+        <p:txBody>
+          <a:bodyPr wrap="square" anchor="t" lIns="0" rIns="0" tIns="0" bIns="0">
+            <a:spAutoFit/>
+          </a:bodyPr>
+          <a:lstStyle/>
+          <a:p>
+            <a:pPr algn="l">
+              <a:spcAft>
+                <a:spcPts val="800"/>
+              </a:spcAft>
+            </a:pPr>
+            <a:r>
+              <a:rPr sz="1800" b="1" i="0">
+                <a:solidFill>
+                  <a:srgbClr val="1B3168"/>
+                </a:solidFill>
+                <a:latin typeface="League Spartan"/>
+              </a:rPr>
+              <a:t>Still a person’s job</a:t>
+            </a:r>
+          </a:p>
+          <a:p>
+            <a:pPr algn="l">
+              <a:spcAft>
+                <a:spcPts val="600"/>
+              </a:spcAft>
+            </a:pPr>
+            <a:r>
+              <a:rPr sz="1300" b="0" i="0">
+                <a:solidFill>
+                  <a:srgbClr val="131313"/>
+                </a:solidFill>
+                <a:latin typeface="Roboto"/>
+              </a:rPr>
+              <a:t>Test it as a student. Have a subject expert check it. Use teacher grading for high stakes.</a:t>
+            </a:r>
+          </a:p>
+        </p:txBody>
+      </p:sp>
+    </p:spTree>
+  </p:cSld>
+  <p:clrMapOvr>
+    <a:masterClrMapping/>
+  </p:clrMapOvr>
+  <p:timing>
+    <p:tnLst>
+      <p:par>
+        <p:cTn id="1" dur="indefinite" restart="never" nodeType="tmRoot">
+          <p:childTnLst>
+            <p:seq concurrent="1" nextAc="seek">
+              <p:cTn id="2" dur="indefinite" nodeType="mainSeq">
+                <p:childTnLst>
+                  <p:par>
+                    <p:cTn id="9" fill="hold">
+                      <p:stCondLst>
+                        <p:cond delay="indefinite"/>
+                      </p:stCondLst>
+                      <p:childTnLst>
+                        <p:par>
+                          <p:cTn id="10" fill="hold">
+                            <p:stCondLst>
+                              <p:cond delay="0"/>
+                            </p:stCondLst>
+                            <p:childTnLst>
+                              <p:par>
+                                <p:cTn id="3" presetID="10" presetClass="entr" presetSubtype="0" fill="hold" nodeType="clickEffect">
+                                  <p:stCondLst>
+                                    <p:cond delay="0"/>
+                                  </p:stCondLst>
+                                  <p:childTnLst>
+                                    <p:set>
+                                      <p:cBhvr>
+                                        <p:cTn id="4" dur="1" fill="hold">
+                                          <p:stCondLst>
+                                            <p:cond delay="0"/>
+                                          </p:stCondLst>
+                                        </p:cTn>
+                                        <p:tgtEl>
+                                          <p:spTgt spid="461"/>
+                                        </p:tgtEl>
+                                        <p:attrNameLst>
+                                          <p:attrName>style.visibility</p:attrName>
+                                        </p:attrNameLst>
+                                      </p:cBhvr>
+                                      <p:to>
+                                        <p:strVal val="visible"/>
+                                      </p:to>
+                                    </p:set>
+                                    <p:animEffect transition="in" filter="fade">
+                                      <p:cBhvr>
+                                        <p:cTn id="5" dur="500"/>
+                                        <p:tgtEl>
+                                          <p:spTgt spid="461"/>
+                                        </p:tgtEl>
+                                      </p:cBhvr>
+                                    </p:animEffect>
+                                  </p:childTnLst>
+                                </p:cTn>
+                              </p:par>
+                              <p:par>
+                                <p:cTn id="6" presetID="10" presetClass="entr" presetSubtype="0" fill="hold" nodeType="withEffect">
+                                  <p:stCondLst>
+                                    <p:cond delay="0"/>
+                                  </p:stCondLst>
+                                  <p:childTnLst>
+                                    <p:set>
+                                      <p:cBhvr>
+                                        <p:cTn id="7" dur="1" fill="hold">
+                                          <p:stCondLst>
+                                            <p:cond delay="0"/>
+                                          </p:stCondLst>
+                                        </p:cTn>
+                                        <p:tgtEl>
+                                          <p:spTgt spid="474"/>
+                                        </p:tgtEl>
+                                        <p:attrNameLst>
+                                          <p:attrName>style.visibility</p:attrName>
+                                        </p:attrNameLst>
+                                      </p:cBhvr>
+                                      <p:to>
+                                        <p:strVal val="visible"/>
+                                      </p:to>
+                                    </p:set>
+                                    <p:animEffect transition="in" filter="fade">
+                                      <p:cBhvr>
+                                        <p:cTn id="8" dur="500"/>
+                                        <p:tgtEl>
+                                          <p:spTgt spid="474"/>
+                                        </p:tgtEl>
+                                      </p:cBhvr>
+                                    </p:animEffect>
+                                  </p:childTnLst>
+                                </p:cTn>
+                              </p:par>
+                            </p:childTnLst>
+                          </p:cTn>
+                        </p:par>
+                      </p:childTnLst>
+                    </p:cTn>
+                  </p:par>
+                  <p:par>
+                    <p:cTn id="17" fill="hold">
+                      <p:stCondLst>
+                        <p:cond delay="indefinite"/>
+                      </p:stCondLst>
+                      <p:childTnLst>
+                        <p:par>
+                          <p:cTn id="18" fill="hold">
+                            <p:stCondLst>
+                              <p:cond delay="0"/>
+                            </p:stCondLst>
+                            <p:childTnLst>
+                              <p:par>
+                                <p:cTn id="11" presetID="10" presetClass="entr" presetSubtype="0" fill="hold" nodeType="clickEffect">
+                                  <p:stCondLst>
+                                    <p:cond delay="0"/>
+                                  </p:stCondLst>
+                                  <p:childTnLst>
+                                    <p:set>
+                                      <p:cBhvr>
+                                        <p:cTn id="12" dur="1" fill="hold">
+                                          <p:stCondLst>
+                                            <p:cond delay="0"/>
+                                          </p:stCondLst>
+                                        </p:cTn>
+                                        <p:tgtEl>
+                                          <p:spTgt spid="462"/>
+                                        </p:tgtEl>
+                                        <p:attrNameLst>
+                                          <p:attrName>style.visibility</p:attrName>
+                                        </p:attrNameLst>
+                                      </p:cBhvr>
+                                      <p:to>
+                                        <p:strVal val="visible"/>
+                                      </p:to>
+                                    </p:set>
+                                    <p:animEffect transition="in" filter="fade">
+                                      <p:cBhvr>
+                                        <p:cTn id="13" dur="500"/>
+                                        <p:tgtEl>
+                                          <p:spTgt spid="462"/>
+                                        </p:tgtEl>
+                                      </p:cBhvr>
+                                    </p:animEffect>
+                                  </p:childTnLst>
+                                </p:cTn>
+                              </p:par>
+                              <p:par>
+                                <p:cTn id="14" presetID="10" presetClass="entr" presetSubtype="0" fill="hold" nodeType="withEffect">
+                                  <p:stCondLst>
+                                    <p:cond delay="0"/>
+                                  </p:stCondLst>
+                                  <p:childTnLst>
+                                    <p:set>
+                                      <p:cBhvr>
+                                        <p:cTn id="15" dur="1" fill="hold">
+                                          <p:stCondLst>
+                                            <p:cond delay="0"/>
+                                          </p:stCondLst>
+                                        </p:cTn>
+                                        <p:tgtEl>
+                                          <p:spTgt spid="475"/>
+                                        </p:tgtEl>
+                                        <p:attrNameLst>
+                                          <p:attrName>style.visibility</p:attrName>
+                                        </p:attrNameLst>
+                                      </p:cBhvr>
+                                      <p:to>
+                                        <p:strVal val="visible"/>
+                                      </p:to>
+                                    </p:set>
+                                    <p:animEffect transition="in" filter="fade">
+                                      <p:cBhvr>
+                                        <p:cTn id="16" dur="500"/>
+                                        <p:tgtEl>
+                                          <p:spTgt spid="475"/>
+                                        </p:tgtEl>
+                                      </p:cBhvr>
+                                    </p:animEffect>
+                                  </p:childTnLst>
+                                </p:cTn>
+                              </p:par>
+                            </p:childTnLst>
+                          </p:cTn>
+                        </p:par>
+                      </p:childTnLst>
+                    </p:cTn>
+                  </p:par>
+                  <p:par>
+                    <p:cTn id="25" fill="hold">
+                      <p:stCondLst>
+                        <p:cond delay="indefinite"/>
+                      </p:stCondLst>
+                      <p:childTnLst>
+                        <p:par>
+                          <p:cTn id="26" fill="hold">
+                            <p:stCondLst>
+                              <p:cond delay="0"/>
+                            </p:stCondLst>
+                            <p:childTnLst>
+                              <p:par>
+                                <p:cTn id="19" presetID="10" presetClass="entr" presetSubtype="0" fill="hold" nodeType="clickEffect">
+                                  <p:stCondLst>
+                                    <p:cond delay="0"/>
+                                  </p:stCondLst>
+                                  <p:childTnLst>
+                                    <p:set>
+                                      <p:cBhvr>
+                                        <p:cTn id="20" dur="1" fill="hold">
+                                          <p:stCondLst>
+                                            <p:cond delay="0"/>
+                                          </p:stCondLst>
+                                        </p:cTn>
+                                        <p:tgtEl>
+                                          <p:spTgt spid="463"/>
+                                        </p:tgtEl>
+                                        <p:attrNameLst>
+                                          <p:attrName>style.visibility</p:attrName>
+                                        </p:attrNameLst>
+                                      </p:cBhvr>
+                                      <p:to>
+                                        <p:strVal val="visible"/>
+                                      </p:to>
+                                    </p:set>
+                                    <p:animEffect transition="in" filter="fade">
+                                      <p:cBhvr>
+                                        <p:cTn id="21" dur="500"/>
+                                        <p:tgtEl>
+                                          <p:spTgt spid="463"/>
+                                        </p:tgtEl>
+                                      </p:cBhvr>
+                                    </p:animEffect>
+                                  </p:childTnLst>
+                                </p:cTn>
+                              </p:par>
+                              <p:par>
+                                <p:cTn id="22" presetID="10" presetClass="entr" presetSubtype="0" fill="hold" nodeType="withEffect">
+                                  <p:stCondLst>
+                                    <p:cond delay="0"/>
+                                  </p:stCondLst>
+                                  <p:childTnLst>
+                                    <p:set>
+                                      <p:cBhvr>
+                                        <p:cTn id="23" dur="1" fill="hold">
+                                          <p:stCondLst>
+                                            <p:cond delay="0"/>
+                                          </p:stCondLst>
+                                        </p:cTn>
+                                        <p:tgtEl>
+                                          <p:spTgt spid="476"/>
+                                        </p:tgtEl>
+                                        <p:attrNameLst>
+                                          <p:attrName>style.visibility</p:attrName>
+                                        </p:attrNameLst>
+                                      </p:cBhvr>
+                                      <p:to>
+                                        <p:strVal val="visible"/>
+                                      </p:to>
+                                    </p:set>
+                                    <p:animEffect transition="in" filter="fade">
+                                      <p:cBhvr>
+                                        <p:cTn id="24" dur="500"/>
+                                        <p:tgtEl>
+                                          <p:spTgt spid="476"/>
+                                        </p:tgtEl>
+                                      </p:cBhvr>
+                                    </p:animEffect>
+                                  </p:childTnLst>
+                                </p:cTn>
+                              </p:par>
+                            </p:childTnLst>
+                          </p:cTn>
+                        </p:par>
+                      </p:childTnLst>
+                    </p:cTn>
+                  </p:par>
+                </p:childTnLst>
+              </p:cTn>
+              <p:prevCondLst>
+                <p:cond evt="onPrev" delay="0">
+                  <p:tgtEl>
+                    <p:sldTgt/>
+                  </p:tgtEl>
+                </p:cond>
+              </p:prevCondLst>
+              <p:nextCondLst>
+                <p:cond evt="onNext" delay="0">
+                  <p:tgtEl>
+                    <p:sldTgt/>
+                  </p:tgtEl>
+                </p:cond>
+              </p:nextCondLst>
+            </p:seq>
+          </p:childTnLst>
+        </p:cTn>
+      </p:par>
+    </p:tnLst>
+  </p:timing>
+</p:sld>
+</file>
+
+<file path=ppt/slides/slide21.xml><?xml version="1.0" encoding="utf-8"?>
+<p:sld xmlns:a="http://schemas.openxmlformats.org/drawingml/2006/main" xmlns:r="http://schemas.openxmlformats.org/officeDocument/2006/relationships" xmlns:mc="http://schemas.openxmlformats.org/markup-compatibility/2006" xmlns:mv="urn:schemas-microsoft-com:mac:vml" xmlns:p="http://schemas.openxmlformats.org/presentationml/2006/main" xmlns:c="http://schemas.openxmlformats.org/drawingml/2006/chart" xmlns:dgm="http://schemas.openxmlformats.org/drawingml/2006/diagram" xmlns:o="urn:schemas-microsoft-com:office:office" xmlns:v="urn:schemas-microsoft-com:vml" xmlns:pvml="urn:schemas-microsoft-com:office:powerpoint" xmlns:com="http://schemas.openxmlformats.org/drawingml/2006/compatibility" xmlns:p14="http://schemas.microsoft.com/office/powerpoint/2010/main" xmlns:p15="http://schemas.microsoft.com/office/powerpoint/2012/main" xmlns:ahyp="http://schemas.microsoft.com/office/drawing/2018/hyperlinkcolor">
+  <p:cSld>
     <p:spTree>
       <p:nvGrpSpPr>
         <p:cNvPr id="509" name="Shape 509"/>
@@ -29587,10 +32703,532 @@
   <p:clrMapOvr>
     <a:masterClrMapping/>
   </p:clrMapOvr>
+  <p:timing>
+    <p:tnLst>
+      <p:par>
+        <p:cTn id="1" dur="indefinite" restart="never" nodeType="tmRoot">
+          <p:childTnLst>
+            <p:seq concurrent="1" nextAc="seek">
+              <p:cTn id="2" dur="indefinite" nodeType="mainSeq">
+                <p:childTnLst>
+                  <p:par>
+                    <p:cTn id="12" fill="hold">
+                      <p:stCondLst>
+                        <p:cond delay="indefinite"/>
+                      </p:stCondLst>
+                      <p:childTnLst>
+                        <p:par>
+                          <p:cTn id="13" fill="hold">
+                            <p:stCondLst>
+                              <p:cond delay="0"/>
+                            </p:stCondLst>
+                            <p:childTnLst>
+                              <p:par>
+                                <p:cTn id="3" presetID="10" presetClass="entr" presetSubtype="0" fill="hold" nodeType="clickEffect">
+                                  <p:stCondLst>
+                                    <p:cond delay="0"/>
+                                  </p:stCondLst>
+                                  <p:childTnLst>
+                                    <p:set>
+                                      <p:cBhvr>
+                                        <p:cTn id="4" dur="1" fill="hold">
+                                          <p:stCondLst>
+                                            <p:cond delay="0"/>
+                                          </p:stCondLst>
+                                        </p:cTn>
+                                        <p:tgtEl>
+                                          <p:spTgt spid="518"/>
+                                        </p:tgtEl>
+                                        <p:attrNameLst>
+                                          <p:attrName>style.visibility</p:attrName>
+                                        </p:attrNameLst>
+                                      </p:cBhvr>
+                                      <p:to>
+                                        <p:strVal val="visible"/>
+                                      </p:to>
+                                    </p:set>
+                                    <p:animEffect transition="in" filter="fade">
+                                      <p:cBhvr>
+                                        <p:cTn id="5" dur="500"/>
+                                        <p:tgtEl>
+                                          <p:spTgt spid="518"/>
+                                        </p:tgtEl>
+                                      </p:cBhvr>
+                                    </p:animEffect>
+                                  </p:childTnLst>
+                                </p:cTn>
+                              </p:par>
+                              <p:par>
+                                <p:cTn id="6" presetID="10" presetClass="entr" presetSubtype="0" fill="hold" nodeType="withEffect">
+                                  <p:stCondLst>
+                                    <p:cond delay="0"/>
+                                  </p:stCondLst>
+                                  <p:childTnLst>
+                                    <p:set>
+                                      <p:cBhvr>
+                                        <p:cTn id="7" dur="1" fill="hold">
+                                          <p:stCondLst>
+                                            <p:cond delay="0"/>
+                                          </p:stCondLst>
+                                        </p:cTn>
+                                        <p:tgtEl>
+                                          <p:spTgt spid="522"/>
+                                        </p:tgtEl>
+                                        <p:attrNameLst>
+                                          <p:attrName>style.visibility</p:attrName>
+                                        </p:attrNameLst>
+                                      </p:cBhvr>
+                                      <p:to>
+                                        <p:strVal val="visible"/>
+                                      </p:to>
+                                    </p:set>
+                                    <p:animEffect transition="in" filter="fade">
+                                      <p:cBhvr>
+                                        <p:cTn id="8" dur="500"/>
+                                        <p:tgtEl>
+                                          <p:spTgt spid="522"/>
+                                        </p:tgtEl>
+                                      </p:cBhvr>
+                                    </p:animEffect>
+                                  </p:childTnLst>
+                                </p:cTn>
+                              </p:par>
+                              <p:par>
+                                <p:cTn id="9" presetID="10" presetClass="entr" presetSubtype="0" fill="hold" nodeType="withEffect">
+                                  <p:stCondLst>
+                                    <p:cond delay="0"/>
+                                  </p:stCondLst>
+                                  <p:childTnLst>
+                                    <p:set>
+                                      <p:cBhvr>
+                                        <p:cTn id="10" dur="1" fill="hold">
+                                          <p:stCondLst>
+                                            <p:cond delay="0"/>
+                                          </p:stCondLst>
+                                        </p:cTn>
+                                        <p:tgtEl>
+                                          <p:spTgt spid="538"/>
+                                        </p:tgtEl>
+                                        <p:attrNameLst>
+                                          <p:attrName>style.visibility</p:attrName>
+                                        </p:attrNameLst>
+                                      </p:cBhvr>
+                                      <p:to>
+                                        <p:strVal val="visible"/>
+                                      </p:to>
+                                    </p:set>
+                                    <p:animEffect transition="in" filter="fade">
+                                      <p:cBhvr>
+                                        <p:cTn id="11" dur="500"/>
+                                        <p:tgtEl>
+                                          <p:spTgt spid="538"/>
+                                        </p:tgtEl>
+                                      </p:cBhvr>
+                                    </p:animEffect>
+                                  </p:childTnLst>
+                                </p:cTn>
+                              </p:par>
+                            </p:childTnLst>
+                          </p:cTn>
+                        </p:par>
+                      </p:childTnLst>
+                    </p:cTn>
+                  </p:par>
+                  <p:par>
+                    <p:cTn id="23" fill="hold">
+                      <p:stCondLst>
+                        <p:cond delay="indefinite"/>
+                      </p:stCondLst>
+                      <p:childTnLst>
+                        <p:par>
+                          <p:cTn id="24" fill="hold">
+                            <p:stCondLst>
+                              <p:cond delay="0"/>
+                            </p:stCondLst>
+                            <p:childTnLst>
+                              <p:par>
+                                <p:cTn id="14" presetID="10" presetClass="entr" presetSubtype="0" fill="hold" nodeType="clickEffect">
+                                  <p:stCondLst>
+                                    <p:cond delay="0"/>
+                                  </p:stCondLst>
+                                  <p:childTnLst>
+                                    <p:set>
+                                      <p:cBhvr>
+                                        <p:cTn id="15" dur="1" fill="hold">
+                                          <p:stCondLst>
+                                            <p:cond delay="0"/>
+                                          </p:stCondLst>
+                                        </p:cTn>
+                                        <p:tgtEl>
+                                          <p:spTgt spid="519"/>
+                                        </p:tgtEl>
+                                        <p:attrNameLst>
+                                          <p:attrName>style.visibility</p:attrName>
+                                        </p:attrNameLst>
+                                      </p:cBhvr>
+                                      <p:to>
+                                        <p:strVal val="visible"/>
+                                      </p:to>
+                                    </p:set>
+                                    <p:animEffect transition="in" filter="fade">
+                                      <p:cBhvr>
+                                        <p:cTn id="16" dur="500"/>
+                                        <p:tgtEl>
+                                          <p:spTgt spid="519"/>
+                                        </p:tgtEl>
+                                      </p:cBhvr>
+                                    </p:animEffect>
+                                  </p:childTnLst>
+                                </p:cTn>
+                              </p:par>
+                              <p:par>
+                                <p:cTn id="17" presetID="10" presetClass="entr" presetSubtype="0" fill="hold" nodeType="withEffect">
+                                  <p:stCondLst>
+                                    <p:cond delay="0"/>
+                                  </p:stCondLst>
+                                  <p:childTnLst>
+                                    <p:set>
+                                      <p:cBhvr>
+                                        <p:cTn id="18" dur="1" fill="hold">
+                                          <p:stCondLst>
+                                            <p:cond delay="0"/>
+                                          </p:stCondLst>
+                                        </p:cTn>
+                                        <p:tgtEl>
+                                          <p:spTgt spid="523"/>
+                                        </p:tgtEl>
+                                        <p:attrNameLst>
+                                          <p:attrName>style.visibility</p:attrName>
+                                        </p:attrNameLst>
+                                      </p:cBhvr>
+                                      <p:to>
+                                        <p:strVal val="visible"/>
+                                      </p:to>
+                                    </p:set>
+                                    <p:animEffect transition="in" filter="fade">
+                                      <p:cBhvr>
+                                        <p:cTn id="19" dur="500"/>
+                                        <p:tgtEl>
+                                          <p:spTgt spid="523"/>
+                                        </p:tgtEl>
+                                      </p:cBhvr>
+                                    </p:animEffect>
+                                  </p:childTnLst>
+                                </p:cTn>
+                              </p:par>
+                              <p:par>
+                                <p:cTn id="20" presetID="10" presetClass="entr" presetSubtype="0" fill="hold" nodeType="withEffect">
+                                  <p:stCondLst>
+                                    <p:cond delay="0"/>
+                                  </p:stCondLst>
+                                  <p:childTnLst>
+                                    <p:set>
+                                      <p:cBhvr>
+                                        <p:cTn id="21" dur="1" fill="hold">
+                                          <p:stCondLst>
+                                            <p:cond delay="0"/>
+                                          </p:stCondLst>
+                                        </p:cTn>
+                                        <p:tgtEl>
+                                          <p:spTgt spid="539"/>
+                                        </p:tgtEl>
+                                        <p:attrNameLst>
+                                          <p:attrName>style.visibility</p:attrName>
+                                        </p:attrNameLst>
+                                      </p:cBhvr>
+                                      <p:to>
+                                        <p:strVal val="visible"/>
+                                      </p:to>
+                                    </p:set>
+                                    <p:animEffect transition="in" filter="fade">
+                                      <p:cBhvr>
+                                        <p:cTn id="22" dur="500"/>
+                                        <p:tgtEl>
+                                          <p:spTgt spid="539"/>
+                                        </p:tgtEl>
+                                      </p:cBhvr>
+                                    </p:animEffect>
+                                  </p:childTnLst>
+                                </p:cTn>
+                              </p:par>
+                            </p:childTnLst>
+                          </p:cTn>
+                        </p:par>
+                      </p:childTnLst>
+                    </p:cTn>
+                  </p:par>
+                  <p:par>
+                    <p:cTn id="34" fill="hold">
+                      <p:stCondLst>
+                        <p:cond delay="indefinite"/>
+                      </p:stCondLst>
+                      <p:childTnLst>
+                        <p:par>
+                          <p:cTn id="35" fill="hold">
+                            <p:stCondLst>
+                              <p:cond delay="0"/>
+                            </p:stCondLst>
+                            <p:childTnLst>
+                              <p:par>
+                                <p:cTn id="25" presetID="10" presetClass="entr" presetSubtype="0" fill="hold" nodeType="clickEffect">
+                                  <p:stCondLst>
+                                    <p:cond delay="0"/>
+                                  </p:stCondLst>
+                                  <p:childTnLst>
+                                    <p:set>
+                                      <p:cBhvr>
+                                        <p:cTn id="26" dur="1" fill="hold">
+                                          <p:stCondLst>
+                                            <p:cond delay="0"/>
+                                          </p:stCondLst>
+                                        </p:cTn>
+                                        <p:tgtEl>
+                                          <p:spTgt spid="520"/>
+                                        </p:tgtEl>
+                                        <p:attrNameLst>
+                                          <p:attrName>style.visibility</p:attrName>
+                                        </p:attrNameLst>
+                                      </p:cBhvr>
+                                      <p:to>
+                                        <p:strVal val="visible"/>
+                                      </p:to>
+                                    </p:set>
+                                    <p:animEffect transition="in" filter="fade">
+                                      <p:cBhvr>
+                                        <p:cTn id="27" dur="500"/>
+                                        <p:tgtEl>
+                                          <p:spTgt spid="520"/>
+                                        </p:tgtEl>
+                                      </p:cBhvr>
+                                    </p:animEffect>
+                                  </p:childTnLst>
+                                </p:cTn>
+                              </p:par>
+                              <p:par>
+                                <p:cTn id="28" presetID="10" presetClass="entr" presetSubtype="0" fill="hold" nodeType="withEffect">
+                                  <p:stCondLst>
+                                    <p:cond delay="0"/>
+                                  </p:stCondLst>
+                                  <p:childTnLst>
+                                    <p:set>
+                                      <p:cBhvr>
+                                        <p:cTn id="29" dur="1" fill="hold">
+                                          <p:stCondLst>
+                                            <p:cond delay="0"/>
+                                          </p:stCondLst>
+                                        </p:cTn>
+                                        <p:tgtEl>
+                                          <p:spTgt spid="524"/>
+                                        </p:tgtEl>
+                                        <p:attrNameLst>
+                                          <p:attrName>style.visibility</p:attrName>
+                                        </p:attrNameLst>
+                                      </p:cBhvr>
+                                      <p:to>
+                                        <p:strVal val="visible"/>
+                                      </p:to>
+                                    </p:set>
+                                    <p:animEffect transition="in" filter="fade">
+                                      <p:cBhvr>
+                                        <p:cTn id="30" dur="500"/>
+                                        <p:tgtEl>
+                                          <p:spTgt spid="524"/>
+                                        </p:tgtEl>
+                                      </p:cBhvr>
+                                    </p:animEffect>
+                                  </p:childTnLst>
+                                </p:cTn>
+                              </p:par>
+                              <p:par>
+                                <p:cTn id="31" presetID="10" presetClass="entr" presetSubtype="0" fill="hold" nodeType="withEffect">
+                                  <p:stCondLst>
+                                    <p:cond delay="0"/>
+                                  </p:stCondLst>
+                                  <p:childTnLst>
+                                    <p:set>
+                                      <p:cBhvr>
+                                        <p:cTn id="32" dur="1" fill="hold">
+                                          <p:stCondLst>
+                                            <p:cond delay="0"/>
+                                          </p:stCondLst>
+                                        </p:cTn>
+                                        <p:tgtEl>
+                                          <p:spTgt spid="540"/>
+                                        </p:tgtEl>
+                                        <p:attrNameLst>
+                                          <p:attrName>style.visibility</p:attrName>
+                                        </p:attrNameLst>
+                                      </p:cBhvr>
+                                      <p:to>
+                                        <p:strVal val="visible"/>
+                                      </p:to>
+                                    </p:set>
+                                    <p:animEffect transition="in" filter="fade">
+                                      <p:cBhvr>
+                                        <p:cTn id="33" dur="500"/>
+                                        <p:tgtEl>
+                                          <p:spTgt spid="540"/>
+                                        </p:tgtEl>
+                                      </p:cBhvr>
+                                    </p:animEffect>
+                                  </p:childTnLst>
+                                </p:cTn>
+                              </p:par>
+                            </p:childTnLst>
+                          </p:cTn>
+                        </p:par>
+                      </p:childTnLst>
+                    </p:cTn>
+                  </p:par>
+                  <p:par>
+                    <p:cTn id="45" fill="hold">
+                      <p:stCondLst>
+                        <p:cond delay="indefinite"/>
+                      </p:stCondLst>
+                      <p:childTnLst>
+                        <p:par>
+                          <p:cTn id="46" fill="hold">
+                            <p:stCondLst>
+                              <p:cond delay="0"/>
+                            </p:stCondLst>
+                            <p:childTnLst>
+                              <p:par>
+                                <p:cTn id="36" presetID="10" presetClass="entr" presetSubtype="0" fill="hold" nodeType="clickEffect">
+                                  <p:stCondLst>
+                                    <p:cond delay="0"/>
+                                  </p:stCondLst>
+                                  <p:childTnLst>
+                                    <p:set>
+                                      <p:cBhvr>
+                                        <p:cTn id="37" dur="1" fill="hold">
+                                          <p:stCondLst>
+                                            <p:cond delay="0"/>
+                                          </p:stCondLst>
+                                        </p:cTn>
+                                        <p:tgtEl>
+                                          <p:spTgt spid="521"/>
+                                        </p:tgtEl>
+                                        <p:attrNameLst>
+                                          <p:attrName>style.visibility</p:attrName>
+                                        </p:attrNameLst>
+                                      </p:cBhvr>
+                                      <p:to>
+                                        <p:strVal val="visible"/>
+                                      </p:to>
+                                    </p:set>
+                                    <p:animEffect transition="in" filter="fade">
+                                      <p:cBhvr>
+                                        <p:cTn id="38" dur="500"/>
+                                        <p:tgtEl>
+                                          <p:spTgt spid="521"/>
+                                        </p:tgtEl>
+                                      </p:cBhvr>
+                                    </p:animEffect>
+                                  </p:childTnLst>
+                                </p:cTn>
+                              </p:par>
+                              <p:par>
+                                <p:cTn id="39" presetID="10" presetClass="entr" presetSubtype="0" fill="hold" nodeType="withEffect">
+                                  <p:stCondLst>
+                                    <p:cond delay="0"/>
+                                  </p:stCondLst>
+                                  <p:childTnLst>
+                                    <p:set>
+                                      <p:cBhvr>
+                                        <p:cTn id="40" dur="1" fill="hold">
+                                          <p:stCondLst>
+                                            <p:cond delay="0"/>
+                                          </p:stCondLst>
+                                        </p:cTn>
+                                        <p:tgtEl>
+                                          <p:spTgt spid="525"/>
+                                        </p:tgtEl>
+                                        <p:attrNameLst>
+                                          <p:attrName>style.visibility</p:attrName>
+                                        </p:attrNameLst>
+                                      </p:cBhvr>
+                                      <p:to>
+                                        <p:strVal val="visible"/>
+                                      </p:to>
+                                    </p:set>
+                                    <p:animEffect transition="in" filter="fade">
+                                      <p:cBhvr>
+                                        <p:cTn id="41" dur="500"/>
+                                        <p:tgtEl>
+                                          <p:spTgt spid="525"/>
+                                        </p:tgtEl>
+                                      </p:cBhvr>
+                                    </p:animEffect>
+                                  </p:childTnLst>
+                                </p:cTn>
+                              </p:par>
+                              <p:par>
+                                <p:cTn id="42" presetID="10" presetClass="entr" presetSubtype="0" fill="hold" nodeType="withEffect">
+                                  <p:stCondLst>
+                                    <p:cond delay="0"/>
+                                  </p:stCondLst>
+                                  <p:childTnLst>
+                                    <p:set>
+                                      <p:cBhvr>
+                                        <p:cTn id="43" dur="1" fill="hold">
+                                          <p:stCondLst>
+                                            <p:cond delay="0"/>
+                                          </p:stCondLst>
+                                        </p:cTn>
+                                        <p:tgtEl>
+                                          <p:spTgt spid="541"/>
+                                        </p:tgtEl>
+                                        <p:attrNameLst>
+                                          <p:attrName>style.visibility</p:attrName>
+                                        </p:attrNameLst>
+                                      </p:cBhvr>
+                                      <p:to>
+                                        <p:strVal val="visible"/>
+                                      </p:to>
+                                    </p:set>
+                                    <p:animEffect transition="in" filter="fade">
+                                      <p:cBhvr>
+                                        <p:cTn id="44" dur="500"/>
+                                        <p:tgtEl>
+                                          <p:spTgt spid="541"/>
+                                        </p:tgtEl>
+                                      </p:cBhvr>
+                                    </p:animEffect>
+                                  </p:childTnLst>
+                                </p:cTn>
+                              </p:par>
+                            </p:childTnLst>
+                          </p:cTn>
+                        </p:par>
+                      </p:childTnLst>
+                    </p:cTn>
+                  </p:par>
+                </p:childTnLst>
+              </p:cTn>
+              <p:prevCondLst>
+                <p:cond evt="onPrev" delay="0">
+                  <p:tgtEl>
+                    <p:sldTgt/>
+                  </p:tgtEl>
+                </p:cond>
+              </p:prevCondLst>
+              <p:nextCondLst>
+                <p:cond evt="onNext" delay="0">
+                  <p:tgtEl>
+                    <p:sldTgt/>
+                  </p:tgtEl>
+                </p:cond>
+              </p:nextCondLst>
+            </p:seq>
+          </p:childTnLst>
+        </p:cTn>
+      </p:par>
+    </p:tnLst>
+  </p:timing>
 </p:sld>
 </file>
 
-<file path=ppt/slides/slide21.xml><?xml version="1.0" encoding="utf-8"?>
+<file path=ppt/slides/slide22.xml><?xml version="1.0" encoding="utf-8"?>
 <p:sld xmlns:a="http://schemas.openxmlformats.org/drawingml/2006/main" xmlns:r="http://schemas.openxmlformats.org/officeDocument/2006/relationships" xmlns:mc="http://schemas.openxmlformats.org/markup-compatibility/2006" xmlns:mv="urn:schemas-microsoft-com:mac:vml" xmlns:p="http://schemas.openxmlformats.org/presentationml/2006/main" xmlns:c="http://schemas.openxmlformats.org/drawingml/2006/chart" xmlns:dgm="http://schemas.openxmlformats.org/drawingml/2006/diagram" xmlns:o="urn:schemas-microsoft-com:office:office" xmlns:v="urn:schemas-microsoft-com:vml" xmlns:pvml="urn:schemas-microsoft-com:office:powerpoint" xmlns:com="http://schemas.openxmlformats.org/drawingml/2006/compatibility" xmlns:p14="http://schemas.microsoft.com/office/powerpoint/2010/main" xmlns:p15="http://schemas.microsoft.com/office/powerpoint/2012/main" xmlns:ahyp="http://schemas.microsoft.com/office/drawing/2018/hyperlinkcolor">
   <p:cSld>
     <p:bg>
@@ -30228,7 +33866,7 @@
 </p:sld>
 </file>
 
-<file path=ppt/slides/slide22.xml><?xml version="1.0" encoding="utf-8"?>
+<file path=ppt/slides/slide23.xml><?xml version="1.0" encoding="utf-8"?>
 <p:sld xmlns:a="http://schemas.openxmlformats.org/drawingml/2006/main" xmlns:r="http://schemas.openxmlformats.org/officeDocument/2006/relationships" xmlns:mc="http://schemas.openxmlformats.org/markup-compatibility/2006" xmlns:mv="urn:schemas-microsoft-com:mac:vml" xmlns:p="http://schemas.openxmlformats.org/presentationml/2006/main" xmlns:c="http://schemas.openxmlformats.org/drawingml/2006/chart" xmlns:dgm="http://schemas.openxmlformats.org/drawingml/2006/diagram" xmlns:o="urn:schemas-microsoft-com:office:office" xmlns:v="urn:schemas-microsoft-com:vml" xmlns:pvml="urn:schemas-microsoft-com:office:powerpoint" xmlns:com="http://schemas.openxmlformats.org/drawingml/2006/compatibility" xmlns:p14="http://schemas.microsoft.com/office/powerpoint/2010/main" xmlns:p15="http://schemas.microsoft.com/office/powerpoint/2012/main" xmlns:ahyp="http://schemas.microsoft.com/office/drawing/2018/hyperlinkcolor">
   <p:cSld>
     <p:bg>
@@ -31420,6 +35058,124 @@
   <p:clrMapOvr>
     <a:masterClrMapping/>
   </p:clrMapOvr>
+  <p:timing>
+    <p:tnLst>
+      <p:par>
+        <p:cTn id="1" dur="indefinite" restart="never" nodeType="tmRoot">
+          <p:childTnLst>
+            <p:seq concurrent="1" nextAc="seek">
+              <p:cTn id="2" dur="indefinite" nodeType="mainSeq">
+                <p:childTnLst>
+                  <p:par>
+                    <p:cTn id="9" fill="hold">
+                      <p:stCondLst>
+                        <p:cond delay="indefinite"/>
+                      </p:stCondLst>
+                      <p:childTnLst>
+                        <p:par>
+                          <p:cTn id="10" fill="hold">
+                            <p:stCondLst>
+                              <p:cond delay="0"/>
+                            </p:stCondLst>
+                            <p:childTnLst>
+                              <p:par>
+                                <p:cTn id="3" presetID="10" presetClass="entr" presetSubtype="0" fill="hold" nodeType="clickEffect">
+                                  <p:stCondLst>
+                                    <p:cond delay="0"/>
+                                  </p:stCondLst>
+                                  <p:childTnLst>
+                                    <p:set>
+                                      <p:cBhvr>
+                                        <p:cTn id="4" dur="1" fill="hold">
+                                          <p:stCondLst>
+                                            <p:cond delay="0"/>
+                                          </p:stCondLst>
+                                        </p:cTn>
+                                        <p:tgtEl>
+                                          <p:spTgt spid="289"/>
+                                        </p:tgtEl>
+                                        <p:attrNameLst>
+                                          <p:attrName>style.visibility</p:attrName>
+                                        </p:attrNameLst>
+                                      </p:cBhvr>
+                                      <p:to>
+                                        <p:strVal val="visible"/>
+                                      </p:to>
+                                    </p:set>
+                                    <p:animEffect transition="in" filter="fade">
+                                      <p:cBhvr>
+                                        <p:cTn id="5" dur="500"/>
+                                        <p:tgtEl>
+                                          <p:spTgt spid="289"/>
+                                        </p:tgtEl>
+                                      </p:cBhvr>
+                                    </p:animEffect>
+                                  </p:childTnLst>
+                                </p:cTn>
+                              </p:par>
+                              <p:par>
+                                <p:cTn id="6" presetID="10" presetClass="entr" presetSubtype="0" fill="hold" nodeType="withEffect">
+                                  <p:stCondLst>
+                                    <p:cond delay="0"/>
+                                  </p:stCondLst>
+                                  <p:childTnLst>
+                                    <p:set>
+                                      <p:cBhvr>
+                                        <p:cTn id="7" dur="1" fill="hold">
+                                          <p:stCondLst>
+                                            <p:cond delay="0"/>
+                                          </p:stCondLst>
+                                        </p:cTn>
+                                        <p:tgtEl>
+                                          <p:spTgt spid="305"/>
+                                        </p:tgtEl>
+                                        <p:attrNameLst>
+                                          <p:attrName>style.visibility</p:attrName>
+                                        </p:attrNameLst>
+                                      </p:cBhvr>
+                                      <p:to>
+                                        <p:strVal val="visible"/>
+                                      </p:to>
+                                    </p:set>
+                                    <p:animEffect transition="in" filter="fade">
+                                      <p:cBhvr>
+                                        <p:cTn id="8" dur="500"/>
+                                        <p:tgtEl>
+                                          <p:spTgt spid="305"/>
+                                        </p:tgtEl>
+                                      </p:cBhvr>
+                                    </p:animEffect>
+                                  </p:childTnLst>
+                                </p:cTn>
+                              </p:par>
+                            </p:childTnLst>
+                          </p:cTn>
+                        </p:par>
+                      </p:childTnLst>
+                    </p:cTn>
+                  </p:par>
+                </p:childTnLst>
+              </p:cTn>
+              <p:prevCondLst>
+                <p:cond evt="onPrev" delay="0">
+                  <p:tgtEl>
+                    <p:sldTgt/>
+                  </p:tgtEl>
+                </p:cond>
+              </p:prevCondLst>
+              <p:nextCondLst>
+                <p:cond evt="onNext" delay="0">
+                  <p:tgtEl>
+                    <p:sldTgt/>
+                  </p:tgtEl>
+                </p:cond>
+              </p:nextCondLst>
+            </p:seq>
+          </p:childTnLst>
+        </p:cTn>
+      </p:par>
+    </p:tnLst>
+  </p:timing>
 </p:sld>
 </file>
 
@@ -31818,7 +35574,7 @@
       </p:sp>
       <p:pic>
         <p:nvPicPr>
-          <p:cNvPr id="319" name="Picture 318" descr="launch-lab-phone.png"/>
+          <p:cNvPr id="319" name="Picture 318" descr="build-recording-result.png"/>
           <p:cNvPicPr>
             <a:picLocks noChangeAspect="1"/>
           </p:cNvPicPr>
@@ -31832,8 +35588,8 @@
         </p:blipFill>
         <p:spPr>
           <a:xfrm>
-            <a:off x="1531273" y="649224"/>
-            <a:ext cx="1774629" cy="3840480"/>
+            <a:off x="612647" y="1162914"/>
+            <a:ext cx="3611880" cy="2813098"/>
           </a:xfrm>
           <a:prstGeom prst="rect">
             <a:avLst/>
@@ -31888,7 +35644,7 @@
         <p:spPr>
           <a:xfrm>
             <a:off x="4846320" y="1417320"/>
-            <a:ext cx="3749039" cy="2194560"/>
+            <a:ext cx="3749039" cy="1828800"/>
           </a:xfrm>
           <a:prstGeom prst="rect">
             <a:avLst/>
@@ -31903,7 +35659,7 @@
           <a:p>
             <a:pPr algn="l">
               <a:spcAft>
-                <a:spcPts val="1400"/>
+                <a:spcPts val="600"/>
               </a:spcAft>
             </a:pPr>
             <a:r>
@@ -31916,10 +35672,33 @@
               <a:t>“Make a projectile motion lab where students predict the launch angle to hit a target, auto-graded, with the target distance set by the teacher.”</a:t>
             </a:r>
           </a:p>
+        </p:txBody>
+      </p:sp>
+      <p:sp>
+        <p:nvSpPr>
+          <p:cNvPr id="322" name="TextBox 321"/>
+          <p:cNvSpPr txBox="1"/>
+          <p:nvPr/>
+        </p:nvSpPr>
+        <p:spPr>
+          <a:xfrm>
+            <a:off x="4846320" y="3063240"/>
+            <a:ext cx="3749039" cy="731520"/>
+          </a:xfrm>
+          <a:prstGeom prst="rect">
+            <a:avLst/>
+          </a:prstGeom>
+          <a:noFill/>
+        </p:spPr>
+        <p:txBody>
+          <a:bodyPr wrap="square" anchor="t" lIns="0" rIns="0" tIns="0" bIns="0">
+            <a:spAutoFit/>
+          </a:bodyPr>
+          <a:lstStyle/>
           <a:p>
             <a:pPr algn="l">
               <a:spcAft>
-                <a:spcPts val="0"/>
+                <a:spcPts val="600"/>
               </a:spcAft>
             </a:pPr>
             <a:r>
@@ -31929,7 +35708,7 @@
                 </a:solidFill>
                 <a:latin typeface="Roboto"/>
               </a:rPr>
-              <a:t>That is all the teacher typed.</a:t>
+              <a:t>That is all the teacher typed. About three minutes later, this.</a:t>
             </a:r>
           </a:p>
         </p:txBody>
@@ -31939,6 +35718,124 @@
   <p:clrMapOvr>
     <a:masterClrMapping/>
   </p:clrMapOvr>
+  <p:timing>
+    <p:tnLst>
+      <p:par>
+        <p:cTn id="1" dur="indefinite" restart="never" nodeType="tmRoot">
+          <p:childTnLst>
+            <p:seq concurrent="1" nextAc="seek">
+              <p:cTn id="2" dur="indefinite" nodeType="mainSeq">
+                <p:childTnLst>
+                  <p:par>
+                    <p:cTn id="9" fill="hold">
+                      <p:stCondLst>
+                        <p:cond delay="indefinite"/>
+                      </p:stCondLst>
+                      <p:childTnLst>
+                        <p:par>
+                          <p:cTn id="10" fill="hold">
+                            <p:stCondLst>
+                              <p:cond delay="0"/>
+                            </p:stCondLst>
+                            <p:childTnLst>
+                              <p:par>
+                                <p:cTn id="3" presetID="10" presetClass="entr" presetSubtype="0" fill="hold" nodeType="clickEffect">
+                                  <p:stCondLst>
+                                    <p:cond delay="0"/>
+                                  </p:stCondLst>
+                                  <p:childTnLst>
+                                    <p:set>
+                                      <p:cBhvr>
+                                        <p:cTn id="4" dur="1" fill="hold">
+                                          <p:stCondLst>
+                                            <p:cond delay="0"/>
+                                          </p:stCondLst>
+                                        </p:cTn>
+                                        <p:tgtEl>
+                                          <p:spTgt spid="319"/>
+                                        </p:tgtEl>
+                                        <p:attrNameLst>
+                                          <p:attrName>style.visibility</p:attrName>
+                                        </p:attrNameLst>
+                                      </p:cBhvr>
+                                      <p:to>
+                                        <p:strVal val="visible"/>
+                                      </p:to>
+                                    </p:set>
+                                    <p:animEffect transition="in" filter="fade">
+                                      <p:cBhvr>
+                                        <p:cTn id="5" dur="500"/>
+                                        <p:tgtEl>
+                                          <p:spTgt spid="319"/>
+                                        </p:tgtEl>
+                                      </p:cBhvr>
+                                    </p:animEffect>
+                                  </p:childTnLst>
+                                </p:cTn>
+                              </p:par>
+                              <p:par>
+                                <p:cTn id="6" presetID="10" presetClass="entr" presetSubtype="0" fill="hold" nodeType="withEffect">
+                                  <p:stCondLst>
+                                    <p:cond delay="0"/>
+                                  </p:stCondLst>
+                                  <p:childTnLst>
+                                    <p:set>
+                                      <p:cBhvr>
+                                        <p:cTn id="7" dur="1" fill="hold">
+                                          <p:stCondLst>
+                                            <p:cond delay="0"/>
+                                          </p:stCondLst>
+                                        </p:cTn>
+                                        <p:tgtEl>
+                                          <p:spTgt spid="322"/>
+                                        </p:tgtEl>
+                                        <p:attrNameLst>
+                                          <p:attrName>style.visibility</p:attrName>
+                                        </p:attrNameLst>
+                                      </p:cBhvr>
+                                      <p:to>
+                                        <p:strVal val="visible"/>
+                                      </p:to>
+                                    </p:set>
+                                    <p:animEffect transition="in" filter="fade">
+                                      <p:cBhvr>
+                                        <p:cTn id="8" dur="500"/>
+                                        <p:tgtEl>
+                                          <p:spTgt spid="322"/>
+                                        </p:tgtEl>
+                                      </p:cBhvr>
+                                    </p:animEffect>
+                                  </p:childTnLst>
+                                </p:cTn>
+                              </p:par>
+                            </p:childTnLst>
+                          </p:cTn>
+                        </p:par>
+                      </p:childTnLst>
+                    </p:cTn>
+                  </p:par>
+                </p:childTnLst>
+              </p:cTn>
+              <p:prevCondLst>
+                <p:cond evt="onPrev" delay="0">
+                  <p:tgtEl>
+                    <p:sldTgt/>
+                  </p:tgtEl>
+                </p:cond>
+              </p:prevCondLst>
+              <p:nextCondLst>
+                <p:cond evt="onNext" delay="0">
+                  <p:tgtEl>
+                    <p:sldTgt/>
+                  </p:tgtEl>
+                </p:cond>
+              </p:nextCondLst>
+            </p:seq>
+          </p:childTnLst>
+        </p:cTn>
+      </p:par>
+    </p:tnLst>
+  </p:timing>
 </p:sld>
 </file>
 
@@ -32137,61 +36034,35 @@
           </a:p>
         </p:txBody>
       </p:sp>
-      <p:sp>
-        <p:nvSpPr>
-          <p:cNvPr id="570" name="Rounded Rectangle 569"/>
-          <p:cNvSpPr/>
+      <p:pic>
+        <p:nvPicPr>
+          <p:cNvPr id="570" name="Picture 569" descr="build-recording-poster.png"/>
+          <p:cNvPicPr>
+            <a:picLocks noChangeAspect="1"/>
+          </p:cNvPicPr>
           <p:nvPr/>
-        </p:nvSpPr>
+        </p:nvPicPr>
+        <p:blipFill>
+          <a:blip r:embed="rId2"/>
+          <a:stretch>
+            <a:fillRect/>
+          </a:stretch>
+        </p:blipFill>
         <p:spPr>
           <a:xfrm>
-            <a:off x="1097280" y="914400"/>
-            <a:ext cx="6949440" cy="3749039"/>
-          </a:xfrm>
-          <a:prstGeom prst="roundRect">
+            <a:off x="1239520" y="868680"/>
+            <a:ext cx="6664959" cy="3749039"/>
+          </a:xfrm>
+          <a:prstGeom prst="rect">
             <a:avLst/>
           </a:prstGeom>
-          <a:solidFill>
-            <a:srgbClr val="FFFFFF"/>
-          </a:solidFill>
-          <a:ln w="19050">
+          <a:ln w="12700">
             <a:solidFill>
-              <a:srgbClr val="960000"/>
+              <a:srgbClr val="25AEFA"/>
             </a:solidFill>
           </a:ln>
-          <a:effectLst/>
         </p:spPr>
-        <p:style>
-          <a:lnRef idx="1">
-            <a:schemeClr val="accent1"/>
-          </a:lnRef>
-          <a:fillRef idx="3">
-            <a:schemeClr val="accent1"/>
-          </a:fillRef>
-          <a:effectRef idx="2">
-            <a:schemeClr val="accent1"/>
-          </a:effectRef>
-          <a:fontRef idx="minor">
-            <a:schemeClr val="lt1"/>
-          </a:fontRef>
-        </p:style>
-        <p:txBody>
-          <a:bodyPr rtlCol="0" anchor="ctr" wrap="square"/>
-          <a:lstStyle/>
-          <a:p>
-            <a:pPr algn="ctr"/>
-            <a:r>
-              <a:rPr sz="1100" b="1">
-                <a:solidFill>
-                  <a:srgbClr val="960000"/>
-                </a:solidFill>
-                <a:latin typeface="Roboto"/>
-              </a:rPr>
-              <a:t>Build recording (video goes here)</a:t>
-            </a:r>
-          </a:p>
-        </p:txBody>
-      </p:sp>
+      </p:pic>
       <p:sp>
         <p:nvSpPr>
           <p:cNvPr id="571" name="TextBox 570"/>
@@ -32200,8 +36071,8 @@
         </p:nvSpPr>
         <p:spPr>
           <a:xfrm>
-            <a:off x="6583680" y="365760"/>
-            <a:ext cx="2103120" cy="365760"/>
+            <a:off x="5669280" y="365760"/>
+            <a:ext cx="3017520" cy="365760"/>
           </a:xfrm>
           <a:prstGeom prst="rect">
             <a:avLst/>
@@ -32226,7 +36097,7 @@
                 </a:solidFill>
                 <a:latin typeface="Roboto"/>
               </a:rPr>
-              <a:t>Sped up</a:t>
+              <a:t>Real run, sped up</a:t>
             </a:r>
           </a:p>
         </p:txBody>
@@ -32590,7 +36461,7 @@
         <p:spPr>
           <a:xfrm>
             <a:off x="1005840" y="960120"/>
-            <a:ext cx="3520440" cy="3383280"/>
+            <a:ext cx="3520440" cy="1005840"/>
           </a:xfrm>
           <a:prstGeom prst="rect">
             <a:avLst/>
@@ -32621,7 +36492,7 @@
           <a:p>
             <a:pPr algn="l">
               <a:spcAft>
-                <a:spcPts val="2200"/>
+                <a:spcPts val="600"/>
               </a:spcAft>
             </a:pPr>
             <a:r>
@@ -32634,6 +36505,29 @@
               <a:t>Someone copies scores by hand, or it does not count</a:t>
             </a:r>
           </a:p>
+        </p:txBody>
+      </p:sp>
+      <p:sp>
+        <p:nvSpPr>
+          <p:cNvPr id="207" name="TextBox 206"/>
+          <p:cNvSpPr txBox="1"/>
+          <p:nvPr/>
+        </p:nvSpPr>
+        <p:spPr>
+          <a:xfrm>
+            <a:off x="1005840" y="2075688"/>
+            <a:ext cx="3520440" cy="1005840"/>
+          </a:xfrm>
+          <a:prstGeom prst="rect">
+            <a:avLst/>
+          </a:prstGeom>
+          <a:noFill/>
+        </p:spPr>
+        <p:txBody>
+          <a:bodyPr wrap="square" anchor="t" lIns="0" rIns="0" tIns="0" bIns="0">
+            <a:spAutoFit/>
+          </a:bodyPr>
+          <a:lstStyle/>
           <a:p>
             <a:pPr algn="l">
               <a:spcAft>
@@ -32653,7 +36547,7 @@
           <a:p>
             <a:pPr algn="l">
               <a:spcAft>
-                <a:spcPts val="2200"/>
+                <a:spcPts val="600"/>
               </a:spcAft>
             </a:pPr>
             <a:r>
@@ -32666,6 +36560,29 @@
               <a:t>The teacher cannot see what the student did</a:t>
             </a:r>
           </a:p>
+        </p:txBody>
+      </p:sp>
+      <p:sp>
+        <p:nvSpPr>
+          <p:cNvPr id="208" name="TextBox 207"/>
+          <p:cNvSpPr txBox="1"/>
+          <p:nvPr/>
+        </p:nvSpPr>
+        <p:spPr>
+          <a:xfrm>
+            <a:off x="1005840" y="3191256"/>
+            <a:ext cx="3520440" cy="1005840"/>
+          </a:xfrm>
+          <a:prstGeom prst="rect">
+            <a:avLst/>
+          </a:prstGeom>
+          <a:noFill/>
+        </p:spPr>
+        <p:txBody>
+          <a:bodyPr wrap="square" anchor="t" lIns="0" rIns="0" tIns="0" bIns="0">
+            <a:spAutoFit/>
+          </a:bodyPr>
+          <a:lstStyle/>
           <a:p>
             <a:pPr algn="l">
               <a:spcAft>
@@ -32685,7 +36602,7 @@
           <a:p>
             <a:pPr algn="l">
               <a:spcAft>
-                <a:spcPts val="0"/>
+                <a:spcPts val="600"/>
               </a:spcAft>
             </a:pPr>
             <a:r>
@@ -32702,7 +36619,7 @@
       </p:sp>
       <p:sp>
         <p:nvSpPr>
-          <p:cNvPr id="207" name="TextBox 206"/>
+          <p:cNvPr id="209" name="TextBox 208"/>
           <p:cNvSpPr txBox="1"/>
           <p:nvPr/>
         </p:nvSpPr>
@@ -32741,7 +36658,7 @@
       </p:sp>
       <p:sp>
         <p:nvSpPr>
-          <p:cNvPr id="208" name="TextBox 207"/>
+          <p:cNvPr id="210" name="TextBox 209"/>
           <p:cNvSpPr txBox="1"/>
           <p:nvPr/>
         </p:nvSpPr>
@@ -32783,6 +36700,248 @@
   <p:clrMapOvr>
     <a:masterClrMapping/>
   </p:clrMapOvr>
+  <p:timing>
+    <p:tnLst>
+      <p:par>
+        <p:cTn id="1" dur="indefinite" restart="never" nodeType="tmRoot">
+          <p:childTnLst>
+            <p:seq concurrent="1" nextAc="seek">
+              <p:cTn id="2" dur="indefinite" nodeType="mainSeq">
+                <p:childTnLst>
+                  <p:par>
+                    <p:cTn id="6" fill="hold">
+                      <p:stCondLst>
+                        <p:cond delay="indefinite"/>
+                      </p:stCondLst>
+                      <p:childTnLst>
+                        <p:par>
+                          <p:cTn id="7" fill="hold">
+                            <p:stCondLst>
+                              <p:cond delay="0"/>
+                            </p:stCondLst>
+                            <p:childTnLst>
+                              <p:par>
+                                <p:cTn id="3" presetID="10" presetClass="entr" presetSubtype="0" fill="hold" nodeType="clickEffect">
+                                  <p:stCondLst>
+                                    <p:cond delay="0"/>
+                                  </p:stCondLst>
+                                  <p:childTnLst>
+                                    <p:set>
+                                      <p:cBhvr>
+                                        <p:cTn id="4" dur="1" fill="hold">
+                                          <p:stCondLst>
+                                            <p:cond delay="0"/>
+                                          </p:stCondLst>
+                                        </p:cTn>
+                                        <p:tgtEl>
+                                          <p:spTgt spid="206"/>
+                                        </p:tgtEl>
+                                        <p:attrNameLst>
+                                          <p:attrName>style.visibility</p:attrName>
+                                        </p:attrNameLst>
+                                      </p:cBhvr>
+                                      <p:to>
+                                        <p:strVal val="visible"/>
+                                      </p:to>
+                                    </p:set>
+                                    <p:animEffect transition="in" filter="fade">
+                                      <p:cBhvr>
+                                        <p:cTn id="5" dur="500"/>
+                                        <p:tgtEl>
+                                          <p:spTgt spid="206"/>
+                                        </p:tgtEl>
+                                      </p:cBhvr>
+                                    </p:animEffect>
+                                  </p:childTnLst>
+                                </p:cTn>
+                              </p:par>
+                            </p:childTnLst>
+                          </p:cTn>
+                        </p:par>
+                      </p:childTnLst>
+                    </p:cTn>
+                  </p:par>
+                  <p:par>
+                    <p:cTn id="11" fill="hold">
+                      <p:stCondLst>
+                        <p:cond delay="indefinite"/>
+                      </p:stCondLst>
+                      <p:childTnLst>
+                        <p:par>
+                          <p:cTn id="12" fill="hold">
+                            <p:stCondLst>
+                              <p:cond delay="0"/>
+                            </p:stCondLst>
+                            <p:childTnLst>
+                              <p:par>
+                                <p:cTn id="8" presetID="10" presetClass="entr" presetSubtype="0" fill="hold" nodeType="clickEffect">
+                                  <p:stCondLst>
+                                    <p:cond delay="0"/>
+                                  </p:stCondLst>
+                                  <p:childTnLst>
+                                    <p:set>
+                                      <p:cBhvr>
+                                        <p:cTn id="9" dur="1" fill="hold">
+                                          <p:stCondLst>
+                                            <p:cond delay="0"/>
+                                          </p:stCondLst>
+                                        </p:cTn>
+                                        <p:tgtEl>
+                                          <p:spTgt spid="207"/>
+                                        </p:tgtEl>
+                                        <p:attrNameLst>
+                                          <p:attrName>style.visibility</p:attrName>
+                                        </p:attrNameLst>
+                                      </p:cBhvr>
+                                      <p:to>
+                                        <p:strVal val="visible"/>
+                                      </p:to>
+                                    </p:set>
+                                    <p:animEffect transition="in" filter="fade">
+                                      <p:cBhvr>
+                                        <p:cTn id="10" dur="500"/>
+                                        <p:tgtEl>
+                                          <p:spTgt spid="207"/>
+                                        </p:tgtEl>
+                                      </p:cBhvr>
+                                    </p:animEffect>
+                                  </p:childTnLst>
+                                </p:cTn>
+                              </p:par>
+                            </p:childTnLst>
+                          </p:cTn>
+                        </p:par>
+                      </p:childTnLst>
+                    </p:cTn>
+                  </p:par>
+                  <p:par>
+                    <p:cTn id="16" fill="hold">
+                      <p:stCondLst>
+                        <p:cond delay="indefinite"/>
+                      </p:stCondLst>
+                      <p:childTnLst>
+                        <p:par>
+                          <p:cTn id="17" fill="hold">
+                            <p:stCondLst>
+                              <p:cond delay="0"/>
+                            </p:stCondLst>
+                            <p:childTnLst>
+                              <p:par>
+                                <p:cTn id="13" presetID="10" presetClass="entr" presetSubtype="0" fill="hold" nodeType="clickEffect">
+                                  <p:stCondLst>
+                                    <p:cond delay="0"/>
+                                  </p:stCondLst>
+                                  <p:childTnLst>
+                                    <p:set>
+                                      <p:cBhvr>
+                                        <p:cTn id="14" dur="1" fill="hold">
+                                          <p:stCondLst>
+                                            <p:cond delay="0"/>
+                                          </p:stCondLst>
+                                        </p:cTn>
+                                        <p:tgtEl>
+                                          <p:spTgt spid="208"/>
+                                        </p:tgtEl>
+                                        <p:attrNameLst>
+                                          <p:attrName>style.visibility</p:attrName>
+                                        </p:attrNameLst>
+                                      </p:cBhvr>
+                                      <p:to>
+                                        <p:strVal val="visible"/>
+                                      </p:to>
+                                    </p:set>
+                                    <p:animEffect transition="in" filter="fade">
+                                      <p:cBhvr>
+                                        <p:cTn id="15" dur="500"/>
+                                        <p:tgtEl>
+                                          <p:spTgt spid="208"/>
+                                        </p:tgtEl>
+                                      </p:cBhvr>
+                                    </p:animEffect>
+                                  </p:childTnLst>
+                                </p:cTn>
+                              </p:par>
+                            </p:childTnLst>
+                          </p:cTn>
+                        </p:par>
+                      </p:childTnLst>
+                    </p:cTn>
+                  </p:par>
+                  <p:par>
+                    <p:cTn id="21" fill="hold">
+                      <p:stCondLst>
+                        <p:cond delay="indefinite"/>
+                      </p:stCondLst>
+                      <p:childTnLst>
+                        <p:par>
+                          <p:cTn id="22" fill="hold">
+                            <p:stCondLst>
+                              <p:cond delay="0"/>
+                            </p:stCondLst>
+                            <p:childTnLst>
+                              <p:par>
+                                <p:cTn id="18" presetID="10" presetClass="entr" presetSubtype="0" fill="hold" nodeType="clickEffect">
+                                  <p:stCondLst>
+                                    <p:cond delay="0"/>
+                                  </p:stCondLst>
+                                  <p:childTnLst>
+                                    <p:set>
+                                      <p:cBhvr>
+                                        <p:cTn id="19" dur="1" fill="hold">
+                                          <p:stCondLst>
+                                            <p:cond delay="0"/>
+                                          </p:stCondLst>
+                                        </p:cTn>
+                                        <p:tgtEl>
+                                          <p:spTgt spid="210"/>
+                                        </p:tgtEl>
+                                        <p:attrNameLst>
+                                          <p:attrName>style.visibility</p:attrName>
+                                        </p:attrNameLst>
+                                      </p:cBhvr>
+                                      <p:to>
+                                        <p:strVal val="visible"/>
+                                      </p:to>
+                                    </p:set>
+                                    <p:animEffect transition="in" filter="fade">
+                                      <p:cBhvr>
+                                        <p:cTn id="20" dur="500"/>
+                                        <p:tgtEl>
+                                          <p:spTgt spid="210"/>
+                                        </p:tgtEl>
+                                      </p:cBhvr>
+                                    </p:animEffect>
+                                  </p:childTnLst>
+                                </p:cTn>
+                              </p:par>
+                            </p:childTnLst>
+                          </p:cTn>
+                        </p:par>
+                      </p:childTnLst>
+                    </p:cTn>
+                  </p:par>
+                </p:childTnLst>
+              </p:cTn>
+              <p:prevCondLst>
+                <p:cond evt="onPrev" delay="0">
+                  <p:tgtEl>
+                    <p:sldTgt/>
+                  </p:tgtEl>
+                </p:cond>
+              </p:prevCondLst>
+              <p:nextCondLst>
+                <p:cond evt="onNext" delay="0">
+                  <p:tgtEl>
+                    <p:sldTgt/>
+                  </p:tgtEl>
+                </p:cond>
+              </p:nextCondLst>
+            </p:seq>
+          </p:childTnLst>
+        </p:cTn>
+      </p:par>
+    </p:tnLst>
+  </p:timing>
 </p:sld>
 </file>
 
@@ -33570,7 +37729,7 @@
                 </a:solidFill>
                 <a:latin typeface="Roboto"/>
               </a:rPr>
-              <a:t>The grade lands in the gradebook and the work shows in SpeedGrader</a:t>
+              <a:t>The grade lands in the gradebook and the teacher gets a custom view in SpeedGrader</a:t>
             </a:r>
           </a:p>
         </p:txBody>
@@ -33580,6 +37739,370 @@
   <p:clrMapOvr>
     <a:masterClrMapping/>
   </p:clrMapOvr>
+  <p:timing>
+    <p:tnLst>
+      <p:par>
+        <p:cTn id="1" dur="indefinite" restart="never" nodeType="tmRoot">
+          <p:childTnLst>
+            <p:seq concurrent="1" nextAc="seek">
+              <p:cTn id="2" dur="indefinite" nodeType="mainSeq">
+                <p:childTnLst>
+                  <p:par>
+                    <p:cTn id="9" fill="hold">
+                      <p:stCondLst>
+                        <p:cond delay="indefinite"/>
+                      </p:stCondLst>
+                      <p:childTnLst>
+                        <p:par>
+                          <p:cTn id="10" fill="hold">
+                            <p:stCondLst>
+                              <p:cond delay="0"/>
+                            </p:stCondLst>
+                            <p:childTnLst>
+                              <p:par>
+                                <p:cTn id="3" presetID="10" presetClass="entr" presetSubtype="0" fill="hold" nodeType="clickEffect">
+                                  <p:stCondLst>
+                                    <p:cond delay="0"/>
+                                  </p:stCondLst>
+                                  <p:childTnLst>
+                                    <p:set>
+                                      <p:cBhvr>
+                                        <p:cTn id="4" dur="1" fill="hold">
+                                          <p:stCondLst>
+                                            <p:cond delay="0"/>
+                                          </p:stCondLst>
+                                        </p:cTn>
+                                        <p:tgtEl>
+                                          <p:spTgt spid="434"/>
+                                        </p:tgtEl>
+                                        <p:attrNameLst>
+                                          <p:attrName>style.visibility</p:attrName>
+                                        </p:attrNameLst>
+                                      </p:cBhvr>
+                                      <p:to>
+                                        <p:strVal val="visible"/>
+                                      </p:to>
+                                    </p:set>
+                                    <p:animEffect transition="in" filter="fade">
+                                      <p:cBhvr>
+                                        <p:cTn id="5" dur="500"/>
+                                        <p:tgtEl>
+                                          <p:spTgt spid="434"/>
+                                        </p:tgtEl>
+                                      </p:cBhvr>
+                                    </p:animEffect>
+                                  </p:childTnLst>
+                                </p:cTn>
+                              </p:par>
+                              <p:par>
+                                <p:cTn id="6" presetID="10" presetClass="entr" presetSubtype="0" fill="hold" nodeType="withEffect">
+                                  <p:stCondLst>
+                                    <p:cond delay="0"/>
+                                  </p:stCondLst>
+                                  <p:childTnLst>
+                                    <p:set>
+                                      <p:cBhvr>
+                                        <p:cTn id="7" dur="1" fill="hold">
+                                          <p:stCondLst>
+                                            <p:cond delay="0"/>
+                                          </p:stCondLst>
+                                        </p:cTn>
+                                        <p:tgtEl>
+                                          <p:spTgt spid="457"/>
+                                        </p:tgtEl>
+                                        <p:attrNameLst>
+                                          <p:attrName>style.visibility</p:attrName>
+                                        </p:attrNameLst>
+                                      </p:cBhvr>
+                                      <p:to>
+                                        <p:strVal val="visible"/>
+                                      </p:to>
+                                    </p:set>
+                                    <p:animEffect transition="in" filter="fade">
+                                      <p:cBhvr>
+                                        <p:cTn id="8" dur="500"/>
+                                        <p:tgtEl>
+                                          <p:spTgt spid="457"/>
+                                        </p:tgtEl>
+                                      </p:cBhvr>
+                                    </p:animEffect>
+                                  </p:childTnLst>
+                                </p:cTn>
+                              </p:par>
+                            </p:childTnLst>
+                          </p:cTn>
+                        </p:par>
+                      </p:childTnLst>
+                    </p:cTn>
+                  </p:par>
+                  <p:par>
+                    <p:cTn id="20" fill="hold">
+                      <p:stCondLst>
+                        <p:cond delay="indefinite"/>
+                      </p:stCondLst>
+                      <p:childTnLst>
+                        <p:par>
+                          <p:cTn id="21" fill="hold">
+                            <p:stCondLst>
+                              <p:cond delay="0"/>
+                            </p:stCondLst>
+                            <p:childTnLst>
+                              <p:par>
+                                <p:cTn id="11" presetID="10" presetClass="entr" presetSubtype="0" fill="hold" nodeType="clickEffect">
+                                  <p:stCondLst>
+                                    <p:cond delay="0"/>
+                                  </p:stCondLst>
+                                  <p:childTnLst>
+                                    <p:set>
+                                      <p:cBhvr>
+                                        <p:cTn id="12" dur="1" fill="hold">
+                                          <p:stCondLst>
+                                            <p:cond delay="0"/>
+                                          </p:stCondLst>
+                                        </p:cTn>
+                                        <p:tgtEl>
+                                          <p:spTgt spid="436"/>
+                                        </p:tgtEl>
+                                        <p:attrNameLst>
+                                          <p:attrName>style.visibility</p:attrName>
+                                        </p:attrNameLst>
+                                      </p:cBhvr>
+                                      <p:to>
+                                        <p:strVal val="visible"/>
+                                      </p:to>
+                                    </p:set>
+                                    <p:animEffect transition="in" filter="fade">
+                                      <p:cBhvr>
+                                        <p:cTn id="13" dur="500"/>
+                                        <p:tgtEl>
+                                          <p:spTgt spid="436"/>
+                                        </p:tgtEl>
+                                      </p:cBhvr>
+                                    </p:animEffect>
+                                  </p:childTnLst>
+                                </p:cTn>
+                              </p:par>
+                              <p:par>
+                                <p:cTn id="14" presetID="10" presetClass="entr" presetSubtype="0" fill="hold" nodeType="withEffect">
+                                  <p:stCondLst>
+                                    <p:cond delay="0"/>
+                                  </p:stCondLst>
+                                  <p:childTnLst>
+                                    <p:set>
+                                      <p:cBhvr>
+                                        <p:cTn id="15" dur="1" fill="hold">
+                                          <p:stCondLst>
+                                            <p:cond delay="0"/>
+                                          </p:stCondLst>
+                                        </p:cTn>
+                                        <p:tgtEl>
+                                          <p:spTgt spid="458"/>
+                                        </p:tgtEl>
+                                        <p:attrNameLst>
+                                          <p:attrName>style.visibility</p:attrName>
+                                        </p:attrNameLst>
+                                      </p:cBhvr>
+                                      <p:to>
+                                        <p:strVal val="visible"/>
+                                      </p:to>
+                                    </p:set>
+                                    <p:animEffect transition="in" filter="fade">
+                                      <p:cBhvr>
+                                        <p:cTn id="16" dur="500"/>
+                                        <p:tgtEl>
+                                          <p:spTgt spid="458"/>
+                                        </p:tgtEl>
+                                      </p:cBhvr>
+                                    </p:animEffect>
+                                  </p:childTnLst>
+                                </p:cTn>
+                              </p:par>
+                              <p:par>
+                                <p:cTn id="17" presetID="10" presetClass="entr" presetSubtype="0" fill="hold" nodeType="withEffect">
+                                  <p:stCondLst>
+                                    <p:cond delay="0"/>
+                                  </p:stCondLst>
+                                  <p:childTnLst>
+                                    <p:set>
+                                      <p:cBhvr>
+                                        <p:cTn id="18" dur="1" fill="hold">
+                                          <p:stCondLst>
+                                            <p:cond delay="0"/>
+                                          </p:stCondLst>
+                                        </p:cTn>
+                                        <p:tgtEl>
+                                          <p:spTgt spid="451"/>
+                                        </p:tgtEl>
+                                        <p:attrNameLst>
+                                          <p:attrName>style.visibility</p:attrName>
+                                        </p:attrNameLst>
+                                      </p:cBhvr>
+                                      <p:to>
+                                        <p:strVal val="visible"/>
+                                      </p:to>
+                                    </p:set>
+                                    <p:animEffect transition="in" filter="fade">
+                                      <p:cBhvr>
+                                        <p:cTn id="19" dur="500"/>
+                                        <p:tgtEl>
+                                          <p:spTgt spid="451"/>
+                                        </p:tgtEl>
+                                      </p:cBhvr>
+                                    </p:animEffect>
+                                  </p:childTnLst>
+                                </p:cTn>
+                              </p:par>
+                            </p:childTnLst>
+                          </p:cTn>
+                        </p:par>
+                      </p:childTnLst>
+                    </p:cTn>
+                  </p:par>
+                  <p:par>
+                    <p:cTn id="31" fill="hold">
+                      <p:stCondLst>
+                        <p:cond delay="indefinite"/>
+                      </p:stCondLst>
+                      <p:childTnLst>
+                        <p:par>
+                          <p:cTn id="32" fill="hold">
+                            <p:stCondLst>
+                              <p:cond delay="0"/>
+                            </p:stCondLst>
+                            <p:childTnLst>
+                              <p:par>
+                                <p:cTn id="22" presetID="10" presetClass="entr" presetSubtype="0" fill="hold" nodeType="clickEffect">
+                                  <p:stCondLst>
+                                    <p:cond delay="0"/>
+                                  </p:stCondLst>
+                                  <p:childTnLst>
+                                    <p:set>
+                                      <p:cBhvr>
+                                        <p:cTn id="23" dur="1" fill="hold">
+                                          <p:stCondLst>
+                                            <p:cond delay="0"/>
+                                          </p:stCondLst>
+                                        </p:cTn>
+                                        <p:tgtEl>
+                                          <p:spTgt spid="438"/>
+                                        </p:tgtEl>
+                                        <p:attrNameLst>
+                                          <p:attrName>style.visibility</p:attrName>
+                                        </p:attrNameLst>
+                                      </p:cBhvr>
+                                      <p:to>
+                                        <p:strVal val="visible"/>
+                                      </p:to>
+                                    </p:set>
+                                    <p:animEffect transition="in" filter="fade">
+                                      <p:cBhvr>
+                                        <p:cTn id="24" dur="500"/>
+                                        <p:tgtEl>
+                                          <p:spTgt spid="438"/>
+                                        </p:tgtEl>
+                                      </p:cBhvr>
+                                    </p:animEffect>
+                                  </p:childTnLst>
+                                </p:cTn>
+                              </p:par>
+                              <p:par>
+                                <p:cTn id="25" presetID="10" presetClass="entr" presetSubtype="0" fill="hold" nodeType="withEffect">
+                                  <p:stCondLst>
+                                    <p:cond delay="0"/>
+                                  </p:stCondLst>
+                                  <p:childTnLst>
+                                    <p:set>
+                                      <p:cBhvr>
+                                        <p:cTn id="26" dur="1" fill="hold">
+                                          <p:stCondLst>
+                                            <p:cond delay="0"/>
+                                          </p:stCondLst>
+                                        </p:cTn>
+                                        <p:tgtEl>
+                                          <p:spTgt spid="459"/>
+                                        </p:tgtEl>
+                                        <p:attrNameLst>
+                                          <p:attrName>style.visibility</p:attrName>
+                                        </p:attrNameLst>
+                                      </p:cBhvr>
+                                      <p:to>
+                                        <p:strVal val="visible"/>
+                                      </p:to>
+                                    </p:set>
+                                    <p:animEffect transition="in" filter="fade">
+                                      <p:cBhvr>
+                                        <p:cTn id="27" dur="500"/>
+                                        <p:tgtEl>
+                                          <p:spTgt spid="459"/>
+                                        </p:tgtEl>
+                                      </p:cBhvr>
+                                    </p:animEffect>
+                                  </p:childTnLst>
+                                </p:cTn>
+                              </p:par>
+                              <p:par>
+                                <p:cTn id="28" presetID="10" presetClass="entr" presetSubtype="0" fill="hold" nodeType="withEffect">
+                                  <p:stCondLst>
+                                    <p:cond delay="0"/>
+                                  </p:stCondLst>
+                                  <p:childTnLst>
+                                    <p:set>
+                                      <p:cBhvr>
+                                        <p:cTn id="29" dur="1" fill="hold">
+                                          <p:stCondLst>
+                                            <p:cond delay="0"/>
+                                          </p:stCondLst>
+                                        </p:cTn>
+                                        <p:tgtEl>
+                                          <p:spTgt spid="448"/>
+                                        </p:tgtEl>
+                                        <p:attrNameLst>
+                                          <p:attrName>style.visibility</p:attrName>
+                                        </p:attrNameLst>
+                                      </p:cBhvr>
+                                      <p:to>
+                                        <p:strVal val="visible"/>
+                                      </p:to>
+                                    </p:set>
+                                    <p:animEffect transition="in" filter="fade">
+                                      <p:cBhvr>
+                                        <p:cTn id="30" dur="500"/>
+                                        <p:tgtEl>
+                                          <p:spTgt spid="448"/>
+                                        </p:tgtEl>
+                                      </p:cBhvr>
+                                    </p:animEffect>
+                                  </p:childTnLst>
+                                </p:cTn>
+                              </p:par>
+                            </p:childTnLst>
+                          </p:cTn>
+                        </p:par>
+                      </p:childTnLst>
+                    </p:cTn>
+                  </p:par>
+                </p:childTnLst>
+              </p:cTn>
+              <p:prevCondLst>
+                <p:cond evt="onPrev" delay="0">
+                  <p:tgtEl>
+                    <p:sldTgt/>
+                  </p:tgtEl>
+                </p:cond>
+              </p:prevCondLst>
+              <p:nextCondLst>
+                <p:cond evt="onNext" delay="0">
+                  <p:tgtEl>
+                    <p:sldTgt/>
+                  </p:tgtEl>
+                </p:cond>
+              </p:nextCondLst>
+            </p:seq>
+          </p:childTnLst>
+        </p:cTn>
+      </p:par>
+    </p:tnLst>
+  </p:timing>
 </p:sld>
 </file>
 
@@ -34728,6 +39251,405 @@
   <p:clrMapOvr>
     <a:masterClrMapping/>
   </p:clrMapOvr>
+  <p:timing>
+    <p:tnLst>
+      <p:par>
+        <p:cTn id="1" dur="indefinite" restart="never" nodeType="tmRoot">
+          <p:childTnLst>
+            <p:seq concurrent="1" nextAc="seek">
+              <p:cTn id="2" dur="indefinite" nodeType="mainSeq">
+                <p:childTnLst>
+                  <p:par>
+                    <p:cTn id="12" fill="hold">
+                      <p:stCondLst>
+                        <p:cond delay="indefinite"/>
+                      </p:stCondLst>
+                      <p:childTnLst>
+                        <p:par>
+                          <p:cTn id="13" fill="hold">
+                            <p:stCondLst>
+                              <p:cond delay="0"/>
+                            </p:stCondLst>
+                            <p:childTnLst>
+                              <p:par>
+                                <p:cTn id="3" presetID="10" presetClass="entr" presetSubtype="0" fill="hold" nodeType="clickEffect">
+                                  <p:stCondLst>
+                                    <p:cond delay="0"/>
+                                  </p:stCondLst>
+                                  <p:childTnLst>
+                                    <p:set>
+                                      <p:cBhvr>
+                                        <p:cTn id="4" dur="1" fill="hold">
+                                          <p:stCondLst>
+                                            <p:cond delay="0"/>
+                                          </p:stCondLst>
+                                        </p:cTn>
+                                        <p:tgtEl>
+                                          <p:spTgt spid="259"/>
+                                        </p:tgtEl>
+                                        <p:attrNameLst>
+                                          <p:attrName>style.visibility</p:attrName>
+                                        </p:attrNameLst>
+                                      </p:cBhvr>
+                                      <p:to>
+                                        <p:strVal val="visible"/>
+                                      </p:to>
+                                    </p:set>
+                                    <p:animEffect transition="in" filter="fade">
+                                      <p:cBhvr>
+                                        <p:cTn id="5" dur="500"/>
+                                        <p:tgtEl>
+                                          <p:spTgt spid="259"/>
+                                        </p:tgtEl>
+                                      </p:cBhvr>
+                                    </p:animEffect>
+                                  </p:childTnLst>
+                                </p:cTn>
+                              </p:par>
+                              <p:par>
+                                <p:cTn id="6" presetID="10" presetClass="entr" presetSubtype="0" fill="hold" nodeType="withEffect">
+                                  <p:stCondLst>
+                                    <p:cond delay="0"/>
+                                  </p:stCondLst>
+                                  <p:childTnLst>
+                                    <p:set>
+                                      <p:cBhvr>
+                                        <p:cTn id="7" dur="1" fill="hold">
+                                          <p:stCondLst>
+                                            <p:cond delay="0"/>
+                                          </p:stCondLst>
+                                        </p:cTn>
+                                        <p:tgtEl>
+                                          <p:spTgt spid="282"/>
+                                        </p:tgtEl>
+                                        <p:attrNameLst>
+                                          <p:attrName>style.visibility</p:attrName>
+                                        </p:attrNameLst>
+                                      </p:cBhvr>
+                                      <p:to>
+                                        <p:strVal val="visible"/>
+                                      </p:to>
+                                    </p:set>
+                                    <p:animEffect transition="in" filter="fade">
+                                      <p:cBhvr>
+                                        <p:cTn id="8" dur="500"/>
+                                        <p:tgtEl>
+                                          <p:spTgt spid="282"/>
+                                        </p:tgtEl>
+                                      </p:cBhvr>
+                                    </p:animEffect>
+                                  </p:childTnLst>
+                                </p:cTn>
+                              </p:par>
+                              <p:par>
+                                <p:cTn id="9" presetID="10" presetClass="entr" presetSubtype="0" fill="hold" nodeType="withEffect">
+                                  <p:stCondLst>
+                                    <p:cond delay="0"/>
+                                  </p:stCondLst>
+                                  <p:childTnLst>
+                                    <p:set>
+                                      <p:cBhvr>
+                                        <p:cTn id="10" dur="1" fill="hold">
+                                          <p:stCondLst>
+                                            <p:cond delay="0"/>
+                                          </p:stCondLst>
+                                        </p:cTn>
+                                        <p:tgtEl>
+                                          <p:spTgt spid="283"/>
+                                        </p:tgtEl>
+                                        <p:attrNameLst>
+                                          <p:attrName>style.visibility</p:attrName>
+                                        </p:attrNameLst>
+                                      </p:cBhvr>
+                                      <p:to>
+                                        <p:strVal val="visible"/>
+                                      </p:to>
+                                    </p:set>
+                                    <p:animEffect transition="in" filter="fade">
+                                      <p:cBhvr>
+                                        <p:cTn id="11" dur="500"/>
+                                        <p:tgtEl>
+                                          <p:spTgt spid="283"/>
+                                        </p:tgtEl>
+                                      </p:cBhvr>
+                                    </p:animEffect>
+                                  </p:childTnLst>
+                                </p:cTn>
+                              </p:par>
+                            </p:childTnLst>
+                          </p:cTn>
+                        </p:par>
+                      </p:childTnLst>
+                    </p:cTn>
+                  </p:par>
+                  <p:par>
+                    <p:cTn id="23" fill="hold">
+                      <p:stCondLst>
+                        <p:cond delay="indefinite"/>
+                      </p:stCondLst>
+                      <p:childTnLst>
+                        <p:par>
+                          <p:cTn id="24" fill="hold">
+                            <p:stCondLst>
+                              <p:cond delay="0"/>
+                            </p:stCondLst>
+                            <p:childTnLst>
+                              <p:par>
+                                <p:cTn id="14" presetID="10" presetClass="entr" presetSubtype="0" fill="hold" nodeType="clickEffect">
+                                  <p:stCondLst>
+                                    <p:cond delay="0"/>
+                                  </p:stCondLst>
+                                  <p:childTnLst>
+                                    <p:set>
+                                      <p:cBhvr>
+                                        <p:cTn id="15" dur="1" fill="hold">
+                                          <p:stCondLst>
+                                            <p:cond delay="0"/>
+                                          </p:stCondLst>
+                                        </p:cTn>
+                                        <p:tgtEl>
+                                          <p:spTgt spid="264"/>
+                                        </p:tgtEl>
+                                        <p:attrNameLst>
+                                          <p:attrName>style.visibility</p:attrName>
+                                        </p:attrNameLst>
+                                      </p:cBhvr>
+                                      <p:to>
+                                        <p:strVal val="visible"/>
+                                      </p:to>
+                                    </p:set>
+                                    <p:animEffect transition="in" filter="fade">
+                                      <p:cBhvr>
+                                        <p:cTn id="16" dur="500"/>
+                                        <p:tgtEl>
+                                          <p:spTgt spid="264"/>
+                                        </p:tgtEl>
+                                      </p:cBhvr>
+                                    </p:animEffect>
+                                  </p:childTnLst>
+                                </p:cTn>
+                              </p:par>
+                              <p:par>
+                                <p:cTn id="17" presetID="10" presetClass="entr" presetSubtype="0" fill="hold" nodeType="withEffect">
+                                  <p:stCondLst>
+                                    <p:cond delay="0"/>
+                                  </p:stCondLst>
+                                  <p:childTnLst>
+                                    <p:set>
+                                      <p:cBhvr>
+                                        <p:cTn id="18" dur="1" fill="hold">
+                                          <p:stCondLst>
+                                            <p:cond delay="0"/>
+                                          </p:stCondLst>
+                                        </p:cTn>
+                                        <p:tgtEl>
+                                          <p:spTgt spid="284"/>
+                                        </p:tgtEl>
+                                        <p:attrNameLst>
+                                          <p:attrName>style.visibility</p:attrName>
+                                        </p:attrNameLst>
+                                      </p:cBhvr>
+                                      <p:to>
+                                        <p:strVal val="visible"/>
+                                      </p:to>
+                                    </p:set>
+                                    <p:animEffect transition="in" filter="fade">
+                                      <p:cBhvr>
+                                        <p:cTn id="19" dur="500"/>
+                                        <p:tgtEl>
+                                          <p:spTgt spid="284"/>
+                                        </p:tgtEl>
+                                      </p:cBhvr>
+                                    </p:animEffect>
+                                  </p:childTnLst>
+                                </p:cTn>
+                              </p:par>
+                              <p:par>
+                                <p:cTn id="20" presetID="10" presetClass="entr" presetSubtype="0" fill="hold" nodeType="withEffect">
+                                  <p:stCondLst>
+                                    <p:cond delay="0"/>
+                                  </p:stCondLst>
+                                  <p:childTnLst>
+                                    <p:set>
+                                      <p:cBhvr>
+                                        <p:cTn id="21" dur="1" fill="hold">
+                                          <p:stCondLst>
+                                            <p:cond delay="0"/>
+                                          </p:stCondLst>
+                                        </p:cTn>
+                                        <p:tgtEl>
+                                          <p:spTgt spid="285"/>
+                                        </p:tgtEl>
+                                        <p:attrNameLst>
+                                          <p:attrName>style.visibility</p:attrName>
+                                        </p:attrNameLst>
+                                      </p:cBhvr>
+                                      <p:to>
+                                        <p:strVal val="visible"/>
+                                      </p:to>
+                                    </p:set>
+                                    <p:animEffect transition="in" filter="fade">
+                                      <p:cBhvr>
+                                        <p:cTn id="22" dur="500"/>
+                                        <p:tgtEl>
+                                          <p:spTgt spid="285"/>
+                                        </p:tgtEl>
+                                      </p:cBhvr>
+                                    </p:animEffect>
+                                  </p:childTnLst>
+                                </p:cTn>
+                              </p:par>
+                            </p:childTnLst>
+                          </p:cTn>
+                        </p:par>
+                      </p:childTnLst>
+                    </p:cTn>
+                  </p:par>
+                  <p:par>
+                    <p:cTn id="34" fill="hold">
+                      <p:stCondLst>
+                        <p:cond delay="indefinite"/>
+                      </p:stCondLst>
+                      <p:childTnLst>
+                        <p:par>
+                          <p:cTn id="35" fill="hold">
+                            <p:stCondLst>
+                              <p:cond delay="0"/>
+                            </p:stCondLst>
+                            <p:childTnLst>
+                              <p:par>
+                                <p:cTn id="25" presetID="10" presetClass="entr" presetSubtype="0" fill="hold" nodeType="clickEffect">
+                                  <p:stCondLst>
+                                    <p:cond delay="0"/>
+                                  </p:stCondLst>
+                                  <p:childTnLst>
+                                    <p:set>
+                                      <p:cBhvr>
+                                        <p:cTn id="26" dur="1" fill="hold">
+                                          <p:stCondLst>
+                                            <p:cond delay="0"/>
+                                          </p:stCondLst>
+                                        </p:cTn>
+                                        <p:tgtEl>
+                                          <p:spTgt spid="268"/>
+                                        </p:tgtEl>
+                                        <p:attrNameLst>
+                                          <p:attrName>style.visibility</p:attrName>
+                                        </p:attrNameLst>
+                                      </p:cBhvr>
+                                      <p:to>
+                                        <p:strVal val="visible"/>
+                                      </p:to>
+                                    </p:set>
+                                    <p:animEffect transition="in" filter="fade">
+                                      <p:cBhvr>
+                                        <p:cTn id="27" dur="500"/>
+                                        <p:tgtEl>
+                                          <p:spTgt spid="268"/>
+                                        </p:tgtEl>
+                                      </p:cBhvr>
+                                    </p:animEffect>
+                                  </p:childTnLst>
+                                </p:cTn>
+                              </p:par>
+                              <p:par>
+                                <p:cTn id="28" presetID="10" presetClass="entr" presetSubtype="0" fill="hold" nodeType="withEffect">
+                                  <p:stCondLst>
+                                    <p:cond delay="0"/>
+                                  </p:stCondLst>
+                                  <p:childTnLst>
+                                    <p:set>
+                                      <p:cBhvr>
+                                        <p:cTn id="29" dur="1" fill="hold">
+                                          <p:stCondLst>
+                                            <p:cond delay="0"/>
+                                          </p:stCondLst>
+                                        </p:cTn>
+                                        <p:tgtEl>
+                                          <p:spTgt spid="286"/>
+                                        </p:tgtEl>
+                                        <p:attrNameLst>
+                                          <p:attrName>style.visibility</p:attrName>
+                                        </p:attrNameLst>
+                                      </p:cBhvr>
+                                      <p:to>
+                                        <p:strVal val="visible"/>
+                                      </p:to>
+                                    </p:set>
+                                    <p:animEffect transition="in" filter="fade">
+                                      <p:cBhvr>
+                                        <p:cTn id="30" dur="500"/>
+                                        <p:tgtEl>
+                                          <p:spTgt spid="286"/>
+                                        </p:tgtEl>
+                                      </p:cBhvr>
+                                    </p:animEffect>
+                                  </p:childTnLst>
+                                </p:cTn>
+                              </p:par>
+                              <p:par>
+                                <p:cTn id="31" presetID="10" presetClass="entr" presetSubtype="0" fill="hold" nodeType="withEffect">
+                                  <p:stCondLst>
+                                    <p:cond delay="0"/>
+                                  </p:stCondLst>
+                                  <p:childTnLst>
+                                    <p:set>
+                                      <p:cBhvr>
+                                        <p:cTn id="32" dur="1" fill="hold">
+                                          <p:stCondLst>
+                                            <p:cond delay="0"/>
+                                          </p:stCondLst>
+                                        </p:cTn>
+                                        <p:tgtEl>
+                                          <p:spTgt spid="287"/>
+                                        </p:tgtEl>
+                                        <p:attrNameLst>
+                                          <p:attrName>style.visibility</p:attrName>
+                                        </p:attrNameLst>
+                                      </p:cBhvr>
+                                      <p:to>
+                                        <p:strVal val="visible"/>
+                                      </p:to>
+                                    </p:set>
+                                    <p:animEffect transition="in" filter="fade">
+                                      <p:cBhvr>
+                                        <p:cTn id="33" dur="500"/>
+                                        <p:tgtEl>
+                                          <p:spTgt spid="287"/>
+                                        </p:tgtEl>
+                                      </p:cBhvr>
+                                    </p:animEffect>
+                                  </p:childTnLst>
+                                </p:cTn>
+                              </p:par>
+                            </p:childTnLst>
+                          </p:cTn>
+                        </p:par>
+                      </p:childTnLst>
+                    </p:cTn>
+                  </p:par>
+                </p:childTnLst>
+              </p:cTn>
+              <p:prevCondLst>
+                <p:cond evt="onPrev" delay="0">
+                  <p:tgtEl>
+                    <p:sldTgt/>
+                  </p:tgtEl>
+                </p:cond>
+              </p:prevCondLst>
+              <p:nextCondLst>
+                <p:cond evt="onNext" delay="0">
+                  <p:tgtEl>
+                    <p:sldTgt/>
+                  </p:tgtEl>
+                </p:cond>
+              </p:nextCondLst>
+            </p:seq>
+          </p:childTnLst>
+        </p:cTn>
+      </p:par>
+    </p:tnLst>
+  </p:timing>
 </p:sld>
 </file>
 
@@ -35187,7 +40109,7 @@
                 </a:solidFill>
                 <a:latin typeface="Roboto"/>
               </a:rPr>
-              <a:t>Opens SpeedGrader and sees what the student typed</a:t>
+              <a:t>Opens SpeedGrader and sees the keyboarding review, not a file</a:t>
             </a:r>
           </a:p>
           <a:p>

--- a/presentations/2026-vlla/deck/zest-vlla-2026.pptx
+++ b/presentations/2026-vlla/deck/zest-vlla-2026.pptx
@@ -1903,7 +1903,7 @@
           <a:p/>
           <a:p>
             <a:r>
-              <a:t>[FORM URL PLACEHOLDER: replace the QR box with the real QR code.]</a:t>
+              <a:t>(The QR code and forms.gle/1BDJ6hXbWxbZRopP8 both go to the Get the Zest Code form. Responses land in the Get the Zest Code (Responses) sheet in your Drive.)</a:t>
             </a:r>
           </a:p>
         </p:txBody>
@@ -33621,65 +33621,72 @@
           </a:p>
         </p:txBody>
       </p:sp>
+      <p:pic>
+        <p:nvPicPr>
+          <p:cNvPr id="319" name="Picture 318" descr="form-qr.png"/>
+          <p:cNvPicPr>
+            <a:picLocks noChangeAspect="1"/>
+          </p:cNvPicPr>
+          <p:nvPr/>
+        </p:nvPicPr>
+        <p:blipFill>
+          <a:blip r:embed="rId2"/>
+          <a:stretch>
+            <a:fillRect/>
+          </a:stretch>
+        </p:blipFill>
+        <p:spPr>
+          <a:xfrm>
+            <a:off x="864107" y="868679"/>
+            <a:ext cx="3108960" cy="3108960"/>
+          </a:xfrm>
+          <a:prstGeom prst="rect">
+            <a:avLst/>
+          </a:prstGeom>
+        </p:spPr>
+      </p:pic>
       <p:sp>
         <p:nvSpPr>
-          <p:cNvPr id="319" name="Rounded Rectangle 318"/>
-          <p:cNvSpPr/>
+          <p:cNvPr id="320" name="TextBox 319"/>
+          <p:cNvSpPr txBox="1"/>
           <p:nvPr/>
         </p:nvSpPr>
         <p:spPr>
           <a:xfrm>
-            <a:off x="960120" y="1097280"/>
-            <a:ext cx="2926080" cy="2926080"/>
-          </a:xfrm>
-          <a:prstGeom prst="roundRect">
+            <a:off x="512064" y="4069080"/>
+            <a:ext cx="3813048" cy="365760"/>
+          </a:xfrm>
+          <a:prstGeom prst="rect">
             <a:avLst/>
           </a:prstGeom>
-          <a:solidFill>
-            <a:srgbClr val="FFFFFF"/>
-          </a:solidFill>
-          <a:ln w="19050">
-            <a:solidFill>
-              <a:srgbClr val="960000"/>
-            </a:solidFill>
-          </a:ln>
-          <a:effectLst/>
+          <a:noFill/>
         </p:spPr>
-        <p:style>
-          <a:lnRef idx="1">
-            <a:schemeClr val="accent1"/>
-          </a:lnRef>
-          <a:fillRef idx="3">
-            <a:schemeClr val="accent1"/>
-          </a:fillRef>
-          <a:effectRef idx="2">
-            <a:schemeClr val="accent1"/>
-          </a:effectRef>
-          <a:fontRef idx="minor">
-            <a:schemeClr val="lt1"/>
-          </a:fontRef>
-        </p:style>
         <p:txBody>
-          <a:bodyPr rtlCol="0" anchor="ctr" wrap="square"/>
+          <a:bodyPr wrap="square" anchor="t" lIns="0" rIns="0" tIns="0" bIns="0">
+            <a:spAutoFit/>
+          </a:bodyPr>
           <a:lstStyle/>
           <a:p>
-            <a:pPr algn="ctr"/>
+            <a:pPr algn="ctr">
+              <a:spcAft>
+                <a:spcPts val="600"/>
+              </a:spcAft>
+            </a:pPr>
             <a:r>
-              <a:rPr sz="1100" b="1">
+              <a:rPr sz="1200" b="1" i="0">
                 <a:solidFill>
-                  <a:srgbClr val="960000"/>
+                  <a:srgbClr val="1B3168"/>
                 </a:solidFill>
                 <a:latin typeface="Roboto"/>
               </a:rPr>
-              <a:t>QR code for the Google Form
-[FORM URL PLACEHOLDER]</a:t>
+              <a:t>forms.gle/1BDJ6hXbWxbZRopP8</a:t>
             </a:r>
           </a:p>
         </p:txBody>
       </p:sp>
       <p:sp>
         <p:nvSpPr>
-          <p:cNvPr id="320" name="TextBox 319"/>
+          <p:cNvPr id="321" name="TextBox 320"/>
           <p:cNvSpPr txBox="1"/>
           <p:nvPr/>
         </p:nvSpPr>
@@ -33718,7 +33725,7 @@
       </p:sp>
       <p:sp>
         <p:nvSpPr>
-          <p:cNvPr id="321" name="TextBox 320"/>
+          <p:cNvPr id="322" name="TextBox 321"/>
           <p:cNvSpPr txBox="1"/>
           <p:nvPr/>
         </p:nvSpPr>
@@ -33766,7 +33773,7 @@
                 </a:solidFill>
                 <a:latin typeface="Roboto"/>
               </a:rPr>
-              <a:t>[short link]</a:t>
+              <a:t>forms.gle/1BDJ6hXbWxbZRopP8</a:t>
             </a:r>
           </a:p>
           <a:p>
@@ -33821,7 +33828,7 @@
       </p:sp>
       <p:sp>
         <p:nvSpPr>
-          <p:cNvPr id="322" name="TextBox 321"/>
+          <p:cNvPr id="323" name="TextBox 322"/>
           <p:cNvSpPr txBox="1"/>
           <p:nvPr/>
         </p:nvSpPr>
@@ -34208,65 +34215,72 @@
           </a:ln>
         </p:spPr>
       </p:pic>
+      <p:pic>
+        <p:nvPicPr>
+          <p:cNvPr id="206" name="Picture 205" descr="form-qr.png"/>
+          <p:cNvPicPr>
+            <a:picLocks noChangeAspect="1"/>
+          </p:cNvPicPr>
+          <p:nvPr/>
+        </p:nvPicPr>
+        <p:blipFill>
+          <a:blip r:embed="rId2"/>
+          <a:stretch>
+            <a:fillRect/>
+          </a:stretch>
+        </p:blipFill>
+        <p:spPr>
+          <a:xfrm>
+            <a:off x="1211579" y="868679"/>
+            <a:ext cx="3108960" cy="3108960"/>
+          </a:xfrm>
+          <a:prstGeom prst="rect">
+            <a:avLst/>
+          </a:prstGeom>
+        </p:spPr>
+      </p:pic>
       <p:sp>
         <p:nvSpPr>
-          <p:cNvPr id="206" name="Rounded Rectangle 205"/>
-          <p:cNvSpPr/>
+          <p:cNvPr id="207" name="TextBox 206"/>
+          <p:cNvSpPr txBox="1"/>
           <p:nvPr/>
         </p:nvSpPr>
         <p:spPr>
           <a:xfrm>
-            <a:off x="1280160" y="1097280"/>
-            <a:ext cx="2926080" cy="2926080"/>
-          </a:xfrm>
-          <a:prstGeom prst="roundRect">
+            <a:off x="530352" y="4069080"/>
+            <a:ext cx="4471416" cy="365760"/>
+          </a:xfrm>
+          <a:prstGeom prst="rect">
             <a:avLst/>
           </a:prstGeom>
-          <a:solidFill>
-            <a:srgbClr val="FFFFFF"/>
-          </a:solidFill>
-          <a:ln w="19050">
-            <a:solidFill>
-              <a:srgbClr val="960000"/>
-            </a:solidFill>
-          </a:ln>
-          <a:effectLst/>
+          <a:noFill/>
         </p:spPr>
-        <p:style>
-          <a:lnRef idx="1">
-            <a:schemeClr val="accent1"/>
-          </a:lnRef>
-          <a:fillRef idx="3">
-            <a:schemeClr val="accent1"/>
-          </a:fillRef>
-          <a:effectRef idx="2">
-            <a:schemeClr val="accent1"/>
-          </a:effectRef>
-          <a:fontRef idx="minor">
-            <a:schemeClr val="lt1"/>
-          </a:fontRef>
-        </p:style>
         <p:txBody>
-          <a:bodyPr rtlCol="0" anchor="ctr" wrap="square"/>
+          <a:bodyPr wrap="square" anchor="t" lIns="0" rIns="0" tIns="0" bIns="0">
+            <a:spAutoFit/>
+          </a:bodyPr>
           <a:lstStyle/>
           <a:p>
-            <a:pPr algn="ctr"/>
+            <a:pPr algn="ctr">
+              <a:spcAft>
+                <a:spcPts val="600"/>
+              </a:spcAft>
+            </a:pPr>
             <a:r>
-              <a:rPr sz="1100" b="1">
+              <a:rPr sz="1200" b="1" i="0">
                 <a:solidFill>
-                  <a:srgbClr val="960000"/>
+                  <a:srgbClr val="1B3168"/>
                 </a:solidFill>
                 <a:latin typeface="Roboto"/>
               </a:rPr>
-              <a:t>Same QR code
-[FORM URL PLACEHOLDER]</a:t>
+              <a:t>Get the code: forms.gle/1BDJ6hXbWxbZRopP8</a:t>
             </a:r>
           </a:p>
         </p:txBody>
       </p:sp>
       <p:sp>
         <p:nvSpPr>
-          <p:cNvPr id="207" name="TextBox 206"/>
+          <p:cNvPr id="208" name="TextBox 207"/>
           <p:cNvSpPr txBox="1"/>
           <p:nvPr/>
         </p:nvSpPr>
@@ -34305,7 +34319,7 @@
       </p:sp>
       <p:sp>
         <p:nvSpPr>
-          <p:cNvPr id="208" name="TextBox 207"/>
+          <p:cNvPr id="209" name="TextBox 208"/>
           <p:cNvSpPr txBox="1"/>
           <p:nvPr/>
         </p:nvSpPr>

--- a/presentations/2026-vlla/deck/zest-vlla-2026.pptx
+++ b/presentations/2026-vlla/deck/zest-vlla-2026.pptx
@@ -996,7 +996,7 @@
           <a:p/>
           <a:p>
             <a:r>
-              <a:t>So what else can you make? Every one of these came from a prompt, the same way you saw in the recording. They're on my sandbox. The next four slides have QR codes, so try them on your phone while I talk. On a phone they open in a preview mode, so nothing gets saved.</a:t>
+              <a:t>So what else can you make? Three of these are auto-graded and one, Sketch &amp; Label, is teacher-graded. Every one of these came from a prompt, the same way you saw in the recording. They're on my sandbox. The next four slides have QR codes, so try them on your phone while I talk. On a phone they open in a preview mode, so nothing gets saved.</a:t>
             </a:r>
           </a:p>
         </p:txBody>
@@ -1072,7 +1072,7 @@
           <a:p/>
           <a:p>
             <a:r>
-              <a:t>Students lock in a predicted angle, then take one scored launch. After that they can take practice shots. A lot of them discover that two different angles hit the same target, which is a nice conversation starter.</a:t>
+              <a:t>Students lock in a predicted angle, then take one scored launch. (For today there's a Start over button, which the teacher can turn off for a real graded check.) After that they can take practice shots. A lot of them discover that two different angles hit the same target, which is a nice conversation starter.</a:t>
             </a:r>
           </a:p>
           <a:p/>
@@ -1154,7 +1154,7 @@
           <a:p/>
           <a:p>
             <a:r>
-              <a:t>The part I want you to notice: the teacher picks the target functions on a settings page. The AI built that settings page too, from "I want to pick the target functions myself." One package, set up differently for each class.</a:t>
+              <a:t>The part I want you to notice: when the teacher embeds it, they pick a set of graphs (quadratics, absolute value, sine waves and so on), or open the settings editor and build their own list. The AI built that settings page too, from "I want to pick the target functions myself." One package, set up differently for each class. On your phone, the preview has the same choice at the top.</a:t>
             </a:r>
           </a:p>
           <a:p/>
@@ -24728,7 +24728,7 @@
           <a:p>
             <a:pPr algn="l">
               <a:spcAft>
-                <a:spcPts val="600"/>
+                <a:spcPts val="400"/>
               </a:spcAft>
             </a:pPr>
             <a:r>
@@ -24739,6 +24739,22 @@
                 <a:latin typeface="Roboto"/>
               </a:rPr>
               <a:t>Physics</a:t>
+            </a:r>
+          </a:p>
+          <a:p>
+            <a:pPr algn="l">
+              <a:spcAft>
+                <a:spcPts val="600"/>
+              </a:spcAft>
+            </a:pPr>
+            <a:r>
+              <a:rPr sz="1000" b="1" i="0">
+                <a:solidFill>
+                  <a:srgbClr val="1B3168"/>
+                </a:solidFill>
+                <a:latin typeface="Roboto"/>
+              </a:rPr>
+              <a:t>Auto-graded</a:t>
             </a:r>
           </a:p>
         </p:txBody>
@@ -24807,7 +24823,7 @@
           <a:p>
             <a:pPr algn="l">
               <a:spcAft>
-                <a:spcPts val="600"/>
+                <a:spcPts val="400"/>
               </a:spcAft>
             </a:pPr>
             <a:r>
@@ -24818,6 +24834,22 @@
                 <a:latin typeface="Roboto"/>
               </a:rPr>
               <a:t>Algebra 2</a:t>
+            </a:r>
+          </a:p>
+          <a:p>
+            <a:pPr algn="l">
+              <a:spcAft>
+                <a:spcPts val="600"/>
+              </a:spcAft>
+            </a:pPr>
+            <a:r>
+              <a:rPr sz="1000" b="1" i="0">
+                <a:solidFill>
+                  <a:srgbClr val="1B3168"/>
+                </a:solidFill>
+                <a:latin typeface="Roboto"/>
+              </a:rPr>
+              <a:t>Auto-graded</a:t>
             </a:r>
           </a:p>
         </p:txBody>
@@ -24886,7 +24918,7 @@
           <a:p>
             <a:pPr algn="l">
               <a:spcAft>
-                <a:spcPts val="600"/>
+                <a:spcPts val="400"/>
               </a:spcAft>
             </a:pPr>
             <a:r>
@@ -24897,6 +24929,22 @@
                 <a:latin typeface="Roboto"/>
               </a:rPr>
               <a:t>Life Science</a:t>
+            </a:r>
+          </a:p>
+          <a:p>
+            <a:pPr algn="l">
+              <a:spcAft>
+                <a:spcPts val="600"/>
+              </a:spcAft>
+            </a:pPr>
+            <a:r>
+              <a:rPr sz="1000" b="1" i="0">
+                <a:solidFill>
+                  <a:srgbClr val="960000"/>
+                </a:solidFill>
+                <a:latin typeface="Roboto"/>
+              </a:rPr>
+              <a:t>Teacher-graded</a:t>
             </a:r>
           </a:p>
         </p:txBody>
@@ -24965,7 +25013,7 @@
           <a:p>
             <a:pPr algn="l">
               <a:spcAft>
-                <a:spcPts val="600"/>
+                <a:spcPts val="400"/>
               </a:spcAft>
             </a:pPr>
             <a:r>
@@ -24976,6 +25024,22 @@
                 <a:latin typeface="Roboto"/>
               </a:rPr>
               <a:t>U.S. History</a:t>
+            </a:r>
+          </a:p>
+          <a:p>
+            <a:pPr algn="l">
+              <a:spcAft>
+                <a:spcPts val="600"/>
+              </a:spcAft>
+            </a:pPr>
+            <a:r>
+              <a:rPr sz="1000" b="1" i="0">
+                <a:solidFill>
+                  <a:srgbClr val="1B3168"/>
+                </a:solidFill>
+                <a:latin typeface="Roboto"/>
+              </a:rPr>
+              <a:t>Auto-graded</a:t>
             </a:r>
           </a:p>
         </p:txBody>
@@ -26309,7 +26373,7 @@
                 </a:solidFill>
                 <a:latin typeface="Roboto"/>
               </a:rPr>
-              <a:t>The AI also built the settings page where the teacher picks the targets.</a:t>
+              <a:t>Teachers pick a ready-made set of graphs, or build their own in a settings page the AI also built.</a:t>
             </a:r>
           </a:p>
         </p:txBody>

--- a/presentations/2026-vlla/deck/zest-vlla-2026.pptx
+++ b/presentations/2026-vlla/deck/zest-vlla-2026.pptx
@@ -13,8 +13,6 @@
     <p:sldId id="283" r:id="rId35"/>
     <p:sldId id="284" r:id="rId36"/>
     <p:sldId id="285" r:id="rId37"/>
-    <p:sldId id="286" r:id="rId38"/>
-    <p:sldId id="287" r:id="rId39"/>
     <p:sldId id="288" r:id="rId40"/>
     <p:sldId id="289" r:id="rId41"/>
     <p:sldId id="290" r:id="rId42"/>
@@ -26,7 +24,8 @@
     <p:sldId id="296" r:id="rId48"/>
     <p:sldId id="297" r:id="rId49"/>
     <p:sldId id="298" r:id="rId50"/>
-    <p:sldId id="299" r:id="rId51"/>
+    <p:sldId id="286" r:id="rId38"/>
+    <p:sldId id="287" r:id="rId39"/>
     <p:sldId id="300" r:id="rId52"/>
     <p:sldId id="301" r:id="rId53"/>
     <p:sldId id="302" r:id="rId54"/>
@@ -819,7 +818,7 @@
           <a:lstStyle/>
           <a:p>
             <a:r>
-              <a:t>TIME: 1:00 (clock 13:30)</a:t>
+              <a:t>TIME: 1:00 (clock 10:00)</a:t>
             </a:r>
           </a:p>
           <a:p/>
@@ -916,7 +915,7 @@
           <a:lstStyle/>
           <a:p>
             <a:r>
-              <a:t>TIME: 1:00 (clock 14:30)</a:t>
+              <a:t>TIME: 1:00 (clock 11:00)</a:t>
             </a:r>
           </a:p>
           <a:p/>
@@ -990,13 +989,13 @@
           <a:lstStyle/>
           <a:p>
             <a:r>
-              <a:t>TIME: 0:20 (clock 14:50)</a:t>
+              <a:t>TIME: 0:20 (clock 11:20)</a:t>
             </a:r>
           </a:p>
           <a:p/>
           <a:p>
             <a:r>
-              <a:t>So what else can you make? Three of these are auto-graded and one, Sketch &amp; Label, is teacher-graded. Every one of these came from a prompt, the same way you saw in the recording. They're on my sandbox. The next four slides have QR codes, so try them on your phone while I talk. On a phone they open in a preview mode, so nothing gets saved.</a:t>
+              <a:t>So what else can you make? Three of these are auto-graded and one, Sketch &amp; Label, is teacher-graded. Every one of these came from a prompt. I'll show you how in a few minutes. They're on my sandbox. The next four slides have QR codes, so try them on your phone while I talk. On a phone they open in a preview mode, so nothing gets saved.</a:t>
             </a:r>
           </a:p>
         </p:txBody>
@@ -1054,7 +1053,7 @@
           <a:lstStyle/>
           <a:p>
             <a:r>
-              <a:t>TIME: 1:05 (clock 15:55)</a:t>
+              <a:t>TIME: 1:05 (clock 12:25)</a:t>
             </a:r>
           </a:p>
           <a:p/>
@@ -1066,7 +1065,7 @@
           <a:p/>
           <a:p>
             <a:r>
-              <a:t>Same sentence as the recording. This time I answered a few follow-up questions: five rounds, practice shots after each scored one, and settings for the targets, launch speed and how close counts as a hit. That's the difference between this one and the one you saw built.</a:t>
+              <a:t>This came from the sentence on the slide plus a few answers to follow-up questions: five rounds, practice shots after each scored one, and settings for the targets, launch speed and how close counts as a hit. In a few minutes you'll see what that sentence alone produces.</a:t>
             </a:r>
           </a:p>
           <a:p/>
@@ -1136,7 +1135,7 @@
           <a:lstStyle/>
           <a:p>
             <a:r>
-              <a:t>TIME: 1:05 (clock 17:00)</a:t>
+              <a:t>TIME: 1:05 (clock 13:30)</a:t>
             </a:r>
           </a:p>
           <a:p/>
@@ -1218,7 +1217,7 @@
           <a:lstStyle/>
           <a:p>
             <a:r>
-              <a:t>TIME: 1:05 (clock 18:05)</a:t>
+              <a:t>TIME: 1:05 (clock 14:35)</a:t>
             </a:r>
           </a:p>
           <a:p/>
@@ -1300,7 +1299,7 @@
           <a:lstStyle/>
           <a:p>
             <a:r>
-              <a:t>TIME: 1:05 (clock 19:10)</a:t>
+              <a:t>TIME: 1:05 (clock 15:40)</a:t>
             </a:r>
           </a:p>
           <a:p/>
@@ -1325,97 +1324,6 @@
           <a:p>
             <a:r>
               <a:t>[CLICK] SpeedGrader shows a timeline of every wrong try and hint, so you can see where a student got stuck.</a:t>
-            </a:r>
-          </a:p>
-        </p:txBody>
-      </p:sp>
-    </p:spTree>
-  </p:cSld>
-  <p:clrMapOvr>
-    <a:masterClrMapping/>
-  </p:clrMapOvr>
-</p:notes>
-</file>
-
-<file path=ppt/notesSlides/notesSlide17.xml><?xml version="1.0" encoding="utf-8"?>
-<p:notes xmlns:a="http://schemas.openxmlformats.org/drawingml/2006/main" xmlns:p="http://schemas.openxmlformats.org/presentationml/2006/main" xmlns:r="http://schemas.openxmlformats.org/officeDocument/2006/relationships">
-  <p:cSld>
-    <p:spTree>
-      <p:nvGrpSpPr>
-        <p:cNvPr id="1" name=""/>
-        <p:cNvGrpSpPr/>
-        <p:nvPr/>
-      </p:nvGrpSpPr>
-      <p:grpSpPr>
-        <a:xfrm>
-          <a:off x="0" y="0"/>
-          <a:ext cx="0" cy="0"/>
-          <a:chOff x="0" y="0"/>
-          <a:chExt cx="0" cy="0"/>
-        </a:xfrm>
-      </p:grpSpPr>
-      <p:sp>
-        <p:nvSpPr>
-          <p:cNvPr id="2" name="Slide Image Placeholder 1"/>
-          <p:cNvSpPr>
-            <a:spLocks noGrp="1"/>
-          </p:cNvSpPr>
-          <p:nvPr>
-            <p:ph type="sldImg" idx="2"/>
-          </p:nvPr>
-        </p:nvSpPr>
-        <p:spPr/>
-      </p:sp>
-      <p:sp>
-        <p:nvSpPr>
-          <p:cNvPr id="3" name="Notes Placeholder 2"/>
-          <p:cNvSpPr>
-            <a:spLocks noGrp="1"/>
-          </p:cNvSpPr>
-          <p:nvPr>
-            <p:ph type="body" idx="1"/>
-          </p:nvPr>
-        </p:nvSpPr>
-        <p:spPr/>
-        <p:txBody>
-          <a:bodyPr/>
-          <a:lstStyle/>
-          <a:p>
-            <a:r>
-              <a:t>TIME: 0:45 (clock 19:55)</a:t>
-            </a:r>
-          </a:p>
-          <a:p/>
-          <a:p>
-            <a:r>
-              <a:t>Why build it ourselves instead of buying something?</a:t>
-            </a:r>
-          </a:p>
-          <a:p/>
-          <a:p>
-            <a:r>
-              <a:t>[CLICK] We needed the grades and the student's work inside Canvas, not in another tool.</a:t>
-            </a:r>
-          </a:p>
-          <a:p>
-            <a:r>
-              <a:t>[CLICK] Student data stays on our server.</a:t>
-            </a:r>
-          </a:p>
-          <a:p>
-            <a:r>
-              <a:t>[CLICK] No per-seat license.</a:t>
-            </a:r>
-          </a:p>
-          <a:p>
-            <a:r>
-              <a:t>[CLICK] We already had content that needed a home.</a:t>
-            </a:r>
-          </a:p>
-          <a:p/>
-          <a:p>
-            <a:r>
-              <a:t>[Kyle: replace with your real reasons.]</a:t>
             </a:r>
           </a:p>
         </p:txBody>
@@ -1473,7 +1381,7 @@
           <a:lstStyle/>
           <a:p>
             <a:r>
-              <a:t>TIME: 1:30 (clock 21:25)</a:t>
+              <a:t>TIME: 1:30 (clock 20:40)</a:t>
             </a:r>
           </a:p>
           <a:p/>
@@ -1561,7 +1469,7 @@
           <a:lstStyle/>
           <a:p>
             <a:r>
-              <a:t>TIME: 0:45 (clock 22:10)</a:t>
+              <a:t>TIME: 0:45 (clock 21:25)</a:t>
             </a:r>
           </a:p>
           <a:p/>
@@ -1658,7 +1566,7 @@
           <a:p/>
           <a:p>
             <a:r>
-              <a:t>[Kyle: add a photo in the circle, and update anything that's changed.]</a:t>
+              <a:t>[Kyle: update anything that's changed.]</a:t>
             </a:r>
           </a:p>
         </p:txBody>
@@ -1716,7 +1624,7 @@
           <a:lstStyle/>
           <a:p>
             <a:r>
-              <a:t>TIME: 1:15 (clock 23:25)</a:t>
+              <a:t>TIME: 1:15 (clock 22:40)</a:t>
             </a:r>
           </a:p>
           <a:p/>
@@ -1801,7 +1709,7 @@
           <a:lstStyle/>
           <a:p>
             <a:r>
-              <a:t>TIME: 0:45 (clock 24:10)</a:t>
+              <a:t>TIME: 0:45 (clock 23:25)</a:t>
             </a:r>
           </a:p>
           <a:p/>
@@ -1885,7 +1793,7 @@
           <a:lstStyle/>
           <a:p>
             <a:r>
-              <a:t>TIME: 0:45 (clock 24:55)</a:t>
+              <a:t>TIME: 0:45 (clock 24:10)</a:t>
             </a:r>
           </a:p>
           <a:p/>
@@ -1961,7 +1869,7 @@
           <a:lstStyle/>
           <a:p>
             <a:r>
-              <a:t>TIME: 5:00 (clock 30:00). Leave the QR code up.</a:t>
+              <a:t>TIME: 5:00 or more (talk ends at 24:10, so there are about 50 seconds of slack). Leave the QR code up.</a:t>
             </a:r>
           </a:p>
           <a:p/>
@@ -2228,13 +2136,13 @@
           <a:lstStyle/>
           <a:p>
             <a:r>
-              <a:t>TIME: 1:00 (clock 3:00)</a:t>
+              <a:t>TIME: 1:00 (clock 16:40)</a:t>
             </a:r>
           </a:p>
           <a:p/>
           <a:p>
             <a:r>
-              <a:t>Here's one sentence a teacher could type. (Read it.)</a:t>
+              <a:t>So how did these get made? Here's one sentence a teacher could type. (Read it.)</a:t>
             </a:r>
           </a:p>
           <a:p/>
@@ -2310,7 +2218,7 @@
           <a:lstStyle/>
           <a:p>
             <a:r>
-              <a:t>TIME: 2:30 (clock 5:30)</a:t>
+              <a:t>TIME: 2:30 (clock 19:10)</a:t>
             </a:r>
           </a:p>
           <a:p/>
@@ -2412,13 +2320,13 @@
           <a:lstStyle/>
           <a:p>
             <a:r>
-              <a:t>TIME: 1:15 (clock 6:45)</a:t>
+              <a:t>TIME: 1:15 (clock 3:15)</a:t>
             </a:r>
           </a:p>
           <a:p/>
           <a:p>
             <a:r>
-              <a:t>So what's the catch?</a:t>
+              <a:t>So AI can build the activity. Here's what Zest solves.</a:t>
             </a:r>
           </a:p>
           <a:p/>
@@ -2440,7 +2348,7 @@
           <a:p/>
           <a:p>
             <a:r>
-              <a:t>[CLICK] An interactive on its own is just a web page. That's the problem Zest solves.</a:t>
+              <a:t>[CLICK] AI can build the interactive, but on its own it's just a web page. Zest is what turns it into coursework.</a:t>
             </a:r>
           </a:p>
         </p:txBody>
@@ -2498,7 +2406,7 @@
           <a:lstStyle/>
           <a:p>
             <a:r>
-              <a:t>TIME: 1:45 (clock 8:30)</a:t>
+              <a:t>TIME: 1:45 (clock 5:00)</a:t>
             </a:r>
           </a:p>
           <a:p/>
@@ -2595,7 +2503,7 @@
           <a:lstStyle/>
           <a:p>
             <a:r>
-              <a:t>TIME: 1:00 (clock 9:30)</a:t>
+              <a:t>TIME: 1:00 (clock 6:00)</a:t>
             </a:r>
           </a:p>
           <a:p/>
@@ -2683,7 +2591,7 @@
           <a:lstStyle/>
           <a:p>
             <a:r>
-              <a:t>TIME: 3:00 (clock 12:30)</a:t>
+              <a:t>TIME: 3:00 (clock 9:00)</a:t>
             </a:r>
           </a:p>
           <a:p/>
@@ -25578,7 +25486,7 @@
                 </a:solidFill>
                 <a:latin typeface="Roboto"/>
               </a:rPr>
-              <a:t>Same sentence as before, plus a few answers about rounds and practice shots.</a:t>
+              <a:t>Built from this sentence plus a few answers about rounds and practice shots.</a:t>
             </a:r>
           </a:p>
         </p:txBody>
@@ -28195,853 +28103,6 @@
                                         <p:cTn id="8" dur="500"/>
                                         <p:tgtEl>
                                           <p:spTgt spid="257"/>
-                                        </p:tgtEl>
-                                      </p:cBhvr>
-                                    </p:animEffect>
-                                  </p:childTnLst>
-                                </p:cTn>
-                              </p:par>
-                            </p:childTnLst>
-                          </p:cTn>
-                        </p:par>
-                      </p:childTnLst>
-                    </p:cTn>
-                  </p:par>
-                </p:childTnLst>
-              </p:cTn>
-              <p:prevCondLst>
-                <p:cond evt="onPrev" delay="0">
-                  <p:tgtEl>
-                    <p:sldTgt/>
-                  </p:tgtEl>
-                </p:cond>
-              </p:prevCondLst>
-              <p:nextCondLst>
-                <p:cond evt="onNext" delay="0">
-                  <p:tgtEl>
-                    <p:sldTgt/>
-                  </p:tgtEl>
-                </p:cond>
-              </p:nextCondLst>
-            </p:seq>
-          </p:childTnLst>
-        </p:cTn>
-      </p:par>
-    </p:tnLst>
-  </p:timing>
-</p:sld>
-</file>
-
-<file path=ppt/slides/slide17.xml><?xml version="1.0" encoding="utf-8"?>
-<p:sld xmlns:a="http://schemas.openxmlformats.org/drawingml/2006/main" xmlns:r="http://schemas.openxmlformats.org/officeDocument/2006/relationships" xmlns:mc="http://schemas.openxmlformats.org/markup-compatibility/2006" xmlns:mv="urn:schemas-microsoft-com:mac:vml" xmlns:p="http://schemas.openxmlformats.org/presentationml/2006/main" xmlns:c="http://schemas.openxmlformats.org/drawingml/2006/chart" xmlns:dgm="http://schemas.openxmlformats.org/drawingml/2006/diagram" xmlns:o="urn:schemas-microsoft-com:office:office" xmlns:v="urn:schemas-microsoft-com:vml" xmlns:pvml="urn:schemas-microsoft-com:office:powerpoint" xmlns:com="http://schemas.openxmlformats.org/drawingml/2006/compatibility" xmlns:p14="http://schemas.microsoft.com/office/powerpoint/2010/main" xmlns:p15="http://schemas.microsoft.com/office/powerpoint/2012/main" xmlns:ahyp="http://schemas.microsoft.com/office/drawing/2018/hyperlinkcolor">
-  <p:cSld>
-    <p:spTree>
-      <p:nvGrpSpPr>
-        <p:cNvPr id="322" name="Shape 322"/>
-        <p:cNvGrpSpPr/>
-        <p:nvPr/>
-      </p:nvGrpSpPr>
-      <p:grpSpPr>
-        <a:xfrm>
-          <a:off x="0" y="0"/>
-          <a:ext cx="0" cy="0"/>
-          <a:chOff x="0" y="0"/>
-          <a:chExt cx="0" cy="0"/>
-        </a:xfrm>
-      </p:grpSpPr>
-      <p:sp>
-        <p:nvSpPr>
-          <p:cNvPr id="323" name="Google Shape;323;p44"/>
-          <p:cNvSpPr/>
-          <p:nvPr/>
-        </p:nvSpPr>
-        <p:spPr>
-          <a:xfrm>
-            <a:off x="0" y="4186673"/>
-            <a:ext cx="9144000" cy="957000"/>
-          </a:xfrm>
-          <a:prstGeom prst="rect">
-            <a:avLst/>
-          </a:prstGeom>
-          <a:solidFill>
-            <a:srgbClr val="25B5FF"/>
-          </a:solidFill>
-          <a:ln>
-            <a:noFill/>
-          </a:ln>
-        </p:spPr>
-        <p:txBody>
-          <a:bodyPr anchorCtr="0" anchor="ctr" bIns="45725" lIns="45725" spcFirstLastPara="1" rIns="45725" wrap="square" tIns="45725">
-            <a:noAutofit/>
-          </a:bodyPr>
-          <a:lstStyle/>
-          <a:p>
-            <a:pPr indent="0" lvl="0" marL="0" rtl="0" algn="l">
-              <a:spcBef>
-                <a:spcPts val="0"/>
-              </a:spcBef>
-              <a:spcAft>
-                <a:spcPts val="0"/>
-              </a:spcAft>
-              <a:buNone/>
-            </a:pPr>
-            <a:r>
-              <a:t/>
-            </a:r>
-            <a:endParaRPr/>
-          </a:p>
-        </p:txBody>
-      </p:sp>
-      <p:sp>
-        <p:nvSpPr>
-          <p:cNvPr id="324" name="Google Shape;324;p44"/>
-          <p:cNvSpPr/>
-          <p:nvPr/>
-        </p:nvSpPr>
-        <p:spPr>
-          <a:xfrm>
-            <a:off x="0" y="1942211"/>
-            <a:ext cx="9144000" cy="2244600"/>
-          </a:xfrm>
-          <a:prstGeom prst="rect">
-            <a:avLst/>
-          </a:prstGeom>
-          <a:solidFill>
-            <a:srgbClr val="000000"/>
-          </a:solidFill>
-          <a:ln>
-            <a:noFill/>
-          </a:ln>
-        </p:spPr>
-        <p:txBody>
-          <a:bodyPr anchorCtr="0" anchor="ctr" bIns="45725" lIns="45725" spcFirstLastPara="1" rIns="45725" wrap="square" tIns="45725">
-            <a:noAutofit/>
-          </a:bodyPr>
-          <a:lstStyle/>
-          <a:p>
-            <a:pPr indent="0" lvl="0" marL="0" rtl="0" algn="l">
-              <a:spcBef>
-                <a:spcPts val="0"/>
-              </a:spcBef>
-              <a:spcAft>
-                <a:spcPts val="0"/>
-              </a:spcAft>
-              <a:buNone/>
-            </a:pPr>
-            <a:r>
-              <a:t/>
-            </a:r>
-            <a:endParaRPr/>
-          </a:p>
-        </p:txBody>
-      </p:sp>
-      <p:pic>
-        <p:nvPicPr>
-          <p:cNvPr id="328" name="Google Shape;328;p44"/>
-          <p:cNvPicPr preferRelativeResize="0"/>
-          <p:nvPr/>
-        </p:nvPicPr>
-        <p:blipFill rotWithShape="1">
-          <a:blip r:embed="rId3">
-            <a:alphaModFix/>
-          </a:blip>
-          <a:srcRect b="0" l="0" r="0" t="0"/>
-          <a:stretch/>
-        </p:blipFill>
-        <p:spPr>
-          <a:xfrm rot="-5400000">
-            <a:off x="8155279" y="0"/>
-            <a:ext cx="988721" cy="988721"/>
-          </a:xfrm>
-          <a:prstGeom prst="rect">
-            <a:avLst/>
-          </a:prstGeom>
-          <a:noFill/>
-          <a:ln>
-            <a:noFill/>
-          </a:ln>
-        </p:spPr>
-      </p:pic>
-      <p:pic>
-        <p:nvPicPr>
-          <p:cNvPr id="329" name="Google Shape;329;p44"/>
-          <p:cNvPicPr preferRelativeResize="0"/>
-          <p:nvPr/>
-        </p:nvPicPr>
-        <p:blipFill rotWithShape="1">
-          <a:blip r:embed="rId4">
-            <a:alphaModFix/>
-          </a:blip>
-          <a:srcRect b="0" l="0" r="0" t="0"/>
-          <a:stretch/>
-        </p:blipFill>
-        <p:spPr>
-          <a:xfrm>
-            <a:off x="8251663" y="1753217"/>
-            <a:ext cx="377988" cy="377988"/>
-          </a:xfrm>
-          <a:prstGeom prst="rect">
-            <a:avLst/>
-          </a:prstGeom>
-          <a:noFill/>
-          <a:ln>
-            <a:noFill/>
-          </a:ln>
-        </p:spPr>
-      </p:pic>
-      <p:grpSp>
-        <p:nvGrpSpPr>
-          <p:cNvPr id="336" name="Google Shape;336;p44"/>
-          <p:cNvGrpSpPr/>
-          <p:nvPr/>
-        </p:nvGrpSpPr>
-        <p:grpSpPr>
-          <a:xfrm>
-            <a:off x="7704129" y="4183226"/>
-            <a:ext cx="915496" cy="471026"/>
-            <a:chOff x="61924" y="79616"/>
-            <a:chExt cx="2441323" cy="1256068"/>
-          </a:xfrm>
-        </p:grpSpPr>
-        <p:sp>
-          <p:nvSpPr>
-            <p:cNvPr id="337" name="Google Shape;337;p44"/>
-            <p:cNvSpPr/>
-            <p:nvPr/>
-          </p:nvSpPr>
-          <p:spPr>
-            <a:xfrm>
-              <a:off x="61924" y="79616"/>
-              <a:ext cx="2441323" cy="1256068"/>
-            </a:xfrm>
-            <a:custGeom>
-              <a:rect b="b" l="l" r="r" t="t"/>
-              <a:pathLst>
-                <a:path extrusionOk="0" h="360680" w="701026">
-                  <a:moveTo>
-                    <a:pt x="701026" y="180340"/>
-                  </a:moveTo>
-                  <a:cubicBezTo>
-                    <a:pt x="701026" y="81280"/>
-                    <a:pt x="621016" y="0"/>
-                    <a:pt x="520686" y="0"/>
-                  </a:cubicBezTo>
-                  <a:lnTo>
-                    <a:pt x="172720" y="0"/>
-                  </a:lnTo>
-                  <a:lnTo>
-                    <a:pt x="172720" y="1270"/>
-                  </a:lnTo>
-                  <a:cubicBezTo>
-                    <a:pt x="76200" y="5080"/>
-                    <a:pt x="0" y="83820"/>
-                    <a:pt x="0" y="180340"/>
-                  </a:cubicBezTo>
-                  <a:cubicBezTo>
-                    <a:pt x="0" y="276860"/>
-                    <a:pt x="77470" y="355600"/>
-                    <a:pt x="172720" y="359410"/>
-                  </a:cubicBezTo>
-                  <a:lnTo>
-                    <a:pt x="172720" y="360680"/>
-                  </a:lnTo>
-                  <a:lnTo>
-                    <a:pt x="520685" y="360680"/>
-                  </a:lnTo>
-                  <a:cubicBezTo>
-                    <a:pt x="619745" y="360680"/>
-                    <a:pt x="701025" y="279400"/>
-                    <a:pt x="701025" y="180340"/>
-                  </a:cubicBezTo>
-                  <a:close/>
-                </a:path>
-              </a:pathLst>
-            </a:custGeom>
-            <a:solidFill>
-              <a:srgbClr val="C0C0C0">
-                <a:alpha val="25490"/>
-              </a:srgbClr>
-            </a:solidFill>
-            <a:ln>
-              <a:noFill/>
-            </a:ln>
-          </p:spPr>
-          <p:txBody>
-            <a:bodyPr anchorCtr="0" anchor="ctr" bIns="45725" lIns="45725" spcFirstLastPara="1" rIns="45725" wrap="square" tIns="45725">
-              <a:noAutofit/>
-            </a:bodyPr>
-            <a:lstStyle/>
-            <a:p>
-              <a:pPr indent="0" lvl="0" marL="0" rtl="0" algn="l">
-                <a:spcBef>
-                  <a:spcPts val="0"/>
-                </a:spcBef>
-                <a:spcAft>
-                  <a:spcPts val="0"/>
-                </a:spcAft>
-                <a:buNone/>
-              </a:pPr>
-              <a:r>
-                <a:t/>
-              </a:r>
-              <a:endParaRPr/>
-            </a:p>
-          </p:txBody>
-        </p:sp>
-        <p:pic>
-          <p:nvPicPr>
-            <p:cNvPr id="338" name="Google Shape;338;p44"/>
-            <p:cNvPicPr preferRelativeResize="0"/>
-            <p:nvPr/>
-          </p:nvPicPr>
-          <p:blipFill rotWithShape="1">
-            <a:blip r:embed="rId5">
-              <a:alphaModFix/>
-            </a:blip>
-            <a:srcRect b="0" l="0" r="0" t="0"/>
-            <a:stretch/>
-          </p:blipFill>
-          <p:spPr>
-            <a:xfrm>
-              <a:off x="1328489" y="190500"/>
-              <a:ext cx="1034400" cy="1034400"/>
-            </a:xfrm>
-            <a:prstGeom prst="rect">
-              <a:avLst/>
-            </a:prstGeom>
-            <a:noFill/>
-            <a:ln>
-              <a:noFill/>
-            </a:ln>
-          </p:spPr>
-        </p:pic>
-      </p:grpSp>
-      <p:pic>
-        <p:nvPicPr>
-          <p:cNvPr id="339" name="Google Shape;339;p44"/>
-          <p:cNvPicPr preferRelativeResize="0"/>
-          <p:nvPr/>
-        </p:nvPicPr>
-        <p:blipFill rotWithShape="1">
-          <a:blip r:embed="rId6">
-            <a:alphaModFix/>
-          </a:blip>
-          <a:srcRect b="0" l="0" r="0" t="0"/>
-          <a:stretch/>
-        </p:blipFill>
-        <p:spPr>
-          <a:xfrm>
-            <a:off x="8236813" y="4282529"/>
-            <a:ext cx="272458" cy="272458"/>
-          </a:xfrm>
-          <a:prstGeom prst="rect">
-            <a:avLst/>
-          </a:prstGeom>
-          <a:noFill/>
-          <a:ln>
-            <a:noFill/>
-          </a:ln>
-        </p:spPr>
-      </p:pic>
-      <p:pic>
-        <p:nvPicPr>
-          <p:cNvPr id="340" name="Google Shape;340;p44"/>
-          <p:cNvPicPr preferRelativeResize="0"/>
-          <p:nvPr/>
-        </p:nvPicPr>
-        <p:blipFill rotWithShape="1">
-          <a:blip r:embed="rId7">
-            <a:alphaModFix/>
-          </a:blip>
-          <a:srcRect b="0" l="0" r="0" t="0"/>
-          <a:stretch/>
-        </p:blipFill>
-        <p:spPr>
-          <a:xfrm>
-            <a:off x="79132" y="4418758"/>
-            <a:ext cx="1078263" cy="653248"/>
-          </a:xfrm>
-          <a:prstGeom prst="rect">
-            <a:avLst/>
-          </a:prstGeom>
-          <a:noFill/>
-          <a:ln>
-            <a:noFill/>
-          </a:ln>
-        </p:spPr>
-      </p:pic>
-      <p:sp>
-        <p:nvSpPr>
-          <p:cNvPr id="341" name="TextBox 340"/>
-          <p:cNvSpPr txBox="1"/>
-          <p:nvPr/>
-        </p:nvSpPr>
-        <p:spPr>
-          <a:xfrm>
-            <a:off x="512064" y="502920"/>
-            <a:ext cx="6858000" cy="548640"/>
-          </a:xfrm>
-          <a:prstGeom prst="rect">
-            <a:avLst/>
-          </a:prstGeom>
-          <a:noFill/>
-        </p:spPr>
-        <p:txBody>
-          <a:bodyPr wrap="square" anchor="t" lIns="0" rIns="0" tIns="0" bIns="0">
-            <a:spAutoFit/>
-          </a:bodyPr>
-          <a:lstStyle/>
-          <a:p>
-            <a:pPr algn="l">
-              <a:spcAft>
-                <a:spcPts val="0"/>
-              </a:spcAft>
-            </a:pPr>
-            <a:r>
-              <a:rPr sz="3000" b="1" i="0">
-                <a:solidFill>
-                  <a:srgbClr val="131313"/>
-                </a:solidFill>
-                <a:latin typeface="League Spartan"/>
-              </a:rPr>
-              <a:t>Why Build It Ourselves?</a:t>
-            </a:r>
-          </a:p>
-        </p:txBody>
-      </p:sp>
-      <p:sp>
-        <p:nvSpPr>
-          <p:cNvPr id="342" name="TextBox 341"/>
-          <p:cNvSpPr txBox="1"/>
-          <p:nvPr/>
-        </p:nvSpPr>
-        <p:spPr>
-          <a:xfrm>
-            <a:off x="512064" y="2240280"/>
-            <a:ext cx="3566160" cy="777240"/>
-          </a:xfrm>
-          <a:prstGeom prst="rect">
-            <a:avLst/>
-          </a:prstGeom>
-          <a:noFill/>
-        </p:spPr>
-        <p:txBody>
-          <a:bodyPr wrap="square" anchor="t" lIns="0" rIns="0" tIns="0" bIns="0">
-            <a:spAutoFit/>
-          </a:bodyPr>
-          <a:lstStyle/>
-          <a:p>
-            <a:pPr algn="l">
-              <a:spcAft>
-                <a:spcPts val="200"/>
-              </a:spcAft>
-            </a:pPr>
-            <a:r>
-              <a:rPr sz="1800" b="1" i="0">
-                <a:solidFill>
-                  <a:srgbClr val="FFFFFF"/>
-                </a:solidFill>
-                <a:latin typeface="League Spartan"/>
-              </a:rPr>
-              <a:t>Grades inside Canvas</a:t>
-            </a:r>
-          </a:p>
-          <a:p>
-            <a:pPr algn="l">
-              <a:spcAft>
-                <a:spcPts val="600"/>
-              </a:spcAft>
-            </a:pPr>
-            <a:r>
-              <a:rPr sz="1200" b="0" i="0">
-                <a:solidFill>
-                  <a:srgbClr val="FFFFFF"/>
-                </a:solidFill>
-                <a:latin typeface="Roboto"/>
-              </a:rPr>
-              <a:t>Not in another tool</a:t>
-            </a:r>
-          </a:p>
-        </p:txBody>
-      </p:sp>
-      <p:sp>
-        <p:nvSpPr>
-          <p:cNvPr id="343" name="TextBox 342"/>
-          <p:cNvSpPr txBox="1"/>
-          <p:nvPr/>
-        </p:nvSpPr>
-        <p:spPr>
-          <a:xfrm>
-            <a:off x="512064" y="3063240"/>
-            <a:ext cx="3566160" cy="777240"/>
-          </a:xfrm>
-          <a:prstGeom prst="rect">
-            <a:avLst/>
-          </a:prstGeom>
-          <a:noFill/>
-        </p:spPr>
-        <p:txBody>
-          <a:bodyPr wrap="square" anchor="t" lIns="0" rIns="0" tIns="0" bIns="0">
-            <a:spAutoFit/>
-          </a:bodyPr>
-          <a:lstStyle/>
-          <a:p>
-            <a:pPr algn="l">
-              <a:spcAft>
-                <a:spcPts val="200"/>
-              </a:spcAft>
-            </a:pPr>
-            <a:r>
-              <a:rPr sz="1800" b="1" i="0">
-                <a:solidFill>
-                  <a:srgbClr val="FFFFFF"/>
-                </a:solidFill>
-                <a:latin typeface="League Spartan"/>
-              </a:rPr>
-              <a:t>Our data, our server</a:t>
-            </a:r>
-          </a:p>
-          <a:p>
-            <a:pPr algn="l">
-              <a:spcAft>
-                <a:spcPts val="600"/>
-              </a:spcAft>
-            </a:pPr>
-            <a:r>
-              <a:rPr sz="1200" b="0" i="0">
-                <a:solidFill>
-                  <a:srgbClr val="FFFFFF"/>
-                </a:solidFill>
-                <a:latin typeface="Roboto"/>
-              </a:rPr>
-              <a:t>Student work stays with us</a:t>
-            </a:r>
-          </a:p>
-        </p:txBody>
-      </p:sp>
-      <p:sp>
-        <p:nvSpPr>
-          <p:cNvPr id="344" name="TextBox 343"/>
-          <p:cNvSpPr txBox="1"/>
-          <p:nvPr/>
-        </p:nvSpPr>
-        <p:spPr>
-          <a:xfrm>
-            <a:off x="5157216" y="2240280"/>
-            <a:ext cx="3566160" cy="777240"/>
-          </a:xfrm>
-          <a:prstGeom prst="rect">
-            <a:avLst/>
-          </a:prstGeom>
-          <a:noFill/>
-        </p:spPr>
-        <p:txBody>
-          <a:bodyPr wrap="square" anchor="t" lIns="0" rIns="0" tIns="0" bIns="0">
-            <a:spAutoFit/>
-          </a:bodyPr>
-          <a:lstStyle/>
-          <a:p>
-            <a:pPr algn="l">
-              <a:spcAft>
-                <a:spcPts val="200"/>
-              </a:spcAft>
-            </a:pPr>
-            <a:r>
-              <a:rPr sz="1800" b="1" i="0">
-                <a:solidFill>
-                  <a:srgbClr val="FFFFFF"/>
-                </a:solidFill>
-                <a:latin typeface="League Spartan"/>
-              </a:rPr>
-              <a:t>No per-seat license</a:t>
-            </a:r>
-          </a:p>
-          <a:p>
-            <a:pPr algn="l">
-              <a:spcAft>
-                <a:spcPts val="600"/>
-              </a:spcAft>
-            </a:pPr>
-            <a:r>
-              <a:rPr sz="1200" b="0" i="0">
-                <a:solidFill>
-                  <a:srgbClr val="FFFFFF"/>
-                </a:solidFill>
-                <a:latin typeface="Roboto"/>
-              </a:rPr>
-              <a:t>Add students without a new contract</a:t>
-            </a:r>
-          </a:p>
-        </p:txBody>
-      </p:sp>
-      <p:sp>
-        <p:nvSpPr>
-          <p:cNvPr id="345" name="TextBox 344"/>
-          <p:cNvSpPr txBox="1"/>
-          <p:nvPr/>
-        </p:nvSpPr>
-        <p:spPr>
-          <a:xfrm>
-            <a:off x="5157216" y="3063240"/>
-            <a:ext cx="3566160" cy="777240"/>
-          </a:xfrm>
-          <a:prstGeom prst="rect">
-            <a:avLst/>
-          </a:prstGeom>
-          <a:noFill/>
-        </p:spPr>
-        <p:txBody>
-          <a:bodyPr wrap="square" anchor="t" lIns="0" rIns="0" tIns="0" bIns="0">
-            <a:spAutoFit/>
-          </a:bodyPr>
-          <a:lstStyle/>
-          <a:p>
-            <a:pPr algn="l">
-              <a:spcAft>
-                <a:spcPts val="200"/>
-              </a:spcAft>
-            </a:pPr>
-            <a:r>
-              <a:rPr sz="1800" b="1" i="0">
-                <a:solidFill>
-                  <a:srgbClr val="FFFFFF"/>
-                </a:solidFill>
-                <a:latin typeface="League Spartan"/>
-              </a:rPr>
-              <a:t>Content needed a home</a:t>
-            </a:r>
-          </a:p>
-          <a:p>
-            <a:pPr algn="l">
-              <a:spcAft>
-                <a:spcPts val="600"/>
-              </a:spcAft>
-            </a:pPr>
-            <a:r>
-              <a:rPr sz="1200" b="0" i="0">
-                <a:solidFill>
-                  <a:srgbClr val="FFFFFF"/>
-                </a:solidFill>
-                <a:latin typeface="Roboto"/>
-              </a:rPr>
-              <a:t>We already had it</a:t>
-            </a:r>
-          </a:p>
-        </p:txBody>
-      </p:sp>
-    </p:spTree>
-  </p:cSld>
-  <p:clrMapOvr>
-    <a:masterClrMapping/>
-  </p:clrMapOvr>
-  <p:timing>
-    <p:tnLst>
-      <p:par>
-        <p:cTn id="1" dur="indefinite" restart="never" nodeType="tmRoot">
-          <p:childTnLst>
-            <p:seq concurrent="1" nextAc="seek">
-              <p:cTn id="2" dur="indefinite" nodeType="mainSeq">
-                <p:childTnLst>
-                  <p:par>
-                    <p:cTn id="6" fill="hold">
-                      <p:stCondLst>
-                        <p:cond delay="indefinite"/>
-                      </p:stCondLst>
-                      <p:childTnLst>
-                        <p:par>
-                          <p:cTn id="7" fill="hold">
-                            <p:stCondLst>
-                              <p:cond delay="0"/>
-                            </p:stCondLst>
-                            <p:childTnLst>
-                              <p:par>
-                                <p:cTn id="3" presetID="10" presetClass="entr" presetSubtype="0" fill="hold" nodeType="clickEffect">
-                                  <p:stCondLst>
-                                    <p:cond delay="0"/>
-                                  </p:stCondLst>
-                                  <p:childTnLst>
-                                    <p:set>
-                                      <p:cBhvr>
-                                        <p:cTn id="4" dur="1" fill="hold">
-                                          <p:stCondLst>
-                                            <p:cond delay="0"/>
-                                          </p:stCondLst>
-                                        </p:cTn>
-                                        <p:tgtEl>
-                                          <p:spTgt spid="342"/>
-                                        </p:tgtEl>
-                                        <p:attrNameLst>
-                                          <p:attrName>style.visibility</p:attrName>
-                                        </p:attrNameLst>
-                                      </p:cBhvr>
-                                      <p:to>
-                                        <p:strVal val="visible"/>
-                                      </p:to>
-                                    </p:set>
-                                    <p:animEffect transition="in" filter="fade">
-                                      <p:cBhvr>
-                                        <p:cTn id="5" dur="500"/>
-                                        <p:tgtEl>
-                                          <p:spTgt spid="342"/>
-                                        </p:tgtEl>
-                                      </p:cBhvr>
-                                    </p:animEffect>
-                                  </p:childTnLst>
-                                </p:cTn>
-                              </p:par>
-                            </p:childTnLst>
-                          </p:cTn>
-                        </p:par>
-                      </p:childTnLst>
-                    </p:cTn>
-                  </p:par>
-                  <p:par>
-                    <p:cTn id="11" fill="hold">
-                      <p:stCondLst>
-                        <p:cond delay="indefinite"/>
-                      </p:stCondLst>
-                      <p:childTnLst>
-                        <p:par>
-                          <p:cTn id="12" fill="hold">
-                            <p:stCondLst>
-                              <p:cond delay="0"/>
-                            </p:stCondLst>
-                            <p:childTnLst>
-                              <p:par>
-                                <p:cTn id="8" presetID="10" presetClass="entr" presetSubtype="0" fill="hold" nodeType="clickEffect">
-                                  <p:stCondLst>
-                                    <p:cond delay="0"/>
-                                  </p:stCondLst>
-                                  <p:childTnLst>
-                                    <p:set>
-                                      <p:cBhvr>
-                                        <p:cTn id="9" dur="1" fill="hold">
-                                          <p:stCondLst>
-                                            <p:cond delay="0"/>
-                                          </p:stCondLst>
-                                        </p:cTn>
-                                        <p:tgtEl>
-                                          <p:spTgt spid="343"/>
-                                        </p:tgtEl>
-                                        <p:attrNameLst>
-                                          <p:attrName>style.visibility</p:attrName>
-                                        </p:attrNameLst>
-                                      </p:cBhvr>
-                                      <p:to>
-                                        <p:strVal val="visible"/>
-                                      </p:to>
-                                    </p:set>
-                                    <p:animEffect transition="in" filter="fade">
-                                      <p:cBhvr>
-                                        <p:cTn id="10" dur="500"/>
-                                        <p:tgtEl>
-                                          <p:spTgt spid="343"/>
-                                        </p:tgtEl>
-                                      </p:cBhvr>
-                                    </p:animEffect>
-                                  </p:childTnLst>
-                                </p:cTn>
-                              </p:par>
-                            </p:childTnLst>
-                          </p:cTn>
-                        </p:par>
-                      </p:childTnLst>
-                    </p:cTn>
-                  </p:par>
-                  <p:par>
-                    <p:cTn id="16" fill="hold">
-                      <p:stCondLst>
-                        <p:cond delay="indefinite"/>
-                      </p:stCondLst>
-                      <p:childTnLst>
-                        <p:par>
-                          <p:cTn id="17" fill="hold">
-                            <p:stCondLst>
-                              <p:cond delay="0"/>
-                            </p:stCondLst>
-                            <p:childTnLst>
-                              <p:par>
-                                <p:cTn id="13" presetID="10" presetClass="entr" presetSubtype="0" fill="hold" nodeType="clickEffect">
-                                  <p:stCondLst>
-                                    <p:cond delay="0"/>
-                                  </p:stCondLst>
-                                  <p:childTnLst>
-                                    <p:set>
-                                      <p:cBhvr>
-                                        <p:cTn id="14" dur="1" fill="hold">
-                                          <p:stCondLst>
-                                            <p:cond delay="0"/>
-                                          </p:stCondLst>
-                                        </p:cTn>
-                                        <p:tgtEl>
-                                          <p:spTgt spid="344"/>
-                                        </p:tgtEl>
-                                        <p:attrNameLst>
-                                          <p:attrName>style.visibility</p:attrName>
-                                        </p:attrNameLst>
-                                      </p:cBhvr>
-                                      <p:to>
-                                        <p:strVal val="visible"/>
-                                      </p:to>
-                                    </p:set>
-                                    <p:animEffect transition="in" filter="fade">
-                                      <p:cBhvr>
-                                        <p:cTn id="15" dur="500"/>
-                                        <p:tgtEl>
-                                          <p:spTgt spid="344"/>
-                                        </p:tgtEl>
-                                      </p:cBhvr>
-                                    </p:animEffect>
-                                  </p:childTnLst>
-                                </p:cTn>
-                              </p:par>
-                            </p:childTnLst>
-                          </p:cTn>
-                        </p:par>
-                      </p:childTnLst>
-                    </p:cTn>
-                  </p:par>
-                  <p:par>
-                    <p:cTn id="21" fill="hold">
-                      <p:stCondLst>
-                        <p:cond delay="indefinite"/>
-                      </p:stCondLst>
-                      <p:childTnLst>
-                        <p:par>
-                          <p:cTn id="22" fill="hold">
-                            <p:stCondLst>
-                              <p:cond delay="0"/>
-                            </p:stCondLst>
-                            <p:childTnLst>
-                              <p:par>
-                                <p:cTn id="18" presetID="10" presetClass="entr" presetSubtype="0" fill="hold" nodeType="clickEffect">
-                                  <p:stCondLst>
-                                    <p:cond delay="0"/>
-                                  </p:stCondLst>
-                                  <p:childTnLst>
-                                    <p:set>
-                                      <p:cBhvr>
-                                        <p:cTn id="19" dur="1" fill="hold">
-                                          <p:stCondLst>
-                                            <p:cond delay="0"/>
-                                          </p:stCondLst>
-                                        </p:cTn>
-                                        <p:tgtEl>
-                                          <p:spTgt spid="345"/>
-                                        </p:tgtEl>
-                                        <p:attrNameLst>
-                                          <p:attrName>style.visibility</p:attrName>
-                                        </p:attrNameLst>
-                                      </p:cBhvr>
-                                      <p:to>
-                                        <p:strVal val="visible"/>
-                                      </p:to>
-                                    </p:set>
-                                    <p:animEffect transition="in" filter="fade">
-                                      <p:cBhvr>
-                                        <p:cTn id="20" dur="500"/>
-                                        <p:tgtEl>
-                                          <p:spTgt spid="345"/>
                                         </p:tgtEl>
                                       </p:cBhvr>
                                     </p:animEffect>
@@ -30971,61 +30032,6 @@
                 <a:latin typeface="Roboto"/>
               </a:rPr>
               <a:t>kyle.yancey@virtualarkansas.org</a:t>
-            </a:r>
-          </a:p>
-        </p:txBody>
-      </p:sp>
-      <p:sp>
-        <p:nvSpPr>
-          <p:cNvPr id="557" name="Oval 556"/>
-          <p:cNvSpPr/>
-          <p:nvPr/>
-        </p:nvSpPr>
-        <p:spPr>
-          <a:xfrm>
-            <a:off x="5486400" y="822960"/>
-            <a:ext cx="2377440" cy="2377440"/>
-          </a:xfrm>
-          <a:prstGeom prst="ellipse">
-            <a:avLst/>
-          </a:prstGeom>
-          <a:solidFill>
-            <a:srgbClr val="EEEEEE"/>
-          </a:solidFill>
-          <a:ln w="19050">
-            <a:solidFill>
-              <a:srgbClr val="25AEFA"/>
-            </a:solidFill>
-          </a:ln>
-          <a:effectLst/>
-        </p:spPr>
-        <p:style>
-          <a:lnRef idx="1">
-            <a:schemeClr val="accent1"/>
-          </a:lnRef>
-          <a:fillRef idx="3">
-            <a:schemeClr val="accent1"/>
-          </a:fillRef>
-          <a:effectRef idx="2">
-            <a:schemeClr val="accent1"/>
-          </a:effectRef>
-          <a:fontRef idx="minor">
-            <a:schemeClr val="lt1"/>
-          </a:fontRef>
-        </p:style>
-        <p:txBody>
-          <a:bodyPr rtlCol="0" anchor="ctr"/>
-          <a:lstStyle/>
-          <a:p>
-            <a:pPr algn="ctr"/>
-            <a:r>
-              <a:rPr sz="1200">
-                <a:solidFill>
-                  <a:srgbClr val="605F5E"/>
-                </a:solidFill>
-                <a:latin typeface="Roboto"/>
-              </a:rPr>
-              <a:t>Your photo</a:t>
             </a:r>
           </a:p>
         </p:txBody>
@@ -36729,7 +35735,7 @@
                 </a:solidFill>
                 <a:latin typeface="League Spartan"/>
               </a:rPr>
-              <a:t>So What's the Catch?</a:t>
+              <a:t>What Zest Solves</a:t>
             </a:r>
           </a:p>
         </p:txBody>
@@ -36742,8 +35748,8 @@
         </p:nvSpPr>
         <p:spPr>
           <a:xfrm>
-            <a:off x="5486400" y="1920240"/>
-            <a:ext cx="3017520" cy="1097280"/>
+            <a:off x="5486400" y="1600200"/>
+            <a:ext cx="3017520" cy="1463040"/>
           </a:xfrm>
           <a:prstGeom prst="rect">
             <a:avLst/>
@@ -36768,7 +35774,7 @@
                 </a:solidFill>
                 <a:latin typeface="Roboto"/>
               </a:rPr>
-              <a:t>An interactive on its own is just a web page.</a:t>
+              <a:t>AI can build the interactive. On its own, it is just a web page.</a:t>
             </a:r>
           </a:p>
         </p:txBody>

--- a/presentations/2026-vlla/deck/zest-vlla-2026.pptx
+++ b/presentations/2026-vlla/deck/zest-vlla-2026.pptx
@@ -852,12 +852,6 @@
           <a:p>
             <a:r>
               <a:t>The AI builds these too. In the prompt for Sketch &amp; Label, the teacher just said "in SpeedGrader I want to see their drawing and watch how they drew it."</a:t>
-            </a:r>
-          </a:p>
-          <a:p/>
-          <a:p>
-            <a:r>
-              <a:t>[Kyle: once the zests are on your sandbox, a screenshot of one of these inside real Canvas SpeedGrader would be the strongest image for this slide.]</a:t>
             </a:r>
           </a:p>
         </p:txBody>
@@ -1411,7 +1405,7 @@
           <a:p/>
           <a:p>
             <a:r>
-              <a:t>[Kyle: decide whether to show the GitHub links for zest-spec and zest-creator.]</a:t>
+              <a:t>Both links are on the slide: github.com/VirtualArkansasOrg/zest-spec and github.com/VirtualArkansasOrg/zest-creator.</a:t>
             </a:r>
           </a:p>
         </p:txBody>
@@ -1561,12 +1555,6 @@
           <a:p>
             <a:r>
               <a:t>Quick background so you know where I'm coming from. I taught for about ten years: physics, chemistry, biology, physical science, business and computer science. I've been writing code for about 25 years. These days I'm the Data Science Specialist at Virtual Arkansas, and most of what I build is AI tools for our teachers and students.</a:t>
-            </a:r>
-          </a:p>
-          <a:p/>
-          <a:p>
-            <a:r>
-              <a:t>[Kyle: update anything that's changed.]</a:t>
             </a:r>
           </a:p>
         </p:txBody>
@@ -1875,128 +1863,7 @@
           <a:p/>
           <a:p>
             <a:r>
-              <a:t>LIKELY QUESTIONS, SHORT ANSWERS</a:t>
-            </a:r>
-          </a:p>
-          <a:p/>
-          <a:p>
-            <a:r>
-              <a:t>What does Claude Code cost?</a:t>
-            </a:r>
-          </a:p>
-          <a:p>
-            <a:r>
-              <a:t>It needs a paid Claude plan. Check current pricing; it's a per-person subscription, not per student.</a:t>
-            </a:r>
-          </a:p>
-          <a:p/>
-          <a:p>
-            <a:r>
-              <a:t>Does student data go to the AI?</a:t>
-            </a:r>
-          </a:p>
-          <a:p>
-            <a:r>
-              <a:t>No. The AI only sees what the teacher types while building the activity. The Zest server has no AI in it and doesn't send student work anywhere.</a:t>
-            </a:r>
-          </a:p>
-          <a:p/>
-          <a:p>
-            <a:r>
-              <a:t>Who checks what the AI builds? Can it be wrong?</a:t>
-            </a:r>
-          </a:p>
-          <a:p>
-            <a:r>
-              <a:t>Yes, it can be wrong. The build checks and the security review catch technical problems. A teacher tests it as a student, and a subject expert checks the content, same as any material we'd put in a course.</a:t>
-            </a:r>
-          </a:p>
-          <a:p/>
-          <a:p>
-            <a:r>
-              <a:t>Hosting and cost?</a:t>
-            </a:r>
-          </a:p>
-          <a:p>
-            <a:r>
-              <a:t>It runs on your own server (Docker and PostgreSQL), with encrypted nightly backups. No per-seat license.</a:t>
-            </a:r>
-          </a:p>
-          <a:p/>
-          <a:p>
-            <a:r>
-              <a:t>Can we share zests with you, or use yours?</a:t>
-            </a:r>
-          </a:p>
-          <a:p>
-            <a:r>
-              <a:t>Yes. That's the point of the spec. A zest built for one Zest server runs on any other.</a:t>
-            </a:r>
-          </a:p>
-          <a:p/>
-          <a:p>
-            <a:r>
-              <a:t>Other LMSs?</a:t>
-            </a:r>
-          </a:p>
-          <a:p>
-            <a:r>
-              <a:t>Canvas only for now. We've researched Brightspace, Schoology and Buzz.</a:t>
-            </a:r>
-          </a:p>
-          <a:p/>
-          <a:p>
-            <a:r>
-              <a:t>Accessibility?</a:t>
-            </a:r>
-          </a:p>
-          <a:p>
-            <a:r>
-              <a:t>A review is planned. Zests are plain HTML, so they can be built accessibly, but I'm not claiming conformance yet.</a:t>
-            </a:r>
-          </a:p>
-          <a:p/>
-          <a:p>
-            <a:r>
-              <a:t>Can students cheat on auto-graded ones?</a:t>
-            </a:r>
-          </a:p>
-          <a:p>
-            <a:r>
-              <a:t>Scores are calculated in the browser, so a determined student could. Use teacher grading for high stakes.</a:t>
-            </a:r>
-          </a:p>
-          <a:p/>
-          <a:p>
-            <a:r>
-              <a:t>Can we upload any zest someone sends us?</a:t>
-            </a:r>
-          </a:p>
-          <a:p>
-            <a:r>
-              <a:t>Only upload packages you trust for now. Packages run on the same domain as the tool; a separate domain is the next security step.</a:t>
-            </a:r>
-          </a:p>
-          <a:p/>
-          <a:p>
-            <a:r>
-              <a:t>Support?</a:t>
-            </a:r>
-          </a:p>
-          <a:p>
-            <a:r>
-              <a:t>[Kyle: your answer.]</a:t>
-            </a:r>
-          </a:p>
-          <a:p/>
-          <a:p>
-            <a:r>
-              <a:t>When does the server code come out?</a:t>
-            </a:r>
-          </a:p>
-          <a:p>
-            <a:r>
-              <a:t>[Kyle: your answer.] Fill out the form and I'll let you know.</a:t>
+              <a:t>Take questions. Answer them in your own words.</a:t>
             </a:r>
           </a:p>
         </p:txBody>
@@ -2533,7 +2400,7 @@
           <a:p/>
           <a:p>
             <a:r>
-              <a:t>[Kyle: the session title says "From PhET to Keyboarding". If you want, mention where PhET-style simulations fit here.]</a:t>
+              <a:t>Along the way we tested it with PhET-style science simulations, with an explore mode the teacher grades and a challenge mode that grades itself. That's where the "From PhET" in the title comes from.</a:t>
             </a:r>
           </a:p>
         </p:txBody>
@@ -28565,11 +28432,11 @@
           <a:p>
             <a:pPr algn="l">
               <a:spcAft>
-                <a:spcPts val="1400"/>
+                <a:spcPts val="200"/>
               </a:spcAft>
             </a:pPr>
             <a:r>
-              <a:rPr sz="1500" b="0" i="0">
+              <a:rPr sz="1400" b="0" i="0">
                 <a:solidFill>
                   <a:srgbClr val="FFFFFF"/>
                 </a:solidFill>
@@ -28581,11 +28448,27 @@
           <a:p>
             <a:pPr algn="l">
               <a:spcAft>
-                <a:spcPts val="1400"/>
+                <a:spcPts val="1000"/>
               </a:spcAft>
             </a:pPr>
             <a:r>
-              <a:rPr sz="1500" b="0" i="0">
+              <a:rPr sz="1100" b="0" i="0">
+                <a:solidFill>
+                  <a:srgbClr val="25AEFA"/>
+                </a:solidFill>
+                <a:latin typeface="Roboto"/>
+              </a:rPr>
+              <a:t>github.com/VirtualArkansasOrg/zest-spec</a:t>
+            </a:r>
+          </a:p>
+          <a:p>
+            <a:pPr algn="l">
+              <a:spcAft>
+                <a:spcPts val="200"/>
+              </a:spcAft>
+            </a:pPr>
+            <a:r>
+              <a:rPr sz="1400" b="0" i="0">
                 <a:solidFill>
                   <a:srgbClr val="FFFFFF"/>
                 </a:solidFill>
@@ -28597,11 +28480,27 @@
           <a:p>
             <a:pPr algn="l">
               <a:spcAft>
-                <a:spcPts val="0"/>
+                <a:spcPts val="1000"/>
               </a:spcAft>
             </a:pPr>
             <a:r>
-              <a:rPr sz="1500" b="0" i="0">
+              <a:rPr sz="1100" b="0" i="0">
+                <a:solidFill>
+                  <a:srgbClr val="25AEFA"/>
+                </a:solidFill>
+                <a:latin typeface="Roboto"/>
+              </a:rPr>
+              <a:t>github.com/VirtualArkansasOrg/zest-creator</a:t>
+            </a:r>
+          </a:p>
+          <a:p>
+            <a:pPr algn="l">
+              <a:spcAft>
+                <a:spcPts val="0"/>
+              </a:spcAft>
+            </a:pPr>
+            <a:r>
+              <a:rPr sz="1400" b="0" i="0">
                 <a:solidFill>
                   <a:srgbClr val="FFFFFF"/>
                 </a:solidFill>
@@ -38081,7 +37980,7 @@
           <a:p>
             <a:pPr algn="l">
               <a:spcAft>
-                <a:spcPts val="600"/>
+                <a:spcPts val="1000"/>
               </a:spcAft>
             </a:pPr>
             <a:r>
@@ -38092,6 +37991,22 @@
                 <a:latin typeface="Roboto"/>
               </a:rPr>
               <a:t>We built Zest for our own courses first, one need at a time.</a:t>
+            </a:r>
+          </a:p>
+          <a:p>
+            <a:pPr algn="l">
+              <a:spcAft>
+                <a:spcPts val="1000"/>
+              </a:spcAft>
+            </a:pPr>
+            <a:r>
+              <a:rPr sz="1200" b="0" i="1">
+                <a:solidFill>
+                  <a:srgbClr val="605F5E"/>
+                </a:solidFill>
+                <a:latin typeface="Roboto"/>
+              </a:rPr>
+              <a:t>Along the way we tested it with PhET-style science simulations.</a:t>
             </a:r>
           </a:p>
         </p:txBody>

--- a/presentations/2026-vlla/deck/zest-vlla-2026.pptx
+++ b/presentations/2026-vlla/deck/zest-vlla-2026.pptx
@@ -2091,7 +2091,7 @@
           <a:p/>
           <a:p>
             <a:r>
-              <a:t>PLAY THE BUILD RECORDING (1:41). It's a real run, sped up; talk over it.</a:t>
+              <a:t>CLICK THE PICTURE (or the play button) to open the build recording in Drive, then play it full screen. It's 1:41, narrated, a real run sped up. Let the narration carry it; add a word here and there.</a:t>
             </a:r>
           </a:p>
           <a:p/>
